--- a/docs/meeting/2026_05_06_for_investors.pptx
+++ b/docs/meeting/2026_05_06_for_investors.pptx
@@ -5,7 +5,7 @@
     <p:sldMasterId id="2147483648" r:id="rId1"/>
   </p:sldMasterIdLst>
   <p:notesMasterIdLst>
-    <p:notesMasterId r:id="rId38"/>
+    <p:notesMasterId r:id="rId31"/>
   </p:notesMasterIdLst>
   <p:sldIdLst>
     <p:sldId id="1574" r:id="rId2"/>
@@ -14,36 +14,29 @@
     <p:sldId id="1581" r:id="rId5"/>
     <p:sldId id="1670" r:id="rId6"/>
     <p:sldId id="1591" r:id="rId7"/>
-    <p:sldId id="1613" r:id="rId8"/>
-    <p:sldId id="1649" r:id="rId9"/>
-    <p:sldId id="1642" r:id="rId10"/>
-    <p:sldId id="1652" r:id="rId11"/>
-    <p:sldId id="1651" r:id="rId12"/>
-    <p:sldId id="1628" r:id="rId13"/>
-    <p:sldId id="1653" r:id="rId14"/>
-    <p:sldId id="1678" r:id="rId15"/>
-    <p:sldId id="1688" r:id="rId16"/>
-    <p:sldId id="1686" r:id="rId17"/>
-    <p:sldId id="1687" r:id="rId18"/>
-    <p:sldId id="1681" r:id="rId19"/>
-    <p:sldId id="1718" r:id="rId20"/>
-    <p:sldId id="1694" r:id="rId21"/>
-    <p:sldId id="1690" r:id="rId22"/>
-    <p:sldId id="1717" r:id="rId23"/>
-    <p:sldId id="1695" r:id="rId24"/>
-    <p:sldId id="1696" r:id="rId25"/>
-    <p:sldId id="1715" r:id="rId26"/>
-    <p:sldId id="1716" r:id="rId27"/>
-    <p:sldId id="1697" r:id="rId28"/>
-    <p:sldId id="1698" r:id="rId29"/>
-    <p:sldId id="1700" r:id="rId30"/>
-    <p:sldId id="1673" r:id="rId31"/>
-    <p:sldId id="1677" r:id="rId32"/>
-    <p:sldId id="1655" r:id="rId33"/>
-    <p:sldId id="1684" r:id="rId34"/>
-    <p:sldId id="1720" r:id="rId35"/>
-    <p:sldId id="1719" r:id="rId36"/>
-    <p:sldId id="1596" r:id="rId37"/>
+    <p:sldId id="1649" r:id="rId8"/>
+    <p:sldId id="1678" r:id="rId9"/>
+    <p:sldId id="1688" r:id="rId10"/>
+    <p:sldId id="1686" r:id="rId11"/>
+    <p:sldId id="1687" r:id="rId12"/>
+    <p:sldId id="1681" r:id="rId13"/>
+    <p:sldId id="1718" r:id="rId14"/>
+    <p:sldId id="1694" r:id="rId15"/>
+    <p:sldId id="1717" r:id="rId16"/>
+    <p:sldId id="1695" r:id="rId17"/>
+    <p:sldId id="1696" r:id="rId18"/>
+    <p:sldId id="1715" r:id="rId19"/>
+    <p:sldId id="1716" r:id="rId20"/>
+    <p:sldId id="1697" r:id="rId21"/>
+    <p:sldId id="1698" r:id="rId22"/>
+    <p:sldId id="1700" r:id="rId23"/>
+    <p:sldId id="1673" r:id="rId24"/>
+    <p:sldId id="1677" r:id="rId25"/>
+    <p:sldId id="1655" r:id="rId26"/>
+    <p:sldId id="1684" r:id="rId27"/>
+    <p:sldId id="1720" r:id="rId28"/>
+    <p:sldId id="1721" r:id="rId29"/>
+    <p:sldId id="1596" r:id="rId30"/>
   </p:sldIdLst>
   <p:sldSz cx="12192000" cy="6858000"/>
   <p:notesSz cx="6858000" cy="9144000"/>
@@ -153,13 +146,7 @@
             <p14:sldId id="1581"/>
             <p14:sldId id="1670"/>
             <p14:sldId id="1591"/>
-            <p14:sldId id="1613"/>
             <p14:sldId id="1649"/>
-            <p14:sldId id="1642"/>
-            <p14:sldId id="1652"/>
-            <p14:sldId id="1651"/>
-            <p14:sldId id="1628"/>
-            <p14:sldId id="1653"/>
           </p14:sldIdLst>
         </p14:section>
         <p14:section name="Choosing Indicator" id="{41BA4D2E-EE9A-4912-AA84-C4B98F291FF6}">
@@ -175,7 +162,6 @@
         <p14:section name="Hypotheses" id="{DD1E1135-EFD8-4A85-AF51-780BF0DD8DE5}">
           <p14:sldIdLst>
             <p14:sldId id="1694"/>
-            <p14:sldId id="1690"/>
             <p14:sldId id="1717"/>
             <p14:sldId id="1695"/>
             <p14:sldId id="1696"/>
@@ -197,7 +183,7 @@
         <p14:section name="Data" id="{DB098AA4-3A76-49BC-B882-BA090BEB24C9}">
           <p14:sldIdLst>
             <p14:sldId id="1720"/>
-            <p14:sldId id="1719"/>
+            <p14:sldId id="1721"/>
             <p14:sldId id="1596"/>
           </p14:sldIdLst>
         </p14:section>
@@ -2237,7 +2223,7 @@
         <a:lstStyle/>
         <a:p>
           <a:r>
-            <a:rPr lang="en-US"/>
+            <a:rPr lang="en-US" dirty="0"/>
             <a:t>Undirected Graph</a:t>
           </a:r>
         </a:p>
@@ -3343,7 +3329,7 @@
             <a:buNone/>
           </a:pPr>
           <a:r>
-            <a:rPr lang="en-US" sz="3500" kern="1200"/>
+            <a:rPr lang="en-US" sz="3500" kern="1200" dirty="0"/>
             <a:t>Undirected Graph</a:t>
           </a:r>
         </a:p>
@@ -6516,7 +6502,7 @@
           <a:p>
             <a:fld id="{2915196C-CDBC-4DEE-A220-849C85FC22AC}" type="datetimeFigureOut">
               <a:rPr lang="he-IL" smtClean="0"/>
-              <a:t>י"ט/אייר/תשפ"ו</a:t>
+              <a:t>כ"ג/אייר/תשפ"ו</a:t>
             </a:fld>
             <a:endParaRPr lang="he-IL"/>
           </a:p>
@@ -6904,121 +6890,6 @@
   <p:cSld>
     <p:spTree>
       <p:nvGrpSpPr>
-        <p:cNvPr id="1" name="">
-          <a:extLst>
-            <a:ext uri="{FF2B5EF4-FFF2-40B4-BE49-F238E27FC236}">
-              <a16:creationId xmlns:a16="http://schemas.microsoft.com/office/drawing/2014/main" id="{F72473ED-A99E-1255-DF0A-F46C0A3F8A2E}"/>
-            </a:ext>
-          </a:extLst>
-        </p:cNvPr>
-        <p:cNvGrpSpPr/>
-        <p:nvPr/>
-      </p:nvGrpSpPr>
-      <p:grpSpPr>
-        <a:xfrm>
-          <a:off x="0" y="0"/>
-          <a:ext cx="0" cy="0"/>
-          <a:chOff x="0" y="0"/>
-          <a:chExt cx="0" cy="0"/>
-        </a:xfrm>
-      </p:grpSpPr>
-      <p:sp>
-        <p:nvSpPr>
-          <p:cNvPr id="2" name="Slide Image Placeholder 1">
-            <a:extLst>
-              <a:ext uri="{FF2B5EF4-FFF2-40B4-BE49-F238E27FC236}">
-                <a16:creationId xmlns:a16="http://schemas.microsoft.com/office/drawing/2014/main" id="{B138042E-74BF-F12B-EB05-B5A12A791608}"/>
-              </a:ext>
-            </a:extLst>
-          </p:cNvPr>
-          <p:cNvSpPr>
-            <a:spLocks noGrp="1" noRot="1" noChangeAspect="1"/>
-          </p:cNvSpPr>
-          <p:nvPr>
-            <p:ph type="sldImg"/>
-          </p:nvPr>
-        </p:nvSpPr>
-        <p:spPr/>
-        <p:txBody>
-          <a:bodyPr/>
-          <a:lstStyle/>
-          <a:p>
-            <a:endParaRPr lang="en-IL"/>
-          </a:p>
-        </p:txBody>
-      </p:sp>
-      <p:sp>
-        <p:nvSpPr>
-          <p:cNvPr id="3" name="Notes Placeholder 2">
-            <a:extLst>
-              <a:ext uri="{FF2B5EF4-FFF2-40B4-BE49-F238E27FC236}">
-                <a16:creationId xmlns:a16="http://schemas.microsoft.com/office/drawing/2014/main" id="{9FF9362C-8306-7A0F-CDF5-AFC8289AE917}"/>
-              </a:ext>
-            </a:extLst>
-          </p:cNvPr>
-          <p:cNvSpPr>
-            <a:spLocks noGrp="1"/>
-          </p:cNvSpPr>
-          <p:nvPr>
-            <p:ph type="body" idx="1"/>
-          </p:nvPr>
-        </p:nvSpPr>
-        <p:spPr/>
-        <p:txBody>
-          <a:bodyPr/>
-          <a:lstStyle/>
-          <a:p>
-            <a:endParaRPr lang="en-IL" dirty="0"/>
-          </a:p>
-        </p:txBody>
-      </p:sp>
-      <p:sp>
-        <p:nvSpPr>
-          <p:cNvPr id="4" name="Slide Number Placeholder 3">
-            <a:extLst>
-              <a:ext uri="{FF2B5EF4-FFF2-40B4-BE49-F238E27FC236}">
-                <a16:creationId xmlns:a16="http://schemas.microsoft.com/office/drawing/2014/main" id="{7C4EDC18-E9C8-4ECA-7039-35E23F9D9DA3}"/>
-              </a:ext>
-            </a:extLst>
-          </p:cNvPr>
-          <p:cNvSpPr>
-            <a:spLocks noGrp="1"/>
-          </p:cNvSpPr>
-          <p:nvPr>
-            <p:ph type="sldNum" sz="quarter" idx="5"/>
-          </p:nvPr>
-        </p:nvSpPr>
-        <p:spPr/>
-        <p:txBody>
-          <a:bodyPr/>
-          <a:lstStyle/>
-          <a:p>
-            <a:fld id="{7F6CD5E7-A5BE-4430-AD67-E129D63AAC5C}" type="slidenum">
-              <a:rPr lang="he-IL" smtClean="0"/>
-              <a:t>7</a:t>
-            </a:fld>
-            <a:endParaRPr lang="he-IL"/>
-          </a:p>
-        </p:txBody>
-      </p:sp>
-    </p:spTree>
-    <p:extLst>
-      <p:ext uri="{BB962C8B-B14F-4D97-AF65-F5344CB8AC3E}">
-        <p14:creationId xmlns:p14="http://schemas.microsoft.com/office/powerpoint/2010/main" val="2057236096"/>
-      </p:ext>
-    </p:extLst>
-  </p:cSld>
-  <p:clrMapOvr>
-    <a:masterClrMapping/>
-  </p:clrMapOvr>
-</p:notes>
-</file>
-
-<file path=ppt/notesSlides/notesSlide3.xml><?xml version="1.0" encoding="utf-8"?>
-<p:notes xmlns:a="http://schemas.openxmlformats.org/drawingml/2006/main" xmlns:r="http://schemas.openxmlformats.org/officeDocument/2006/relationships" xmlns:p="http://schemas.openxmlformats.org/presentationml/2006/main">
-  <p:cSld>
-    <p:spTree>
-      <p:nvGrpSpPr>
         <p:cNvPr id="1" name=""/>
         <p:cNvGrpSpPr/>
         <p:nvPr/>
@@ -7260,7 +7131,7 @@
           <a:p>
             <a:fld id="{7F6CD5E7-A5BE-4430-AD67-E129D63AAC5C}" type="slidenum">
               <a:rPr lang="he-IL" smtClean="0"/>
-              <a:t>36</a:t>
+              <a:t>29</a:t>
             </a:fld>
             <a:endParaRPr lang="he-IL"/>
           </a:p>
@@ -7465,7 +7336,7 @@
           <a:p>
             <a:fld id="{FC6B3A86-AB79-4388-8CA5-9FC4B834779B}" type="datetime8">
               <a:rPr lang="he-IL" smtClean="0"/>
-              <a:t>06 מאי 26</a:t>
+              <a:t>10 מאי 26</a:t>
             </a:fld>
             <a:endParaRPr lang="he-IL"/>
           </a:p>
@@ -7688,7 +7559,7 @@
           <a:p>
             <a:fld id="{18F56BC8-8E7D-4896-9980-77BC87FB8E3E}" type="datetime8">
               <a:rPr lang="he-IL" smtClean="0"/>
-              <a:t>06 מאי 26</a:t>
+              <a:t>10 מאי 26</a:t>
             </a:fld>
             <a:endParaRPr lang="he-IL"/>
           </a:p>
@@ -7921,7 +7792,7 @@
           <a:p>
             <a:fld id="{0FE327C8-CB36-417E-834B-544633ADCE63}" type="datetime8">
               <a:rPr lang="he-IL" smtClean="0"/>
-              <a:t>06 מאי 26</a:t>
+              <a:t>10 מאי 26</a:t>
             </a:fld>
             <a:endParaRPr lang="he-IL"/>
           </a:p>
@@ -8039,7 +7910,7 @@
           <a:p>
             <a:fld id="{8E065D1C-C98B-44F5-AB2A-FEE3E85D0A94}" type="datetime8">
               <a:rPr lang="he-IL" smtClean="0"/>
-              <a:t>06 מאי 26</a:t>
+              <a:t>10 מאי 26</a:t>
             </a:fld>
             <a:endParaRPr lang="he-IL"/>
           </a:p>
@@ -8354,7 +8225,7 @@
           <a:p>
             <a:fld id="{7634CBFB-2532-48BA-BAE2-ADD925390740}" type="datetime8">
               <a:rPr lang="he-IL" smtClean="0"/>
-              <a:t>06 מאי 26</a:t>
+              <a:t>10 מאי 26</a:t>
             </a:fld>
             <a:endParaRPr lang="he-IL"/>
           </a:p>
@@ -8637,7 +8508,7 @@
           <a:p>
             <a:fld id="{8EAC1FDD-37C4-4A6B-BF31-779943CE32CF}" type="datetime8">
               <a:rPr lang="he-IL" smtClean="0"/>
-              <a:t>06 מאי 26</a:t>
+              <a:t>10 מאי 26</a:t>
             </a:fld>
             <a:endParaRPr lang="he-IL"/>
           </a:p>
@@ -8950,7 +8821,7 @@
           <a:p>
             <a:fld id="{C73C226C-A76A-4927-8F1D-1BD4AC033ABB}" type="datetime8">
               <a:rPr lang="he-IL" smtClean="0"/>
-              <a:t>06 מאי 26</a:t>
+              <a:t>10 מאי 26</a:t>
             </a:fld>
             <a:endParaRPr lang="he-IL"/>
           </a:p>
@@ -9453,7 +9324,7 @@
           <a:p>
             <a:fld id="{430DF2BF-D428-43E9-B36B-6DD16CF93579}" type="datetime8">
               <a:rPr lang="he-IL" smtClean="0"/>
-              <a:t>06 מאי 26</a:t>
+              <a:t>10 מאי 26</a:t>
             </a:fld>
             <a:endParaRPr lang="he-IL"/>
           </a:p>
@@ -9600,7 +9471,7 @@
           <a:p>
             <a:fld id="{390A9136-4922-4C74-B05C-12CD0951E601}" type="datetime8">
               <a:rPr lang="he-IL" smtClean="0"/>
-              <a:t>06 מאי 26</a:t>
+              <a:t>10 מאי 26</a:t>
             </a:fld>
             <a:endParaRPr lang="he-IL"/>
           </a:p>
@@ -9718,7 +9589,7 @@
           <a:p>
             <a:fld id="{C29F3CA8-2E63-412C-AA06-0D760EBE5965}" type="datetime8">
               <a:rPr lang="he-IL" smtClean="0"/>
-              <a:t>06 מאי 26</a:t>
+              <a:t>10 מאי 26</a:t>
             </a:fld>
             <a:endParaRPr lang="he-IL"/>
           </a:p>
@@ -10040,7 +9911,7 @@
           <a:p>
             <a:fld id="{7AC7B867-AA4A-4FF3-AD8B-0AD0F18EE595}" type="datetime8">
               <a:rPr lang="he-IL" smtClean="0"/>
-              <a:t>06 מאי 26</a:t>
+              <a:t>10 מאי 26</a:t>
             </a:fld>
             <a:endParaRPr lang="he-IL"/>
           </a:p>
@@ -10338,7 +10209,7 @@
           <a:p>
             <a:fld id="{F5E9EBD3-88E8-46DB-BD3B-F935B7013014}" type="datetime8">
               <a:rPr lang="he-IL" smtClean="0"/>
-              <a:t>06 מאי 26</a:t>
+              <a:t>10 מאי 26</a:t>
             </a:fld>
             <a:endParaRPr lang="he-IL"/>
           </a:p>
@@ -10622,7 +10493,7 @@
           <a:p>
             <a:fld id="{8E065D1C-C98B-44F5-AB2A-FEE3E85D0A94}" type="datetime8">
               <a:rPr lang="he-IL" smtClean="0"/>
-              <a:t>06 מאי 26</a:t>
+              <a:t>10 מאי 26</a:t>
             </a:fld>
             <a:endParaRPr lang="he-IL"/>
           </a:p>
@@ -11744,1262 +11615,6 @@
 </file>
 
 <file path=ppt/slides/slide10.xml><?xml version="1.0" encoding="utf-8"?>
-<p:sld xmlns:a="http://schemas.openxmlformats.org/drawingml/2006/main" xmlns:r="http://schemas.openxmlformats.org/officeDocument/2006/relationships" xmlns:p="http://schemas.openxmlformats.org/presentationml/2006/main" show="0">
-  <p:cSld>
-    <p:spTree>
-      <p:nvGrpSpPr>
-        <p:cNvPr id="1" name="">
-          <a:extLst>
-            <a:ext uri="{FF2B5EF4-FFF2-40B4-BE49-F238E27FC236}">
-              <a16:creationId xmlns:a16="http://schemas.microsoft.com/office/drawing/2014/main" id="{C49A07AB-132C-A7F4-812F-3C59E7D3B345}"/>
-            </a:ext>
-          </a:extLst>
-        </p:cNvPr>
-        <p:cNvGrpSpPr/>
-        <p:nvPr/>
-      </p:nvGrpSpPr>
-      <p:grpSpPr>
-        <a:xfrm>
-          <a:off x="0" y="0"/>
-          <a:ext cx="0" cy="0"/>
-          <a:chOff x="0" y="0"/>
-          <a:chExt cx="0" cy="0"/>
-        </a:xfrm>
-      </p:grpSpPr>
-      <p:sp>
-        <p:nvSpPr>
-          <p:cNvPr id="2" name="Title 1">
-            <a:extLst>
-              <a:ext uri="{FF2B5EF4-FFF2-40B4-BE49-F238E27FC236}">
-                <a16:creationId xmlns:a16="http://schemas.microsoft.com/office/drawing/2014/main" id="{C86E5028-87C4-7748-C238-4F6CD4F7F5AA}"/>
-              </a:ext>
-            </a:extLst>
-          </p:cNvPr>
-          <p:cNvSpPr>
-            <a:spLocks noGrp="1"/>
-          </p:cNvSpPr>
-          <p:nvPr>
-            <p:ph type="title"/>
-          </p:nvPr>
-        </p:nvSpPr>
-        <p:spPr/>
-        <p:txBody>
-          <a:bodyPr/>
-          <a:lstStyle/>
-          <a:p>
-            <a:r>
-              <a:rPr lang="en-US" dirty="0"/>
-              <a:t>Indicators: Graph Theory </a:t>
-            </a:r>
-            <a:endParaRPr lang="en-IL" dirty="0"/>
-          </a:p>
-        </p:txBody>
-      </p:sp>
-      <p:sp>
-        <p:nvSpPr>
-          <p:cNvPr id="3" name="Content Placeholder 2">
-            <a:extLst>
-              <a:ext uri="{FF2B5EF4-FFF2-40B4-BE49-F238E27FC236}">
-                <a16:creationId xmlns:a16="http://schemas.microsoft.com/office/drawing/2014/main" id="{E6380650-68FF-C733-603E-557040DB58B8}"/>
-              </a:ext>
-            </a:extLst>
-          </p:cNvPr>
-          <p:cNvSpPr>
-            <a:spLocks noGrp="1"/>
-          </p:cNvSpPr>
-          <p:nvPr>
-            <p:ph idx="1"/>
-          </p:nvPr>
-        </p:nvSpPr>
-        <p:spPr>
-          <a:xfrm>
-            <a:off x="1243087" y="1825624"/>
-            <a:ext cx="10582656" cy="4879976"/>
-          </a:xfrm>
-        </p:spPr>
-        <p:txBody>
-          <a:bodyPr>
-            <a:normAutofit fontScale="92500" lnSpcReduction="10000"/>
-          </a:bodyPr>
-          <a:lstStyle/>
-          <a:p>
-            <a:pPr eaLnBrk="0" fontAlgn="base" hangingPunct="0">
-              <a:lnSpc>
-                <a:spcPct val="100000"/>
-              </a:lnSpc>
-              <a:spcBef>
-                <a:spcPct val="0"/>
-              </a:spcBef>
-              <a:spcAft>
-                <a:spcPct val="0"/>
-              </a:spcAft>
-            </a:pPr>
-            <a:r>
-              <a:rPr lang="en-IL" altLang="en-IL" b="1" dirty="0">
-                <a:latin typeface="Arial" panose="020B0604020202020204" pitchFamily="34" charset="0"/>
-              </a:rPr>
-              <a:t>Degree Centrality:</a:t>
-            </a:r>
-            <a:r>
-              <a:rPr lang="en-IL" altLang="en-IL" dirty="0">
-                <a:latin typeface="Arial" panose="020B0604020202020204" pitchFamily="34" charset="0"/>
-              </a:rPr>
-              <a:t> IO drivers tend to coordinate with many accounts, creating many direct connections. </a:t>
-            </a:r>
-            <a:endParaRPr lang="en-US" altLang="en-IL" dirty="0">
-              <a:latin typeface="Arial" panose="020B0604020202020204" pitchFamily="34" charset="0"/>
-            </a:endParaRPr>
-          </a:p>
-          <a:p>
-            <a:pPr eaLnBrk="0" fontAlgn="base" hangingPunct="0">
-              <a:lnSpc>
-                <a:spcPct val="100000"/>
-              </a:lnSpc>
-              <a:spcBef>
-                <a:spcPct val="0"/>
-              </a:spcBef>
-              <a:spcAft>
-                <a:spcPct val="0"/>
-              </a:spcAft>
-            </a:pPr>
-            <a:r>
-              <a:rPr lang="en-IL" altLang="en-IL" b="1" dirty="0">
-                <a:latin typeface="Arial" panose="020B0604020202020204" pitchFamily="34" charset="0"/>
-              </a:rPr>
-              <a:t>Betweenness Centrality:</a:t>
-            </a:r>
-            <a:r>
-              <a:rPr lang="en-IL" altLang="en-IL" dirty="0">
-                <a:latin typeface="Arial" panose="020B0604020202020204" pitchFamily="34" charset="0"/>
-              </a:rPr>
-              <a:t> IO drivers often connect different coordinated groups, acting as bridges between clusters. </a:t>
-            </a:r>
-            <a:endParaRPr lang="en-US" altLang="en-IL" dirty="0">
-              <a:latin typeface="Arial" panose="020B0604020202020204" pitchFamily="34" charset="0"/>
-            </a:endParaRPr>
-          </a:p>
-          <a:p>
-            <a:pPr eaLnBrk="0" fontAlgn="base" hangingPunct="0">
-              <a:lnSpc>
-                <a:spcPct val="100000"/>
-              </a:lnSpc>
-              <a:spcBef>
-                <a:spcPct val="0"/>
-              </a:spcBef>
-              <a:spcAft>
-                <a:spcPct val="0"/>
-              </a:spcAft>
-            </a:pPr>
-            <a:r>
-              <a:rPr lang="en-IL" altLang="en-IL" b="1" dirty="0">
-                <a:latin typeface="Arial" panose="020B0604020202020204" pitchFamily="34" charset="0"/>
-              </a:rPr>
-              <a:t>Harmonic Centrality:</a:t>
-            </a:r>
-            <a:r>
-              <a:rPr lang="en-IL" altLang="en-IL" dirty="0">
-                <a:latin typeface="Arial" panose="020B0604020202020204" pitchFamily="34" charset="0"/>
-              </a:rPr>
-              <a:t> IO drivers are close to many users, enabling fast coordination across the network. </a:t>
-            </a:r>
-            <a:endParaRPr lang="en-US" altLang="en-IL" dirty="0">
-              <a:latin typeface="Arial" panose="020B0604020202020204" pitchFamily="34" charset="0"/>
-            </a:endParaRPr>
-          </a:p>
-          <a:p>
-            <a:pPr eaLnBrk="0" fontAlgn="base" hangingPunct="0">
-              <a:lnSpc>
-                <a:spcPct val="100000"/>
-              </a:lnSpc>
-              <a:spcBef>
-                <a:spcPct val="0"/>
-              </a:spcBef>
-              <a:spcAft>
-                <a:spcPct val="0"/>
-              </a:spcAft>
-            </a:pPr>
-            <a:r>
-              <a:rPr lang="en-IL" altLang="en-IL" b="1" dirty="0">
-                <a:latin typeface="Arial" panose="020B0604020202020204" pitchFamily="34" charset="0"/>
-              </a:rPr>
-              <a:t>Eigenvector Centrality:</a:t>
-            </a:r>
-            <a:r>
-              <a:rPr lang="en-IL" altLang="en-IL" dirty="0">
-                <a:latin typeface="Arial" panose="020B0604020202020204" pitchFamily="34" charset="0"/>
-              </a:rPr>
-              <a:t> IO drivers are connected to other highly coordinated or central actors.</a:t>
-            </a:r>
-            <a:endParaRPr lang="en-US" altLang="en-IL" dirty="0">
-              <a:latin typeface="Arial" panose="020B0604020202020204" pitchFamily="34" charset="0"/>
-            </a:endParaRPr>
-          </a:p>
-          <a:p>
-            <a:pPr eaLnBrk="0" fontAlgn="base" hangingPunct="0">
-              <a:lnSpc>
-                <a:spcPct val="100000"/>
-              </a:lnSpc>
-              <a:spcBef>
-                <a:spcPct val="0"/>
-              </a:spcBef>
-              <a:spcAft>
-                <a:spcPct val="0"/>
-              </a:spcAft>
-            </a:pPr>
-            <a:r>
-              <a:rPr lang="en-IL" altLang="en-IL" b="1" dirty="0">
-                <a:latin typeface="Arial" panose="020B0604020202020204" pitchFamily="34" charset="0"/>
-              </a:rPr>
-              <a:t>PageRank:</a:t>
-            </a:r>
-            <a:r>
-              <a:rPr lang="en-IL" altLang="en-IL" dirty="0">
-                <a:latin typeface="Arial" panose="020B0604020202020204" pitchFamily="34" charset="0"/>
-              </a:rPr>
-              <a:t> IO drivers are reinforced by connections from other important coordinated users. </a:t>
-            </a:r>
-            <a:endParaRPr lang="en-US" altLang="en-IL" dirty="0">
-              <a:latin typeface="Arial" panose="020B0604020202020204" pitchFamily="34" charset="0"/>
-            </a:endParaRPr>
-          </a:p>
-          <a:p>
-            <a:pPr eaLnBrk="0" fontAlgn="base" hangingPunct="0">
-              <a:lnSpc>
-                <a:spcPct val="100000"/>
-              </a:lnSpc>
-              <a:spcBef>
-                <a:spcPct val="0"/>
-              </a:spcBef>
-              <a:spcAft>
-                <a:spcPct val="0"/>
-              </a:spcAft>
-            </a:pPr>
-            <a:r>
-              <a:rPr lang="en-IL" altLang="en-IL" b="1" dirty="0">
-                <a:latin typeface="Arial" panose="020B0604020202020204" pitchFamily="34" charset="0"/>
-              </a:rPr>
-              <a:t>K-core:</a:t>
-            </a:r>
-            <a:r>
-              <a:rPr lang="en-IL" altLang="en-IL" dirty="0">
-                <a:latin typeface="Arial" panose="020B0604020202020204" pitchFamily="34" charset="0"/>
-              </a:rPr>
-              <a:t> IO drivers are deeply embedded in dense, highly coordinated groups. </a:t>
-            </a:r>
-            <a:endParaRPr lang="en-US" altLang="en-IL" dirty="0">
-              <a:latin typeface="Arial" panose="020B0604020202020204" pitchFamily="34" charset="0"/>
-            </a:endParaRPr>
-          </a:p>
-          <a:p>
-            <a:pPr eaLnBrk="0" fontAlgn="base" hangingPunct="0">
-              <a:lnSpc>
-                <a:spcPct val="100000"/>
-              </a:lnSpc>
-              <a:spcBef>
-                <a:spcPct val="0"/>
-              </a:spcBef>
-              <a:spcAft>
-                <a:spcPct val="0"/>
-              </a:spcAft>
-            </a:pPr>
-            <a:r>
-              <a:rPr lang="en-IL" altLang="en-IL" b="1" dirty="0">
-                <a:latin typeface="Arial" panose="020B0604020202020204" pitchFamily="34" charset="0"/>
-              </a:rPr>
-              <a:t>Clustering:</a:t>
-            </a:r>
-            <a:r>
-              <a:rPr lang="en-IL" altLang="en-IL" dirty="0">
-                <a:latin typeface="Arial" panose="020B0604020202020204" pitchFamily="34" charset="0"/>
-              </a:rPr>
-              <a:t> IO drivers are part of tightly connected groups that coordinate actions together. </a:t>
-            </a:r>
-            <a:endParaRPr lang="en-US" altLang="en-IL" dirty="0">
-              <a:latin typeface="Arial" panose="020B0604020202020204" pitchFamily="34" charset="0"/>
-            </a:endParaRPr>
-          </a:p>
-          <a:p>
-            <a:pPr eaLnBrk="0" fontAlgn="base" hangingPunct="0">
-              <a:lnSpc>
-                <a:spcPct val="100000"/>
-              </a:lnSpc>
-              <a:spcBef>
-                <a:spcPct val="0"/>
-              </a:spcBef>
-              <a:spcAft>
-                <a:spcPct val="0"/>
-              </a:spcAft>
-            </a:pPr>
-            <a:r>
-              <a:rPr lang="en-IL" altLang="en-IL" b="1" dirty="0">
-                <a:latin typeface="Arial" panose="020B0604020202020204" pitchFamily="34" charset="0"/>
-              </a:rPr>
-              <a:t>Square Clustering:</a:t>
-            </a:r>
-            <a:r>
-              <a:rPr lang="en-IL" altLang="en-IL" dirty="0">
-                <a:latin typeface="Arial" panose="020B0604020202020204" pitchFamily="34" charset="0"/>
-              </a:rPr>
-              <a:t> IO drivers participate in small, repeated coordination patterns within tightly-knit groups. </a:t>
-            </a:r>
-          </a:p>
-        </p:txBody>
-      </p:sp>
-      <p:sp>
-        <p:nvSpPr>
-          <p:cNvPr id="4" name="Slide Number Placeholder 3">
-            <a:extLst>
-              <a:ext uri="{FF2B5EF4-FFF2-40B4-BE49-F238E27FC236}">
-                <a16:creationId xmlns:a16="http://schemas.microsoft.com/office/drawing/2014/main" id="{2A13FB25-F9AB-171E-E778-6E8C33B232AD}"/>
-              </a:ext>
-            </a:extLst>
-          </p:cNvPr>
-          <p:cNvSpPr>
-            <a:spLocks noGrp="1"/>
-          </p:cNvSpPr>
-          <p:nvPr>
-            <p:ph type="sldNum" sz="quarter" idx="12"/>
-          </p:nvPr>
-        </p:nvSpPr>
-        <p:spPr/>
-        <p:txBody>
-          <a:bodyPr/>
-          <a:lstStyle/>
-          <a:p>
-            <a:fld id="{E6AB8EDD-9EF2-4633-A1C2-4D908C1019B4}" type="slidenum">
-              <a:rPr lang="he-IL" smtClean="0"/>
-              <a:t>10</a:t>
-            </a:fld>
-            <a:endParaRPr lang="he-IL"/>
-          </a:p>
-        </p:txBody>
-      </p:sp>
-    </p:spTree>
-    <p:extLst>
-      <p:ext uri="{BB962C8B-B14F-4D97-AF65-F5344CB8AC3E}">
-        <p14:creationId xmlns:p14="http://schemas.microsoft.com/office/powerpoint/2010/main" val="2195288655"/>
-      </p:ext>
-    </p:extLst>
-  </p:cSld>
-  <p:clrMapOvr>
-    <a:masterClrMapping/>
-  </p:clrMapOvr>
-</p:sld>
-</file>
-
-<file path=ppt/slides/slide11.xml><?xml version="1.0" encoding="utf-8"?>
-<p:sld xmlns:a="http://schemas.openxmlformats.org/drawingml/2006/main" xmlns:r="http://schemas.openxmlformats.org/officeDocument/2006/relationships" xmlns:p="http://schemas.openxmlformats.org/presentationml/2006/main" show="0">
-  <p:cSld>
-    <p:spTree>
-      <p:nvGrpSpPr>
-        <p:cNvPr id="1" name=""/>
-        <p:cNvGrpSpPr/>
-        <p:nvPr/>
-      </p:nvGrpSpPr>
-      <p:grpSpPr>
-        <a:xfrm>
-          <a:off x="0" y="0"/>
-          <a:ext cx="0" cy="0"/>
-          <a:chOff x="0" y="0"/>
-          <a:chExt cx="0" cy="0"/>
-        </a:xfrm>
-      </p:grpSpPr>
-      <p:sp>
-        <p:nvSpPr>
-          <p:cNvPr id="2" name="Title 1">
-            <a:extLst>
-              <a:ext uri="{FF2B5EF4-FFF2-40B4-BE49-F238E27FC236}">
-                <a16:creationId xmlns:a16="http://schemas.microsoft.com/office/drawing/2014/main" id="{BEE09D58-D596-3589-1CC6-34787244A088}"/>
-              </a:ext>
-            </a:extLst>
-          </p:cNvPr>
-          <p:cNvSpPr>
-            <a:spLocks noGrp="1"/>
-          </p:cNvSpPr>
-          <p:nvPr>
-            <p:ph type="title"/>
-          </p:nvPr>
-        </p:nvSpPr>
-        <p:spPr/>
-        <p:txBody>
-          <a:bodyPr/>
-          <a:lstStyle/>
-          <a:p>
-            <a:r>
-              <a:rPr lang="en-US" dirty="0"/>
-              <a:t>Indicators: Key Score and Boost </a:t>
-            </a:r>
-            <a:endParaRPr lang="en-IL" dirty="0"/>
-          </a:p>
-        </p:txBody>
-      </p:sp>
-      <p:sp>
-        <p:nvSpPr>
-          <p:cNvPr id="3" name="Content Placeholder 2">
-            <a:extLst>
-              <a:ext uri="{FF2B5EF4-FFF2-40B4-BE49-F238E27FC236}">
-                <a16:creationId xmlns:a16="http://schemas.microsoft.com/office/drawing/2014/main" id="{93BAA2BB-9036-5A2D-A38B-0735CF846418}"/>
-              </a:ext>
-            </a:extLst>
-          </p:cNvPr>
-          <p:cNvSpPr>
-            <a:spLocks noGrp="1"/>
-          </p:cNvSpPr>
-          <p:nvPr>
-            <p:ph idx="1"/>
-          </p:nvPr>
-        </p:nvSpPr>
-        <p:spPr/>
-        <p:txBody>
-          <a:bodyPr/>
-          <a:lstStyle/>
-          <a:p>
-            <a:r>
-              <a:rPr lang="en-GB" dirty="0"/>
-              <a:t>These indicators quantify user behaviour by measuring the extent to which an individual </a:t>
-            </a:r>
-            <a:r>
-              <a:rPr lang="en-GB" b="1" dirty="0"/>
-              <a:t>leads</a:t>
-            </a:r>
-            <a:r>
-              <a:rPr lang="en-GB" dirty="0"/>
-              <a:t>, </a:t>
-            </a:r>
-            <a:r>
-              <a:rPr lang="en-GB" b="1" dirty="0"/>
-              <a:t>focuses</a:t>
-            </a:r>
-            <a:r>
-              <a:rPr lang="en-GB" dirty="0"/>
-              <a:t>, and </a:t>
-            </a:r>
-            <a:r>
-              <a:rPr lang="en-GB" b="1" dirty="0"/>
-              <a:t>drives</a:t>
-            </a:r>
-            <a:r>
-              <a:rPr lang="en-GB" dirty="0"/>
-              <a:t> activity within discussions. </a:t>
-            </a:r>
-          </a:p>
-          <a:p>
-            <a:r>
-              <a:rPr lang="en-GB" dirty="0"/>
-              <a:t>The indicators capture how strongly a user contributes to topics, whether their activity is concentrated on specific narratives, and how much their actions are associated with increased engagement. </a:t>
-            </a:r>
-          </a:p>
-          <a:p>
-            <a:r>
-              <a:rPr lang="en-GB" dirty="0"/>
-              <a:t>By providing a consistent numeric representation of these behavioural patterns, they enable systematic comparison between users.</a:t>
-            </a:r>
-            <a:endParaRPr lang="en-IL" dirty="0"/>
-          </a:p>
-        </p:txBody>
-      </p:sp>
-      <p:sp>
-        <p:nvSpPr>
-          <p:cNvPr id="4" name="Slide Number Placeholder 3">
-            <a:extLst>
-              <a:ext uri="{FF2B5EF4-FFF2-40B4-BE49-F238E27FC236}">
-                <a16:creationId xmlns:a16="http://schemas.microsoft.com/office/drawing/2014/main" id="{E0359E93-1E78-861A-D72D-672D08E32321}"/>
-              </a:ext>
-            </a:extLst>
-          </p:cNvPr>
-          <p:cNvSpPr>
-            <a:spLocks noGrp="1"/>
-          </p:cNvSpPr>
-          <p:nvPr>
-            <p:ph type="sldNum" sz="quarter" idx="12"/>
-          </p:nvPr>
-        </p:nvSpPr>
-        <p:spPr/>
-        <p:txBody>
-          <a:bodyPr/>
-          <a:lstStyle/>
-          <a:p>
-            <a:fld id="{E6AB8EDD-9EF2-4633-A1C2-4D908C1019B4}" type="slidenum">
-              <a:rPr lang="he-IL" smtClean="0"/>
-              <a:t>11</a:t>
-            </a:fld>
-            <a:endParaRPr lang="he-IL"/>
-          </a:p>
-        </p:txBody>
-      </p:sp>
-    </p:spTree>
-    <p:extLst>
-      <p:ext uri="{BB962C8B-B14F-4D97-AF65-F5344CB8AC3E}">
-        <p14:creationId xmlns:p14="http://schemas.microsoft.com/office/powerpoint/2010/main" val="1501545300"/>
-      </p:ext>
-    </p:extLst>
-  </p:cSld>
-  <p:clrMapOvr>
-    <a:masterClrMapping/>
-  </p:clrMapOvr>
-</p:sld>
-</file>
-
-<file path=ppt/slides/slide12.xml><?xml version="1.0" encoding="utf-8"?>
-<p:sld xmlns:a="http://schemas.openxmlformats.org/drawingml/2006/main" xmlns:r="http://schemas.openxmlformats.org/officeDocument/2006/relationships" xmlns:p="http://schemas.openxmlformats.org/presentationml/2006/main" show="0">
-  <p:cSld>
-    <p:spTree>
-      <p:nvGrpSpPr>
-        <p:cNvPr id="1" name=""/>
-        <p:cNvGrpSpPr/>
-        <p:nvPr/>
-      </p:nvGrpSpPr>
-      <p:grpSpPr>
-        <a:xfrm>
-          <a:off x="0" y="0"/>
-          <a:ext cx="0" cy="0"/>
-          <a:chOff x="0" y="0"/>
-          <a:chExt cx="0" cy="0"/>
-        </a:xfrm>
-      </p:grpSpPr>
-      <p:sp>
-        <p:nvSpPr>
-          <p:cNvPr id="2" name="Title 1">
-            <a:extLst>
-              <a:ext uri="{FF2B5EF4-FFF2-40B4-BE49-F238E27FC236}">
-                <a16:creationId xmlns:a16="http://schemas.microsoft.com/office/drawing/2014/main" id="{E180CF04-DED3-2E08-8761-891A60FEF6EA}"/>
-              </a:ext>
-            </a:extLst>
-          </p:cNvPr>
-          <p:cNvSpPr>
-            <a:spLocks noGrp="1"/>
-          </p:cNvSpPr>
-          <p:nvPr>
-            <p:ph type="title"/>
-          </p:nvPr>
-        </p:nvSpPr>
-        <p:spPr/>
-        <p:txBody>
-          <a:bodyPr/>
-          <a:lstStyle/>
-          <a:p>
-            <a:r>
-              <a:rPr lang="en-US" dirty="0"/>
-              <a:t>Indicators: Key Score and Boost </a:t>
-            </a:r>
-            <a:endParaRPr lang="en-IL" dirty="0"/>
-          </a:p>
-        </p:txBody>
-      </p:sp>
-      <p:sp>
-        <p:nvSpPr>
-          <p:cNvPr id="3" name="Content Placeholder 2">
-            <a:extLst>
-              <a:ext uri="{FF2B5EF4-FFF2-40B4-BE49-F238E27FC236}">
-                <a16:creationId xmlns:a16="http://schemas.microsoft.com/office/drawing/2014/main" id="{61818744-AA3F-0C94-68C3-B98E69E97B93}"/>
-              </a:ext>
-            </a:extLst>
-          </p:cNvPr>
-          <p:cNvSpPr>
-            <a:spLocks noGrp="1"/>
-          </p:cNvSpPr>
-          <p:nvPr>
-            <p:ph idx="1"/>
-          </p:nvPr>
-        </p:nvSpPr>
-        <p:spPr>
-          <a:xfrm>
-            <a:off x="1243087" y="1825624"/>
-            <a:ext cx="10582656" cy="4879976"/>
-          </a:xfrm>
-        </p:spPr>
-        <p:txBody>
-          <a:bodyPr>
-            <a:normAutofit/>
-          </a:bodyPr>
-          <a:lstStyle/>
-          <a:p>
-            <a:r>
-              <a:rPr lang="en-GB" b="1" dirty="0"/>
-              <a:t>Key Score Sum: </a:t>
-            </a:r>
-            <a:r>
-              <a:rPr lang="en-GB" dirty="0"/>
-              <a:t>The sum of the all the per-topic </a:t>
-            </a:r>
-            <a:r>
-              <a:rPr lang="en-GB" dirty="0" err="1"/>
-              <a:t>tdidf</a:t>
-            </a:r>
-            <a:r>
-              <a:rPr lang="en-GB" dirty="0"/>
-              <a:t> score. How much the author is a leading participant in the topics.</a:t>
-            </a:r>
-          </a:p>
-          <a:p>
-            <a:r>
-              <a:rPr lang="en-GB" b="1" dirty="0"/>
-              <a:t>Key Score Dominance: </a:t>
-            </a:r>
-            <a:r>
-              <a:rPr lang="en-GB" dirty="0"/>
-              <a:t>Author’s</a:t>
-            </a:r>
-            <a:r>
-              <a:rPr lang="en-GB" b="1" dirty="0"/>
-              <a:t> </a:t>
-            </a:r>
-            <a:r>
-              <a:rPr lang="en-GB" dirty="0"/>
-              <a:t>max score in a topic, divided by total score across all topics. Higher values indicate the author is mostly a leading participate in specific(s) topic(s).</a:t>
-            </a:r>
-          </a:p>
-          <a:p>
-            <a:r>
-              <a:rPr lang="en-GB" b="1" dirty="0"/>
-              <a:t>Posting Dominance: </a:t>
-            </a:r>
-            <a:r>
-              <a:rPr lang="en-GB" dirty="0"/>
-              <a:t>Author’s max number of posts in a topic, divided by total number of posts across all topics. Higher values indicate the author is mostly a leading participate in specific(s) topic(s).</a:t>
-            </a:r>
-          </a:p>
-          <a:p>
-            <a:r>
-              <a:rPr lang="en-GB" b="1" dirty="0"/>
-              <a:t>Boost Score : </a:t>
-            </a:r>
-            <a:r>
-              <a:rPr lang="en-GB" dirty="0"/>
-              <a:t>A quantitative measure calculated as the cumulative burst weights associated with a user's activity, based on discussion volume increases occurring shortly after the user posts or contributes.</a:t>
-            </a:r>
-          </a:p>
-          <a:p>
-            <a:endParaRPr lang="en-GB" dirty="0">
-              <a:highlight>
-                <a:srgbClr val="FFFF00"/>
-              </a:highlight>
-            </a:endParaRPr>
-          </a:p>
-          <a:p>
-            <a:endParaRPr lang="en-GB" dirty="0">
-              <a:highlight>
-                <a:srgbClr val="FFFF00"/>
-              </a:highlight>
-            </a:endParaRPr>
-          </a:p>
-          <a:p>
-            <a:endParaRPr lang="en-GB" b="1" dirty="0">
-              <a:highlight>
-                <a:srgbClr val="FFFF00"/>
-              </a:highlight>
-            </a:endParaRPr>
-          </a:p>
-        </p:txBody>
-      </p:sp>
-      <p:sp>
-        <p:nvSpPr>
-          <p:cNvPr id="4" name="Slide Number Placeholder 3">
-            <a:extLst>
-              <a:ext uri="{FF2B5EF4-FFF2-40B4-BE49-F238E27FC236}">
-                <a16:creationId xmlns:a16="http://schemas.microsoft.com/office/drawing/2014/main" id="{B369E058-D5C2-C2B9-04B1-D7B341490D5D}"/>
-              </a:ext>
-            </a:extLst>
-          </p:cNvPr>
-          <p:cNvSpPr>
-            <a:spLocks noGrp="1"/>
-          </p:cNvSpPr>
-          <p:nvPr>
-            <p:ph type="sldNum" sz="quarter" idx="12"/>
-          </p:nvPr>
-        </p:nvSpPr>
-        <p:spPr/>
-        <p:txBody>
-          <a:bodyPr/>
-          <a:lstStyle/>
-          <a:p>
-            <a:fld id="{E6AB8EDD-9EF2-4633-A1C2-4D908C1019B4}" type="slidenum">
-              <a:rPr lang="he-IL" smtClean="0"/>
-              <a:t>12</a:t>
-            </a:fld>
-            <a:endParaRPr lang="he-IL"/>
-          </a:p>
-        </p:txBody>
-      </p:sp>
-    </p:spTree>
-    <p:extLst>
-      <p:ext uri="{BB962C8B-B14F-4D97-AF65-F5344CB8AC3E}">
-        <p14:creationId xmlns:p14="http://schemas.microsoft.com/office/powerpoint/2010/main" val="3277267947"/>
-      </p:ext>
-    </p:extLst>
-  </p:cSld>
-  <p:clrMapOvr>
-    <a:masterClrMapping/>
-  </p:clrMapOvr>
-</p:sld>
-</file>
-
-<file path=ppt/slides/slide13.xml><?xml version="1.0" encoding="utf-8"?>
-<p:sld xmlns:a="http://schemas.openxmlformats.org/drawingml/2006/main" xmlns:r="http://schemas.openxmlformats.org/officeDocument/2006/relationships" xmlns:p="http://schemas.openxmlformats.org/presentationml/2006/main" show="0">
-  <p:cSld>
-    <p:spTree>
-      <p:nvGrpSpPr>
-        <p:cNvPr id="1" name="">
-          <a:extLst>
-            <a:ext uri="{FF2B5EF4-FFF2-40B4-BE49-F238E27FC236}">
-              <a16:creationId xmlns:a16="http://schemas.microsoft.com/office/drawing/2014/main" id="{CD1A8DE0-4812-F64C-3F70-17162E2FF528}"/>
-            </a:ext>
-          </a:extLst>
-        </p:cNvPr>
-        <p:cNvGrpSpPr/>
-        <p:nvPr/>
-      </p:nvGrpSpPr>
-      <p:grpSpPr>
-        <a:xfrm>
-          <a:off x="0" y="0"/>
-          <a:ext cx="0" cy="0"/>
-          <a:chOff x="0" y="0"/>
-          <a:chExt cx="0" cy="0"/>
-        </a:xfrm>
-      </p:grpSpPr>
-      <p:sp>
-        <p:nvSpPr>
-          <p:cNvPr id="2" name="Title 1">
-            <a:extLst>
-              <a:ext uri="{FF2B5EF4-FFF2-40B4-BE49-F238E27FC236}">
-                <a16:creationId xmlns:a16="http://schemas.microsoft.com/office/drawing/2014/main" id="{4CBD2B2B-AB86-F51C-7830-5FBE03EC18D7}"/>
-              </a:ext>
-            </a:extLst>
-          </p:cNvPr>
-          <p:cNvSpPr>
-            <a:spLocks noGrp="1"/>
-          </p:cNvSpPr>
-          <p:nvPr>
-            <p:ph type="title"/>
-          </p:nvPr>
-        </p:nvSpPr>
-        <p:spPr/>
-        <p:txBody>
-          <a:bodyPr/>
-          <a:lstStyle/>
-          <a:p>
-            <a:r>
-              <a:rPr lang="en-US" dirty="0"/>
-              <a:t>Indicators: Key Score and Boost </a:t>
-            </a:r>
-            <a:endParaRPr lang="en-IL" dirty="0"/>
-          </a:p>
-        </p:txBody>
-      </p:sp>
-      <p:sp>
-        <p:nvSpPr>
-          <p:cNvPr id="3" name="Content Placeholder 2">
-            <a:extLst>
-              <a:ext uri="{FF2B5EF4-FFF2-40B4-BE49-F238E27FC236}">
-                <a16:creationId xmlns:a16="http://schemas.microsoft.com/office/drawing/2014/main" id="{FB6C1624-E6C8-6B2A-46D6-7E793BC04C23}"/>
-              </a:ext>
-            </a:extLst>
-          </p:cNvPr>
-          <p:cNvSpPr>
-            <a:spLocks noGrp="1"/>
-          </p:cNvSpPr>
-          <p:nvPr>
-            <p:ph idx="1"/>
-          </p:nvPr>
-        </p:nvSpPr>
-        <p:spPr>
-          <a:xfrm>
-            <a:off x="1243087" y="1825624"/>
-            <a:ext cx="10582656" cy="4879976"/>
-          </a:xfrm>
-        </p:spPr>
-        <p:txBody>
-          <a:bodyPr>
-            <a:normAutofit/>
-          </a:bodyPr>
-          <a:lstStyle/>
-          <a:p>
-            <a:pPr eaLnBrk="0" fontAlgn="base" hangingPunct="0">
-              <a:lnSpc>
-                <a:spcPct val="100000"/>
-              </a:lnSpc>
-              <a:spcBef>
-                <a:spcPct val="0"/>
-              </a:spcBef>
-              <a:spcAft>
-                <a:spcPct val="0"/>
-              </a:spcAft>
-            </a:pPr>
-            <a:r>
-              <a:rPr lang="en-IL" altLang="en-IL" b="1" dirty="0">
-                <a:latin typeface="Arial" panose="020B0604020202020204" pitchFamily="34" charset="0"/>
-              </a:rPr>
-              <a:t>Key Score Sum:</a:t>
-            </a:r>
-            <a:r>
-              <a:rPr lang="en-IL" altLang="en-IL" dirty="0">
-                <a:latin typeface="Arial" panose="020B0604020202020204" pitchFamily="34" charset="0"/>
-              </a:rPr>
-              <a:t> IO drivers tend to consistently lead discussions across topics, resulting in high overall contribution scores. </a:t>
-            </a:r>
-            <a:endParaRPr lang="en-US" altLang="en-IL" dirty="0">
-              <a:latin typeface="Arial" panose="020B0604020202020204" pitchFamily="34" charset="0"/>
-            </a:endParaRPr>
-          </a:p>
-          <a:p>
-            <a:pPr eaLnBrk="0" fontAlgn="base" hangingPunct="0">
-              <a:lnSpc>
-                <a:spcPct val="100000"/>
-              </a:lnSpc>
-              <a:spcBef>
-                <a:spcPct val="0"/>
-              </a:spcBef>
-              <a:spcAft>
-                <a:spcPct val="0"/>
-              </a:spcAft>
-            </a:pPr>
-            <a:r>
-              <a:rPr lang="en-IL" altLang="en-IL" b="1" dirty="0">
-                <a:latin typeface="Arial" panose="020B0604020202020204" pitchFamily="34" charset="0"/>
-              </a:rPr>
-              <a:t>Key Score Dominance:</a:t>
-            </a:r>
-            <a:r>
-              <a:rPr lang="en-IL" altLang="en-IL" dirty="0">
-                <a:latin typeface="Arial" panose="020B0604020202020204" pitchFamily="34" charset="0"/>
-              </a:rPr>
-              <a:t> IO drivers often focus on specific narratives where they act as main leaders. </a:t>
-            </a:r>
-            <a:endParaRPr lang="en-US" altLang="en-IL" dirty="0">
-              <a:latin typeface="Arial" panose="020B0604020202020204" pitchFamily="34" charset="0"/>
-            </a:endParaRPr>
-          </a:p>
-          <a:p>
-            <a:pPr eaLnBrk="0" fontAlgn="base" hangingPunct="0">
-              <a:lnSpc>
-                <a:spcPct val="100000"/>
-              </a:lnSpc>
-              <a:spcBef>
-                <a:spcPct val="0"/>
-              </a:spcBef>
-              <a:spcAft>
-                <a:spcPct val="0"/>
-              </a:spcAft>
-            </a:pPr>
-            <a:r>
-              <a:rPr lang="en-IL" altLang="en-IL" b="1" dirty="0">
-                <a:latin typeface="Arial" panose="020B0604020202020204" pitchFamily="34" charset="0"/>
-              </a:rPr>
-              <a:t>Posting Dominance:</a:t>
-            </a:r>
-            <a:r>
-              <a:rPr lang="en-IL" altLang="en-IL" dirty="0">
-                <a:latin typeface="Arial" panose="020B0604020202020204" pitchFamily="34" charset="0"/>
-              </a:rPr>
-              <a:t> IO drivers concentrate their activity in particular topics to push targeted messages. </a:t>
-            </a:r>
-            <a:endParaRPr lang="en-US" altLang="en-IL" dirty="0">
-              <a:latin typeface="Arial" panose="020B0604020202020204" pitchFamily="34" charset="0"/>
-            </a:endParaRPr>
-          </a:p>
-          <a:p>
-            <a:pPr eaLnBrk="0" fontAlgn="base" hangingPunct="0">
-              <a:lnSpc>
-                <a:spcPct val="100000"/>
-              </a:lnSpc>
-              <a:spcBef>
-                <a:spcPct val="0"/>
-              </a:spcBef>
-              <a:spcAft>
-                <a:spcPct val="0"/>
-              </a:spcAft>
-            </a:pPr>
-            <a:r>
-              <a:rPr lang="en-IL" altLang="en-IL" b="1" dirty="0">
-                <a:latin typeface="Arial" panose="020B0604020202020204" pitchFamily="34" charset="0"/>
-              </a:rPr>
-              <a:t>Boost Score:</a:t>
-            </a:r>
-            <a:r>
-              <a:rPr lang="en-IL" altLang="en-IL" dirty="0">
-                <a:latin typeface="Arial" panose="020B0604020202020204" pitchFamily="34" charset="0"/>
-              </a:rPr>
-              <a:t> IO drivers’ actions are often followed by increases in activity, indicating coordinated amplification after they post. </a:t>
-            </a:r>
-          </a:p>
-        </p:txBody>
-      </p:sp>
-      <p:sp>
-        <p:nvSpPr>
-          <p:cNvPr id="4" name="Slide Number Placeholder 3">
-            <a:extLst>
-              <a:ext uri="{FF2B5EF4-FFF2-40B4-BE49-F238E27FC236}">
-                <a16:creationId xmlns:a16="http://schemas.microsoft.com/office/drawing/2014/main" id="{D3157926-83A7-0987-A5BF-ACEB5D9414D3}"/>
-              </a:ext>
-            </a:extLst>
-          </p:cNvPr>
-          <p:cNvSpPr>
-            <a:spLocks noGrp="1"/>
-          </p:cNvSpPr>
-          <p:nvPr>
-            <p:ph type="sldNum" sz="quarter" idx="12"/>
-          </p:nvPr>
-        </p:nvSpPr>
-        <p:spPr/>
-        <p:txBody>
-          <a:bodyPr/>
-          <a:lstStyle/>
-          <a:p>
-            <a:fld id="{E6AB8EDD-9EF2-4633-A1C2-4D908C1019B4}" type="slidenum">
-              <a:rPr lang="he-IL" smtClean="0"/>
-              <a:t>13</a:t>
-            </a:fld>
-            <a:endParaRPr lang="he-IL"/>
-          </a:p>
-        </p:txBody>
-      </p:sp>
-    </p:spTree>
-    <p:extLst>
-      <p:ext uri="{BB962C8B-B14F-4D97-AF65-F5344CB8AC3E}">
-        <p14:creationId xmlns:p14="http://schemas.microsoft.com/office/powerpoint/2010/main" val="233460957"/>
-      </p:ext>
-    </p:extLst>
-  </p:cSld>
-  <p:clrMapOvr>
-    <a:masterClrMapping/>
-  </p:clrMapOvr>
-</p:sld>
-</file>
-
-<file path=ppt/slides/slide14.xml><?xml version="1.0" encoding="utf-8"?>
-<p:sld xmlns:a="http://schemas.openxmlformats.org/drawingml/2006/main" xmlns:r="http://schemas.openxmlformats.org/officeDocument/2006/relationships" xmlns:p="http://schemas.openxmlformats.org/presentationml/2006/main">
-  <p:cSld>
-    <p:spTree>
-      <p:nvGrpSpPr>
-        <p:cNvPr id="1" name="">
-          <a:extLst>
-            <a:ext uri="{FF2B5EF4-FFF2-40B4-BE49-F238E27FC236}">
-              <a16:creationId xmlns:a16="http://schemas.microsoft.com/office/drawing/2014/main" id="{96F26D25-36D7-61FB-800F-D666E5C3BD8F}"/>
-            </a:ext>
-          </a:extLst>
-        </p:cNvPr>
-        <p:cNvGrpSpPr/>
-        <p:nvPr/>
-      </p:nvGrpSpPr>
-      <p:grpSpPr>
-        <a:xfrm>
-          <a:off x="0" y="0"/>
-          <a:ext cx="0" cy="0"/>
-          <a:chOff x="0" y="0"/>
-          <a:chExt cx="0" cy="0"/>
-        </a:xfrm>
-      </p:grpSpPr>
-      <p:sp>
-        <p:nvSpPr>
-          <p:cNvPr id="5" name="Title 4">
-            <a:extLst>
-              <a:ext uri="{FF2B5EF4-FFF2-40B4-BE49-F238E27FC236}">
-                <a16:creationId xmlns:a16="http://schemas.microsoft.com/office/drawing/2014/main" id="{9B8062A9-4019-21A8-C181-3F8265302D78}"/>
-              </a:ext>
-            </a:extLst>
-          </p:cNvPr>
-          <p:cNvSpPr>
-            <a:spLocks noGrp="1"/>
-          </p:cNvSpPr>
-          <p:nvPr>
-            <p:ph type="title"/>
-          </p:nvPr>
-        </p:nvSpPr>
-        <p:spPr>
-          <a:xfrm>
-            <a:off x="1479549" y="1709738"/>
-            <a:ext cx="9914592" cy="2852737"/>
-          </a:xfrm>
-        </p:spPr>
-        <p:txBody>
-          <a:bodyPr/>
-          <a:lstStyle/>
-          <a:p>
-            <a:r>
-              <a:rPr lang="en-GB" dirty="0"/>
-              <a:t>Coordinated Behaviour - Choosing Indicator</a:t>
-            </a:r>
-            <a:endParaRPr lang="en-IL" dirty="0"/>
-          </a:p>
-        </p:txBody>
-      </p:sp>
-      <p:sp>
-        <p:nvSpPr>
-          <p:cNvPr id="6" name="Text Placeholder 5">
-            <a:extLst>
-              <a:ext uri="{FF2B5EF4-FFF2-40B4-BE49-F238E27FC236}">
-                <a16:creationId xmlns:a16="http://schemas.microsoft.com/office/drawing/2014/main" id="{3AD05960-A975-BAF2-22A6-3B1434A4E21D}"/>
-              </a:ext>
-            </a:extLst>
-          </p:cNvPr>
-          <p:cNvSpPr>
-            <a:spLocks noGrp="1"/>
-          </p:cNvSpPr>
-          <p:nvPr>
-            <p:ph type="body" idx="1"/>
-          </p:nvPr>
-        </p:nvSpPr>
-        <p:spPr/>
-        <p:txBody>
-          <a:bodyPr/>
-          <a:lstStyle/>
-          <a:p>
-            <a:endParaRPr lang="en-IL" dirty="0"/>
-          </a:p>
-        </p:txBody>
-      </p:sp>
-      <p:sp>
-        <p:nvSpPr>
-          <p:cNvPr id="4" name="Slide Number Placeholder 3">
-            <a:extLst>
-              <a:ext uri="{FF2B5EF4-FFF2-40B4-BE49-F238E27FC236}">
-                <a16:creationId xmlns:a16="http://schemas.microsoft.com/office/drawing/2014/main" id="{6CA6E229-8963-0D55-F98F-4CC7A796E1C9}"/>
-              </a:ext>
-            </a:extLst>
-          </p:cNvPr>
-          <p:cNvSpPr>
-            <a:spLocks noGrp="1"/>
-          </p:cNvSpPr>
-          <p:nvPr>
-            <p:ph type="sldNum" sz="quarter" idx="12"/>
-          </p:nvPr>
-        </p:nvSpPr>
-        <p:spPr/>
-        <p:txBody>
-          <a:bodyPr/>
-          <a:lstStyle/>
-          <a:p>
-            <a:fld id="{E6AB8EDD-9EF2-4633-A1C2-4D908C1019B4}" type="slidenum">
-              <a:rPr lang="he-IL" smtClean="0"/>
-              <a:t>14</a:t>
-            </a:fld>
-            <a:endParaRPr lang="he-IL"/>
-          </a:p>
-        </p:txBody>
-      </p:sp>
-    </p:spTree>
-    <p:extLst>
-      <p:ext uri="{BB962C8B-B14F-4D97-AF65-F5344CB8AC3E}">
-        <p14:creationId xmlns:p14="http://schemas.microsoft.com/office/powerpoint/2010/main" val="409068119"/>
-      </p:ext>
-    </p:extLst>
-  </p:cSld>
-  <p:clrMapOvr>
-    <a:masterClrMapping/>
-  </p:clrMapOvr>
-</p:sld>
-</file>
-
-<file path=ppt/slides/slide15.xml><?xml version="1.0" encoding="utf-8"?>
-<p:sld xmlns:a="http://schemas.openxmlformats.org/drawingml/2006/main" xmlns:r="http://schemas.openxmlformats.org/officeDocument/2006/relationships" xmlns:p="http://schemas.openxmlformats.org/presentationml/2006/main">
-  <p:cSld>
-    <p:spTree>
-      <p:nvGrpSpPr>
-        <p:cNvPr id="1" name="">
-          <a:extLst>
-            <a:ext uri="{FF2B5EF4-FFF2-40B4-BE49-F238E27FC236}">
-              <a16:creationId xmlns:a16="http://schemas.microsoft.com/office/drawing/2014/main" id="{0D7225D8-EDFA-0591-872A-E0075FF029A7}"/>
-            </a:ext>
-          </a:extLst>
-        </p:cNvPr>
-        <p:cNvGrpSpPr/>
-        <p:nvPr/>
-      </p:nvGrpSpPr>
-      <p:grpSpPr>
-        <a:xfrm>
-          <a:off x="0" y="0"/>
-          <a:ext cx="0" cy="0"/>
-          <a:chOff x="0" y="0"/>
-          <a:chExt cx="0" cy="0"/>
-        </a:xfrm>
-      </p:grpSpPr>
-      <p:sp>
-        <p:nvSpPr>
-          <p:cNvPr id="2" name="Title 1">
-            <a:extLst>
-              <a:ext uri="{FF2B5EF4-FFF2-40B4-BE49-F238E27FC236}">
-                <a16:creationId xmlns:a16="http://schemas.microsoft.com/office/drawing/2014/main" id="{784DED4E-07D6-5029-1267-13E254619F51}"/>
-              </a:ext>
-            </a:extLst>
-          </p:cNvPr>
-          <p:cNvSpPr>
-            <a:spLocks noGrp="1"/>
-          </p:cNvSpPr>
-          <p:nvPr>
-            <p:ph type="title"/>
-          </p:nvPr>
-        </p:nvSpPr>
-        <p:spPr>
-          <a:xfrm>
-            <a:off x="3072268" y="401637"/>
-            <a:ext cx="8753475" cy="1325563"/>
-          </a:xfrm>
-        </p:spPr>
-        <p:txBody>
-          <a:bodyPr anchor="ctr">
-            <a:normAutofit/>
-          </a:bodyPr>
-          <a:lstStyle/>
-          <a:p>
-            <a:r>
-              <a:rPr lang="en-US" dirty="0"/>
-              <a:t>Indicators Analysis – Information Gain  </a:t>
-            </a:r>
-            <a:endParaRPr lang="en-IL" dirty="0"/>
-          </a:p>
-        </p:txBody>
-      </p:sp>
-      <p:sp>
-        <p:nvSpPr>
-          <p:cNvPr id="4" name="Slide Number Placeholder 3">
-            <a:extLst>
-              <a:ext uri="{FF2B5EF4-FFF2-40B4-BE49-F238E27FC236}">
-                <a16:creationId xmlns:a16="http://schemas.microsoft.com/office/drawing/2014/main" id="{C32F5E0B-95E2-EC2F-17CF-478A39DF16AB}"/>
-              </a:ext>
-            </a:extLst>
-          </p:cNvPr>
-          <p:cNvSpPr>
-            <a:spLocks noGrp="1"/>
-          </p:cNvSpPr>
-          <p:nvPr>
-            <p:ph type="sldNum" sz="quarter" idx="12"/>
-          </p:nvPr>
-        </p:nvSpPr>
-        <p:spPr>
-          <a:xfrm>
-            <a:off x="11728704" y="6464649"/>
-            <a:ext cx="452233" cy="365125"/>
-          </a:xfrm>
-        </p:spPr>
-        <p:txBody>
-          <a:bodyPr anchor="ctr">
-            <a:normAutofit/>
-          </a:bodyPr>
-          <a:lstStyle/>
-          <a:p>
-            <a:pPr>
-              <a:spcAft>
-                <a:spcPts val="600"/>
-              </a:spcAft>
-            </a:pPr>
-            <a:fld id="{E6AB8EDD-9EF2-4633-A1C2-4D908C1019B4}" type="slidenum">
-              <a:rPr lang="he-IL" smtClean="0"/>
-              <a:pPr>
-                <a:spcAft>
-                  <a:spcPts val="600"/>
-                </a:spcAft>
-              </a:pPr>
-              <a:t>15</a:t>
-            </a:fld>
-            <a:endParaRPr lang="he-IL"/>
-          </a:p>
-        </p:txBody>
-      </p:sp>
-      <p:pic>
-        <p:nvPicPr>
-          <p:cNvPr id="6" name="Picture 5">
-            <a:extLst>
-              <a:ext uri="{FF2B5EF4-FFF2-40B4-BE49-F238E27FC236}">
-                <a16:creationId xmlns:a16="http://schemas.microsoft.com/office/drawing/2014/main" id="{AF694049-9AAF-FF1E-EB69-93619E1D8D7E}"/>
-              </a:ext>
-            </a:extLst>
-          </p:cNvPr>
-          <p:cNvPicPr>
-            <a:picLocks noChangeAspect="1"/>
-          </p:cNvPicPr>
-          <p:nvPr/>
-        </p:nvPicPr>
-        <p:blipFill>
-          <a:blip r:embed="rId2"/>
-          <a:stretch>
-            <a:fillRect/>
-          </a:stretch>
-        </p:blipFill>
-        <p:spPr>
-          <a:xfrm>
-            <a:off x="1740721" y="1727200"/>
-            <a:ext cx="8753475" cy="4275476"/>
-          </a:xfrm>
-          <a:prstGeom prst="rect">
-            <a:avLst/>
-          </a:prstGeom>
-        </p:spPr>
-      </p:pic>
-      <p:sp>
-        <p:nvSpPr>
-          <p:cNvPr id="7" name="TextBox 6">
-            <a:extLst>
-              <a:ext uri="{FF2B5EF4-FFF2-40B4-BE49-F238E27FC236}">
-                <a16:creationId xmlns:a16="http://schemas.microsoft.com/office/drawing/2014/main" id="{C88E7DED-7C45-6E37-6290-93FB4487F981}"/>
-              </a:ext>
-            </a:extLst>
-          </p:cNvPr>
-          <p:cNvSpPr txBox="1"/>
-          <p:nvPr/>
-        </p:nvSpPr>
-        <p:spPr>
-          <a:xfrm>
-            <a:off x="1490383" y="6141483"/>
-            <a:ext cx="6261846" cy="646331"/>
-          </a:xfrm>
-          <a:prstGeom prst="rect">
-            <a:avLst/>
-          </a:prstGeom>
-          <a:noFill/>
-        </p:spPr>
-        <p:txBody>
-          <a:bodyPr wrap="square">
-            <a:spAutoFit/>
-          </a:bodyPr>
-          <a:lstStyle/>
-          <a:p>
-            <a:r>
-              <a:rPr lang="en-IL" dirty="0">
-                <a:solidFill>
-                  <a:schemeClr val="bg1">
-                    <a:lumMod val="50000"/>
-                  </a:schemeClr>
-                </a:solidFill>
-              </a:rPr>
-              <a:t>Information Gain </a:t>
-            </a:r>
-            <a:r>
-              <a:rPr lang="en-US" dirty="0">
-                <a:solidFill>
-                  <a:schemeClr val="bg1">
-                    <a:lumMod val="50000"/>
-                  </a:schemeClr>
-                </a:solidFill>
-              </a:rPr>
-              <a:t>is </a:t>
-            </a:r>
-            <a:r>
-              <a:rPr lang="en-IL" dirty="0">
-                <a:solidFill>
-                  <a:schemeClr val="bg1">
-                    <a:lumMod val="50000"/>
-                  </a:schemeClr>
-                </a:solidFill>
-              </a:rPr>
-              <a:t>used to measure how much knowledge one variable provides about another.</a:t>
-            </a:r>
-          </a:p>
-        </p:txBody>
-      </p:sp>
-    </p:spTree>
-    <p:extLst>
-      <p:ext uri="{BB962C8B-B14F-4D97-AF65-F5344CB8AC3E}">
-        <p14:creationId xmlns:p14="http://schemas.microsoft.com/office/powerpoint/2010/main" val="3215404515"/>
-      </p:ext>
-    </p:extLst>
-  </p:cSld>
-  <p:clrMapOvr>
-    <a:masterClrMapping/>
-  </p:clrMapOvr>
-</p:sld>
-</file>
-
-<file path=ppt/slides/slide16.xml><?xml version="1.0" encoding="utf-8"?>
 <p:sld xmlns:a="http://schemas.openxmlformats.org/drawingml/2006/main" xmlns:r="http://schemas.openxmlformats.org/officeDocument/2006/relationships" xmlns:p="http://schemas.openxmlformats.org/presentationml/2006/main">
   <p:cSld>
     <p:spTree>
@@ -13098,7 +11713,7 @@
                   <a:spcPts val="600"/>
                 </a:spcAft>
               </a:pPr>
-              <a:t>16</a:t>
+              <a:t>10</a:t>
             </a:fld>
             <a:endParaRPr lang="he-IL"/>
           </a:p>
@@ -13270,7 +11885,7 @@
 </p:sld>
 </file>
 
-<file path=ppt/slides/slide17.xml><?xml version="1.0" encoding="utf-8"?>
+<file path=ppt/slides/slide11.xml><?xml version="1.0" encoding="utf-8"?>
 <p:sld xmlns:a="http://schemas.openxmlformats.org/drawingml/2006/main" xmlns:r="http://schemas.openxmlformats.org/officeDocument/2006/relationships" xmlns:p="http://schemas.openxmlformats.org/presentationml/2006/main">
   <p:cSld>
     <p:spTree>
@@ -13369,7 +11984,7 @@
                   <a:spcPts val="600"/>
                 </a:spcAft>
               </a:pPr>
-              <a:t>17</a:t>
+              <a:t>11</a:t>
             </a:fld>
             <a:endParaRPr lang="he-IL"/>
           </a:p>
@@ -13419,18 +12034,16 @@
         </p:nvSpPr>
         <p:spPr>
           <a:xfrm>
-            <a:off x="636494" y="3218329"/>
-            <a:ext cx="2123293" cy="1497106"/>
+            <a:off x="667266" y="3218329"/>
+            <a:ext cx="2036917" cy="1497106"/>
           </a:xfrm>
           <a:prstGeom prst="rect">
             <a:avLst/>
           </a:prstGeom>
           <a:noFill/>
-          <a:ln>
+          <a:ln w="19050">
             <a:solidFill>
-              <a:schemeClr val="accent2">
-                <a:lumMod val="75000"/>
-              </a:schemeClr>
+              <a:srgbClr val="FF0000"/>
             </a:solidFill>
           </a:ln>
         </p:spPr>
@@ -13514,7 +12127,7 @@
 </p:sld>
 </file>
 
-<file path=ppt/slides/slide18.xml><?xml version="1.0" encoding="utf-8"?>
+<file path=ppt/slides/slide12.xml><?xml version="1.0" encoding="utf-8"?>
 <p:sld xmlns:a="http://schemas.openxmlformats.org/drawingml/2006/main" xmlns:r="http://schemas.openxmlformats.org/officeDocument/2006/relationships" xmlns:p="http://schemas.openxmlformats.org/presentationml/2006/main">
   <p:cSld>
     <p:spTree>
@@ -13592,7 +12205,7 @@
             <a:pPr lvl="1"/>
             <a:r>
               <a:rPr lang="en-GB" sz="2400" dirty="0"/>
-              <a:t>A core-number is the k value of the maximal subgraph that contains nodes of degree k or more. The core number of a node is the largest value k of a k-core containing that node (</a:t>
+              <a:t>A k-core is a maximal subgraph that contains nodes of degree k or more. The core number of a node is the largest value k of a k-core containing that node.(</a:t>
             </a:r>
             <a:r>
               <a:rPr lang="en-GB" sz="2400" dirty="0" err="1"/>
@@ -13700,7 +12313,7 @@
           <a:p>
             <a:fld id="{E6AB8EDD-9EF2-4633-A1C2-4D908C1019B4}" type="slidenum">
               <a:rPr lang="he-IL" smtClean="0"/>
-              <a:t>18</a:t>
+              <a:t>12</a:t>
             </a:fld>
             <a:endParaRPr lang="he-IL"/>
           </a:p>
@@ -13719,7 +12332,7 @@
 </p:sld>
 </file>
 
-<file path=ppt/slides/slide19.xml><?xml version="1.0" encoding="utf-8"?>
+<file path=ppt/slides/slide13.xml><?xml version="1.0" encoding="utf-8"?>
 <p:sld xmlns:a="http://schemas.openxmlformats.org/drawingml/2006/main" xmlns:r="http://schemas.openxmlformats.org/officeDocument/2006/relationships" xmlns:p="http://schemas.openxmlformats.org/presentationml/2006/main">
   <p:cSld>
     <p:spTree>
@@ -13794,43 +12407,18 @@
           <a:p>
             <a:fld id="{E6AB8EDD-9EF2-4633-A1C2-4D908C1019B4}" type="slidenum">
               <a:rPr lang="he-IL" smtClean="0"/>
-              <a:t>19</a:t>
+              <a:t>13</a:t>
             </a:fld>
             <a:endParaRPr lang="he-IL"/>
-          </a:p>
-        </p:txBody>
-      </p:sp>
-      <p:sp>
-        <p:nvSpPr>
-          <p:cNvPr id="5" name="Content Placeholder 4">
-            <a:extLst>
-              <a:ext uri="{FF2B5EF4-FFF2-40B4-BE49-F238E27FC236}">
-                <a16:creationId xmlns:a16="http://schemas.microsoft.com/office/drawing/2014/main" id="{998EFFCC-3202-2E8F-293B-F3BDF91B4F15}"/>
-              </a:ext>
-            </a:extLst>
-          </p:cNvPr>
-          <p:cNvSpPr>
-            <a:spLocks noGrp="1"/>
-          </p:cNvSpPr>
-          <p:nvPr>
-            <p:ph idx="1"/>
-          </p:nvPr>
-        </p:nvSpPr>
-        <p:spPr/>
-        <p:txBody>
-          <a:bodyPr/>
-          <a:lstStyle/>
-          <a:p>
-            <a:endParaRPr lang="en-IL"/>
           </a:p>
         </p:txBody>
       </p:sp>
       <p:pic>
         <p:nvPicPr>
-          <p:cNvPr id="6" name="Picture 5">
-            <a:extLst>
-              <a:ext uri="{FF2B5EF4-FFF2-40B4-BE49-F238E27FC236}">
-                <a16:creationId xmlns:a16="http://schemas.microsoft.com/office/drawing/2014/main" id="{065DF08D-48EF-9D5E-EFBA-B58561C98F38}"/>
+          <p:cNvPr id="3" name="Picture 2" descr="k-Core of a graph">
+            <a:extLst>
+              <a:ext uri="{FF2B5EF4-FFF2-40B4-BE49-F238E27FC236}">
+                <a16:creationId xmlns:a16="http://schemas.microsoft.com/office/drawing/2014/main" id="{3160D834-E7C4-9080-3DC5-CB154A8A5D2B}"/>
               </a:ext>
             </a:extLst>
           </p:cNvPr>
@@ -13841,15 +12429,14 @@
         </p:nvPicPr>
         <p:blipFill>
           <a:blip r:embed="rId2"/>
-          <a:srcRect l="4044" t="2831" r="10439" b="10169"/>
           <a:stretch>
             <a:fillRect/>
           </a:stretch>
         </p:blipFill>
         <p:spPr>
           <a:xfrm>
-            <a:off x="1571000" y="1642555"/>
-            <a:ext cx="9049999" cy="4534408"/>
+            <a:off x="1255283" y="1867838"/>
+            <a:ext cx="10174718" cy="4107071"/>
           </a:xfrm>
           <a:prstGeom prst="rect">
             <a:avLst/>
@@ -13869,149 +12456,7 @@
 </p:sld>
 </file>
 
-<file path=ppt/slides/slide2.xml><?xml version="1.0" encoding="utf-8"?>
-<p:sld xmlns:a="http://schemas.openxmlformats.org/drawingml/2006/main" xmlns:r="http://schemas.openxmlformats.org/officeDocument/2006/relationships" xmlns:p="http://schemas.openxmlformats.org/presentationml/2006/main">
-  <p:cSld>
-    <p:spTree>
-      <p:nvGrpSpPr>
-        <p:cNvPr id="1" name=""/>
-        <p:cNvGrpSpPr/>
-        <p:nvPr/>
-      </p:nvGrpSpPr>
-      <p:grpSpPr>
-        <a:xfrm>
-          <a:off x="0" y="0"/>
-          <a:ext cx="0" cy="0"/>
-          <a:chOff x="0" y="0"/>
-          <a:chExt cx="0" cy="0"/>
-        </a:xfrm>
-      </p:grpSpPr>
-      <p:sp>
-        <p:nvSpPr>
-          <p:cNvPr id="2" name="Title 1">
-            <a:extLst>
-              <a:ext uri="{FF2B5EF4-FFF2-40B4-BE49-F238E27FC236}">
-                <a16:creationId xmlns:a16="http://schemas.microsoft.com/office/drawing/2014/main" id="{778AF6C1-AB65-35BD-8133-F3F29DB90DD0}"/>
-              </a:ext>
-            </a:extLst>
-          </p:cNvPr>
-          <p:cNvSpPr>
-            <a:spLocks noGrp="1"/>
-          </p:cNvSpPr>
-          <p:nvPr>
-            <p:ph type="title"/>
-          </p:nvPr>
-        </p:nvSpPr>
-        <p:spPr/>
-        <p:txBody>
-          <a:bodyPr/>
-          <a:lstStyle/>
-          <a:p>
-            <a:r>
-              <a:rPr lang="en-US" dirty="0"/>
-              <a:t>Terms &amp; Definitions - IO</a:t>
-            </a:r>
-            <a:endParaRPr lang="en-IL" dirty="0"/>
-          </a:p>
-        </p:txBody>
-      </p:sp>
-      <p:sp>
-        <p:nvSpPr>
-          <p:cNvPr id="3" name="Content Placeholder 2">
-            <a:extLst>
-              <a:ext uri="{FF2B5EF4-FFF2-40B4-BE49-F238E27FC236}">
-                <a16:creationId xmlns:a16="http://schemas.microsoft.com/office/drawing/2014/main" id="{2591FA6F-2F61-214E-F20E-E15E3A7E9E5E}"/>
-              </a:ext>
-            </a:extLst>
-          </p:cNvPr>
-          <p:cNvSpPr>
-            <a:spLocks noGrp="1"/>
-          </p:cNvSpPr>
-          <p:nvPr>
-            <p:ph idx="1"/>
-          </p:nvPr>
-        </p:nvSpPr>
-        <p:spPr/>
-        <p:txBody>
-          <a:bodyPr/>
-          <a:lstStyle/>
-          <a:p>
-            <a:r>
-              <a:rPr lang="en-GB" b="1" dirty="0"/>
-              <a:t>Information Operation (IO):</a:t>
-            </a:r>
-            <a:r>
-              <a:rPr lang="en-GB" dirty="0"/>
-              <a:t> A collection of publications by coordinated actors pursuing a shared intent while misleading others.</a:t>
-            </a:r>
-          </a:p>
-          <a:p>
-            <a:pPr fontAlgn="base"/>
-            <a:r>
-              <a:rPr lang="en-GB" b="1" dirty="0"/>
-              <a:t>IO Driver:</a:t>
-            </a:r>
-            <a:r>
-              <a:rPr lang="en-GB" dirty="0"/>
-              <a:t> An account that promotes one or more IO.</a:t>
-            </a:r>
-          </a:p>
-          <a:p>
-            <a:pPr fontAlgn="base"/>
-            <a:r>
-              <a:rPr lang="en-GB" b="1" dirty="0"/>
-              <a:t>Author ‘s IO Label:</a:t>
-            </a:r>
-            <a:r>
-              <a:rPr lang="en-GB" dirty="0"/>
-              <a:t> label =  1 if the author is a IO Driver and label = 0 if not.</a:t>
-            </a:r>
-          </a:p>
-        </p:txBody>
-      </p:sp>
-      <p:sp>
-        <p:nvSpPr>
-          <p:cNvPr id="4" name="Slide Number Placeholder 3">
-            <a:extLst>
-              <a:ext uri="{FF2B5EF4-FFF2-40B4-BE49-F238E27FC236}">
-                <a16:creationId xmlns:a16="http://schemas.microsoft.com/office/drawing/2014/main" id="{30442458-50C9-BF06-3967-CE25C3C30F5D}"/>
-              </a:ext>
-            </a:extLst>
-          </p:cNvPr>
-          <p:cNvSpPr>
-            <a:spLocks noGrp="1"/>
-          </p:cNvSpPr>
-          <p:nvPr>
-            <p:ph type="sldNum" sz="quarter" idx="12"/>
-          </p:nvPr>
-        </p:nvSpPr>
-        <p:spPr/>
-        <p:txBody>
-          <a:bodyPr/>
-          <a:lstStyle/>
-          <a:p>
-            <a:fld id="{E6AB8EDD-9EF2-4633-A1C2-4D908C1019B4}" type="slidenum">
-              <a:rPr lang="he-IL" smtClean="0"/>
-              <a:t>2</a:t>
-            </a:fld>
-            <a:endParaRPr lang="he-IL"/>
-          </a:p>
-        </p:txBody>
-      </p:sp>
-    </p:spTree>
-    <p:extLst>
-      <p:ext uri="{BB962C8B-B14F-4D97-AF65-F5344CB8AC3E}">
-        <p14:creationId xmlns:p14="http://schemas.microsoft.com/office/powerpoint/2010/main" val="1192892277"/>
-      </p:ext>
-    </p:extLst>
-  </p:cSld>
-  <p:clrMapOvr>
-    <a:masterClrMapping/>
-  </p:clrMapOvr>
-</p:sld>
-</file>
-
-<file path=ppt/slides/slide20.xml><?xml version="1.0" encoding="utf-8"?>
+<file path=ppt/slides/slide14.xml><?xml version="1.0" encoding="utf-8"?>
 <p:sld xmlns:a="http://schemas.openxmlformats.org/drawingml/2006/main" xmlns:r="http://schemas.openxmlformats.org/officeDocument/2006/relationships" xmlns:p="http://schemas.openxmlformats.org/presentationml/2006/main">
   <p:cSld>
     <p:spTree>
@@ -14116,7 +12561,7 @@
           <a:p>
             <a:fld id="{E6AB8EDD-9EF2-4633-A1C2-4D908C1019B4}" type="slidenum">
               <a:rPr lang="he-IL" smtClean="0"/>
-              <a:t>20</a:t>
+              <a:t>14</a:t>
             </a:fld>
             <a:endParaRPr lang="he-IL"/>
           </a:p>
@@ -14135,588 +12580,7 @@
 </p:sld>
 </file>
 
-<file path=ppt/slides/slide21.xml><?xml version="1.0" encoding="utf-8"?>
-<p:sld xmlns:a="http://schemas.openxmlformats.org/drawingml/2006/main" xmlns:r="http://schemas.openxmlformats.org/officeDocument/2006/relationships" xmlns:p="http://schemas.openxmlformats.org/presentationml/2006/main" show="0">
-  <p:cSld>
-    <p:spTree>
-      <p:nvGrpSpPr>
-        <p:cNvPr id="1" name=""/>
-        <p:cNvGrpSpPr/>
-        <p:nvPr/>
-      </p:nvGrpSpPr>
-      <p:grpSpPr>
-        <a:xfrm>
-          <a:off x="0" y="0"/>
-          <a:ext cx="0" cy="0"/>
-          <a:chOff x="0" y="0"/>
-          <a:chExt cx="0" cy="0"/>
-        </a:xfrm>
-      </p:grpSpPr>
-      <p:sp>
-        <p:nvSpPr>
-          <p:cNvPr id="2" name="Title 1">
-            <a:extLst>
-              <a:ext uri="{FF2B5EF4-FFF2-40B4-BE49-F238E27FC236}">
-                <a16:creationId xmlns:a16="http://schemas.microsoft.com/office/drawing/2014/main" id="{A0D37E0C-D23B-7EE1-7C9A-AAF472B52C02}"/>
-              </a:ext>
-            </a:extLst>
-          </p:cNvPr>
-          <p:cNvSpPr>
-            <a:spLocks noGrp="1"/>
-          </p:cNvSpPr>
-          <p:nvPr>
-            <p:ph type="title"/>
-          </p:nvPr>
-        </p:nvSpPr>
-        <p:spPr/>
-        <p:txBody>
-          <a:bodyPr/>
-          <a:lstStyle/>
-          <a:p>
-            <a:r>
-              <a:rPr lang="en-GB" dirty="0"/>
-              <a:t>Hypothesis</a:t>
-            </a:r>
-            <a:endParaRPr lang="en-IL" dirty="0"/>
-          </a:p>
-        </p:txBody>
-      </p:sp>
-      <p:sp>
-        <p:nvSpPr>
-          <p:cNvPr id="3" name="Content Placeholder 2">
-            <a:extLst>
-              <a:ext uri="{FF2B5EF4-FFF2-40B4-BE49-F238E27FC236}">
-                <a16:creationId xmlns:a16="http://schemas.microsoft.com/office/drawing/2014/main" id="{EAC1051C-EDF0-EAA6-5969-49A6E1423EF1}"/>
-              </a:ext>
-            </a:extLst>
-          </p:cNvPr>
-          <p:cNvSpPr>
-            <a:spLocks noGrp="1"/>
-          </p:cNvSpPr>
-          <p:nvPr>
-            <p:ph idx="1"/>
-          </p:nvPr>
-        </p:nvSpPr>
-        <p:spPr/>
-        <p:txBody>
-          <a:bodyPr>
-            <a:normAutofit fontScale="70000" lnSpcReduction="20000"/>
-          </a:bodyPr>
-          <a:lstStyle/>
-          <a:p>
-            <a:r>
-              <a:rPr lang="en-US" b="1" dirty="0">
-                <a:highlight>
-                  <a:srgbClr val="FE0101"/>
-                </a:highlight>
-              </a:rPr>
-              <a:t>H1</a:t>
-            </a:r>
-            <a:r>
-              <a:rPr lang="en-US" dirty="0">
-                <a:highlight>
-                  <a:srgbClr val="FE0101"/>
-                </a:highlight>
-              </a:rPr>
-              <a:t>: IO Drivers form clusters on the co action graph. So in dense </a:t>
-            </a:r>
-            <a:r>
-              <a:rPr lang="en-US" dirty="0" err="1">
-                <a:highlight>
-                  <a:srgbClr val="FE0101"/>
-                </a:highlight>
-              </a:rPr>
-              <a:t>gpurps</a:t>
-            </a:r>
-            <a:r>
-              <a:rPr lang="en-US" dirty="0">
-                <a:highlight>
-                  <a:srgbClr val="FE0101"/>
-                </a:highlight>
-              </a:rPr>
-              <a:t> this is more likely to find IO drivers. Cheak </a:t>
-            </a:r>
-            <a:r>
-              <a:rPr lang="en-US" dirty="0" err="1">
-                <a:highlight>
-                  <a:srgbClr val="FE0101"/>
-                </a:highlight>
-              </a:rPr>
-              <a:t>concectivity</a:t>
-            </a:r>
-            <a:r>
-              <a:rPr lang="en-US" dirty="0">
-                <a:highlight>
-                  <a:srgbClr val="FE0101"/>
-                </a:highlight>
-              </a:rPr>
-              <a:t>.  </a:t>
-            </a:r>
-            <a:r>
-              <a:rPr lang="he-IL" dirty="0">
-                <a:highlight>
-                  <a:srgbClr val="FE0101"/>
-                </a:highlight>
-              </a:rPr>
-              <a:t> </a:t>
-            </a:r>
-            <a:r>
-              <a:rPr lang="en-US" dirty="0">
-                <a:highlight>
-                  <a:srgbClr val="FE0101"/>
-                </a:highlight>
-              </a:rPr>
-              <a:t>Cheak </a:t>
-            </a:r>
-            <a:r>
-              <a:rPr lang="en-US" dirty="0" err="1">
-                <a:highlight>
-                  <a:srgbClr val="FE0101"/>
-                </a:highlight>
-              </a:rPr>
-              <a:t>prescnge</a:t>
-            </a:r>
-            <a:r>
-              <a:rPr lang="en-US" dirty="0">
-                <a:highlight>
-                  <a:srgbClr val="FE0101"/>
-                </a:highlight>
-              </a:rPr>
-              <a:t> of IO driver per level of k-core and k-shell. </a:t>
-            </a:r>
-            <a:r>
-              <a:rPr lang="en-US" dirty="0" err="1">
-                <a:highlight>
-                  <a:srgbClr val="FE0101"/>
-                </a:highlight>
-              </a:rPr>
-              <a:t>Prst</a:t>
-            </a:r>
-            <a:r>
-              <a:rPr lang="en-US" dirty="0">
-                <a:highlight>
-                  <a:srgbClr val="FE0101"/>
-                </a:highlight>
-              </a:rPr>
-              <a:t> on k-core and k-shell like in the </a:t>
-            </a:r>
-            <a:r>
-              <a:rPr lang="en-US" dirty="0" err="1">
-                <a:highlight>
-                  <a:srgbClr val="FE0101"/>
-                </a:highlight>
-              </a:rPr>
-              <a:t>witheade</a:t>
-            </a:r>
-            <a:r>
-              <a:rPr lang="en-US" dirty="0">
-                <a:highlight>
-                  <a:srgbClr val="FE0101"/>
-                </a:highlight>
-              </a:rPr>
-              <a:t> average in the all users in graph. </a:t>
-            </a:r>
-          </a:p>
-          <a:p>
-            <a:r>
-              <a:rPr lang="en-US" b="1" dirty="0">
-                <a:highlight>
-                  <a:srgbClr val="FE0101"/>
-                </a:highlight>
-              </a:rPr>
-              <a:t>H2</a:t>
-            </a:r>
-            <a:r>
-              <a:rPr lang="en-US" dirty="0">
-                <a:highlight>
-                  <a:srgbClr val="FE0101"/>
-                </a:highlight>
-              </a:rPr>
-              <a:t>: When grouping the graph to </a:t>
-            </a:r>
-            <a:r>
-              <a:rPr lang="en-US" dirty="0" err="1">
-                <a:highlight>
-                  <a:srgbClr val="FE0101"/>
-                </a:highlight>
-              </a:rPr>
-              <a:t>densce</a:t>
-            </a:r>
-            <a:r>
-              <a:rPr lang="en-US" dirty="0">
-                <a:highlight>
-                  <a:srgbClr val="FE0101"/>
-                </a:highlight>
-              </a:rPr>
-              <a:t> group we want to </a:t>
-            </a:r>
-            <a:r>
-              <a:rPr lang="en-US" dirty="0" err="1">
-                <a:highlight>
-                  <a:srgbClr val="FE0101"/>
-                </a:highlight>
-              </a:rPr>
-              <a:t>cheak</a:t>
-            </a:r>
-            <a:r>
-              <a:rPr lang="en-US" dirty="0">
-                <a:highlight>
-                  <a:srgbClr val="FE0101"/>
-                </a:highlight>
-              </a:rPr>
-              <a:t> if in different </a:t>
-            </a:r>
-            <a:r>
-              <a:rPr lang="en-US" dirty="0" err="1">
-                <a:highlight>
-                  <a:srgbClr val="FE0101"/>
-                </a:highlight>
-              </a:rPr>
-              <a:t>grpups</a:t>
-            </a:r>
-            <a:r>
-              <a:rPr lang="en-US" dirty="0">
-                <a:highlight>
-                  <a:srgbClr val="FE0101"/>
-                </a:highlight>
-              </a:rPr>
-              <a:t> have more IO driver and in some </a:t>
-            </a:r>
-            <a:r>
-              <a:rPr lang="en-US" dirty="0" err="1">
-                <a:highlight>
-                  <a:srgbClr val="FE0101"/>
-                </a:highlight>
-              </a:rPr>
-              <a:t>grpup</a:t>
-            </a:r>
-            <a:r>
-              <a:rPr lang="en-US" dirty="0">
-                <a:highlight>
-                  <a:srgbClr val="FE0101"/>
-                </a:highlight>
-              </a:rPr>
-              <a:t>. The IO driver are not </a:t>
-            </a:r>
-            <a:r>
-              <a:rPr lang="en-US" dirty="0" err="1">
-                <a:highlight>
-                  <a:srgbClr val="FE0101"/>
-                </a:highlight>
-              </a:rPr>
-              <a:t>disptrebutied</a:t>
-            </a:r>
-            <a:r>
-              <a:rPr lang="en-US" dirty="0">
-                <a:highlight>
-                  <a:srgbClr val="FE0101"/>
-                </a:highlight>
-              </a:rPr>
-              <a:t> </a:t>
-            </a:r>
-            <a:r>
-              <a:rPr lang="en-US" dirty="0" err="1">
-                <a:highlight>
-                  <a:srgbClr val="FE0101"/>
-                </a:highlight>
-              </a:rPr>
-              <a:t>evenaly</a:t>
-            </a:r>
-            <a:r>
-              <a:rPr lang="en-US" dirty="0">
-                <a:highlight>
-                  <a:srgbClr val="FE0101"/>
-                </a:highlight>
-              </a:rPr>
-              <a:t>.  Use community </a:t>
-            </a:r>
-            <a:r>
-              <a:rPr lang="en-US" dirty="0" err="1">
-                <a:highlight>
-                  <a:srgbClr val="FE0101"/>
-                </a:highlight>
-              </a:rPr>
-              <a:t>detaction</a:t>
-            </a:r>
-            <a:r>
-              <a:rPr lang="en-US" dirty="0">
-                <a:highlight>
-                  <a:srgbClr val="FE0101"/>
-                </a:highlight>
-              </a:rPr>
-              <a:t> and look at the IO driver percentage on each </a:t>
-            </a:r>
-            <a:r>
-              <a:rPr lang="en-US" dirty="0" err="1">
-                <a:highlight>
-                  <a:srgbClr val="FE0101"/>
-                </a:highlight>
-              </a:rPr>
-              <a:t>ecommunity</a:t>
-            </a:r>
-            <a:r>
-              <a:rPr lang="en-US" dirty="0">
-                <a:highlight>
-                  <a:srgbClr val="FE0101"/>
-                </a:highlight>
-              </a:rPr>
-              <a:t>.</a:t>
-            </a:r>
-          </a:p>
-          <a:p>
-            <a:r>
-              <a:rPr lang="en-US" b="1" dirty="0">
-                <a:highlight>
-                  <a:srgbClr val="FE0101"/>
-                </a:highlight>
-              </a:rPr>
-              <a:t>H3</a:t>
-            </a:r>
-            <a:r>
-              <a:rPr lang="en-US" dirty="0">
-                <a:highlight>
-                  <a:srgbClr val="FE0101"/>
-                </a:highlight>
-              </a:rPr>
-              <a:t>: matching cohort for IO drivers. So in key score is </a:t>
-            </a:r>
-            <a:r>
-              <a:rPr lang="en-US" dirty="0" err="1">
-                <a:highlight>
-                  <a:srgbClr val="FE0101"/>
-                </a:highlight>
-              </a:rPr>
-              <a:t>macht</a:t>
-            </a:r>
-            <a:r>
-              <a:rPr lang="en-US" dirty="0">
-                <a:highlight>
-                  <a:srgbClr val="FE0101"/>
-                </a:highlight>
-              </a:rPr>
-              <a:t> to the IO driver when dealing with authors with similar </a:t>
-            </a:r>
-            <a:r>
-              <a:rPr lang="en-US" dirty="0" err="1">
-                <a:highlight>
-                  <a:srgbClr val="FE0101"/>
-                </a:highlight>
-              </a:rPr>
-              <a:t>attrivtution</a:t>
-            </a:r>
-            <a:r>
-              <a:rPr lang="en-US" dirty="0">
-                <a:highlight>
-                  <a:srgbClr val="FE0101"/>
-                </a:highlight>
-              </a:rPr>
-              <a:t> (number of posts, degree </a:t>
-            </a:r>
-            <a:r>
-              <a:rPr lang="en-US" dirty="0" err="1">
-                <a:highlight>
-                  <a:srgbClr val="FE0101"/>
-                </a:highlight>
-              </a:rPr>
-              <a:t>centralty</a:t>
-            </a:r>
-            <a:r>
-              <a:rPr lang="en-US" dirty="0">
-                <a:highlight>
-                  <a:srgbClr val="FE0101"/>
-                </a:highlight>
-              </a:rPr>
-              <a:t>….).</a:t>
-            </a:r>
-          </a:p>
-          <a:p>
-            <a:endParaRPr lang="en-US" dirty="0">
-              <a:highlight>
-                <a:srgbClr val="FE0101"/>
-              </a:highlight>
-            </a:endParaRPr>
-          </a:p>
-          <a:p>
-            <a:r>
-              <a:rPr lang="en-GB" sz="2000" b="1" strike="sngStrike" dirty="0">
-                <a:highlight>
-                  <a:srgbClr val="FE0101"/>
-                </a:highlight>
-              </a:rPr>
-              <a:t>H3.1 (</a:t>
-            </a:r>
-            <a:r>
-              <a:rPr lang="en-GB" sz="2100" b="1" strike="sngStrike" dirty="0">
-                <a:highlight>
-                  <a:srgbClr val="FE0101"/>
-                </a:highlight>
-              </a:rPr>
-              <a:t>Narrative </a:t>
-            </a:r>
-            <a:r>
-              <a:rPr lang="en-GB" sz="2000" b="1" strike="sngStrike" dirty="0">
-                <a:highlight>
-                  <a:srgbClr val="FE0101"/>
-                </a:highlight>
-              </a:rPr>
-              <a:t>Amplification</a:t>
-            </a:r>
-            <a:r>
-              <a:rPr lang="en-GB" sz="2100" b="1" strike="sngStrike" dirty="0">
-                <a:highlight>
-                  <a:srgbClr val="FE0101"/>
-                </a:highlight>
-              </a:rPr>
-              <a:t> Hypothesis</a:t>
-            </a:r>
-            <a:r>
-              <a:rPr lang="en-GB" sz="2000" b="1" strike="sngStrike" dirty="0">
-                <a:highlight>
-                  <a:srgbClr val="FE0101"/>
-                </a:highlight>
-              </a:rPr>
-              <a:t>):</a:t>
-            </a:r>
-          </a:p>
-          <a:p>
-            <a:pPr lvl="1"/>
-            <a:r>
-              <a:rPr lang="en-GB" sz="1600" strike="sngStrike" dirty="0">
-                <a:highlight>
-                  <a:srgbClr val="FE0101"/>
-                </a:highlight>
-              </a:rPr>
-              <a:t>IO drivers tend to lead topic narratives in online discussions.</a:t>
-            </a:r>
-          </a:p>
-          <a:p>
-            <a:pPr lvl="1"/>
-            <a:r>
-              <a:rPr lang="en-GB" sz="1600" strike="sngStrike" dirty="0">
-                <a:highlight>
-                  <a:srgbClr val="FE0101"/>
-                </a:highlight>
-              </a:rPr>
-              <a:t>Evaluation: Compare the mean key score between IO and non-IO users while controlling for activity and structural factors (e.g., posts, degree in graph).</a:t>
-            </a:r>
-          </a:p>
-          <a:p>
-            <a:pPr lvl="1"/>
-            <a:r>
-              <a:rPr lang="en-GB" sz="1600" strike="sngStrike" dirty="0">
-                <a:highlight>
-                  <a:srgbClr val="FE0101"/>
-                </a:highlight>
-              </a:rPr>
-              <a:t>Statistical test: paired t-test.</a:t>
-            </a:r>
-            <a:endParaRPr lang="en-US" dirty="0">
-              <a:highlight>
-                <a:srgbClr val="FE0101"/>
-              </a:highlight>
-            </a:endParaRPr>
-          </a:p>
-          <a:p>
-            <a:endParaRPr lang="en-US" dirty="0">
-              <a:highlight>
-                <a:srgbClr val="FE0101"/>
-              </a:highlight>
-            </a:endParaRPr>
-          </a:p>
-          <a:p>
-            <a:endParaRPr lang="en-US" dirty="0">
-              <a:highlight>
-                <a:srgbClr val="FE0101"/>
-              </a:highlight>
-            </a:endParaRPr>
-          </a:p>
-          <a:p>
-            <a:r>
-              <a:rPr lang="en-US" dirty="0">
-                <a:highlight>
-                  <a:srgbClr val="FE0101"/>
-                </a:highlight>
-              </a:rPr>
-              <a:t>Objective: Run classification model with and </a:t>
-            </a:r>
-            <a:r>
-              <a:rPr lang="en-US" dirty="0" err="1">
-                <a:highlight>
-                  <a:srgbClr val="FE0101"/>
-                </a:highlight>
-              </a:rPr>
-              <a:t>withput</a:t>
-            </a:r>
-            <a:r>
-              <a:rPr lang="en-US" dirty="0">
-                <a:highlight>
-                  <a:srgbClr val="FE0101"/>
-                </a:highlight>
-              </a:rPr>
-              <a:t> degree </a:t>
-            </a:r>
-            <a:r>
-              <a:rPr lang="en-US" dirty="0" err="1">
-                <a:highlight>
-                  <a:srgbClr val="FE0101"/>
-                </a:highlight>
-              </a:rPr>
-              <a:t>centralty</a:t>
-            </a:r>
-            <a:r>
-              <a:rPr lang="en-US" dirty="0">
-                <a:highlight>
-                  <a:srgbClr val="FE0101"/>
-                </a:highlight>
-              </a:rPr>
-              <a:t> and such. Only k-core. See the different  in performance.</a:t>
-            </a:r>
-          </a:p>
-        </p:txBody>
-      </p:sp>
-      <p:sp>
-        <p:nvSpPr>
-          <p:cNvPr id="4" name="Slide Number Placeholder 3">
-            <a:extLst>
-              <a:ext uri="{FF2B5EF4-FFF2-40B4-BE49-F238E27FC236}">
-                <a16:creationId xmlns:a16="http://schemas.microsoft.com/office/drawing/2014/main" id="{84980FF7-B252-DBE8-D483-F826D8B4076D}"/>
-              </a:ext>
-            </a:extLst>
-          </p:cNvPr>
-          <p:cNvSpPr>
-            <a:spLocks noGrp="1"/>
-          </p:cNvSpPr>
-          <p:nvPr>
-            <p:ph type="sldNum" sz="quarter" idx="12"/>
-          </p:nvPr>
-        </p:nvSpPr>
-        <p:spPr/>
-        <p:txBody>
-          <a:bodyPr/>
-          <a:lstStyle/>
-          <a:p>
-            <a:fld id="{E6AB8EDD-9EF2-4633-A1C2-4D908C1019B4}" type="slidenum">
-              <a:rPr lang="he-IL" smtClean="0"/>
-              <a:t>21</a:t>
-            </a:fld>
-            <a:endParaRPr lang="he-IL"/>
-          </a:p>
-        </p:txBody>
-      </p:sp>
-    </p:spTree>
-    <p:extLst>
-      <p:ext uri="{BB962C8B-B14F-4D97-AF65-F5344CB8AC3E}">
-        <p14:creationId xmlns:p14="http://schemas.microsoft.com/office/powerpoint/2010/main" val="2821941494"/>
-      </p:ext>
-    </p:extLst>
-  </p:cSld>
-  <p:clrMapOvr>
-    <a:masterClrMapping/>
-  </p:clrMapOvr>
-</p:sld>
-</file>
-
-<file path=ppt/slides/slide22.xml><?xml version="1.0" encoding="utf-8"?>
+<file path=ppt/slides/slide15.xml><?xml version="1.0" encoding="utf-8"?>
 <p:sld xmlns:a="http://schemas.openxmlformats.org/drawingml/2006/main" xmlns:r="http://schemas.openxmlformats.org/officeDocument/2006/relationships" xmlns:p="http://schemas.openxmlformats.org/presentationml/2006/main">
   <p:cSld>
     <p:spTree>
@@ -14908,7 +12772,7 @@
           <a:p>
             <a:fld id="{E6AB8EDD-9EF2-4633-A1C2-4D908C1019B4}" type="slidenum">
               <a:rPr lang="he-IL" smtClean="0"/>
-              <a:t>22</a:t>
+              <a:t>15</a:t>
             </a:fld>
             <a:endParaRPr lang="he-IL"/>
           </a:p>
@@ -14927,7 +12791,7 @@
 </p:sld>
 </file>
 
-<file path=ppt/slides/slide23.xml><?xml version="1.0" encoding="utf-8"?>
+<file path=ppt/slides/slide16.xml><?xml version="1.0" encoding="utf-8"?>
 <p:sld xmlns:a="http://schemas.openxmlformats.org/drawingml/2006/main" xmlns:r="http://schemas.openxmlformats.org/officeDocument/2006/relationships" xmlns:p="http://schemas.openxmlformats.org/presentationml/2006/main">
   <p:cSld>
     <p:spTree>
@@ -15044,7 +12908,7 @@
             <a:pPr lvl="2"/>
             <a:r>
               <a:rPr lang="en-GB" sz="1600" dirty="0"/>
-              <a:t>Independent variable:  k-core values (numeric, discrete non-negative).</a:t>
+              <a:t>Independent variable:  nodes’ core-number values (numeric, discrete non-negative).</a:t>
             </a:r>
           </a:p>
           <a:p>
@@ -15114,7 +12978,7 @@
           <a:p>
             <a:fld id="{E6AB8EDD-9EF2-4633-A1C2-4D908C1019B4}" type="slidenum">
               <a:rPr lang="he-IL" smtClean="0"/>
-              <a:t>23</a:t>
+              <a:t>16</a:t>
             </a:fld>
             <a:endParaRPr lang="he-IL"/>
           </a:p>
@@ -15133,7 +12997,7 @@
 </p:sld>
 </file>
 
-<file path=ppt/slides/slide24.xml><?xml version="1.0" encoding="utf-8"?>
+<file path=ppt/slides/slide17.xml><?xml version="1.0" encoding="utf-8"?>
 <p:sld xmlns:a="http://schemas.openxmlformats.org/drawingml/2006/main" xmlns:r="http://schemas.openxmlformats.org/officeDocument/2006/relationships" xmlns:p="http://schemas.openxmlformats.org/presentationml/2006/main">
   <p:cSld>
     <p:spTree>
@@ -15313,7 +13177,7 @@
           <a:p>
             <a:fld id="{E6AB8EDD-9EF2-4633-A1C2-4D908C1019B4}" type="slidenum">
               <a:rPr lang="he-IL" smtClean="0"/>
-              <a:t>24</a:t>
+              <a:t>17</a:t>
             </a:fld>
             <a:endParaRPr lang="he-IL"/>
           </a:p>
@@ -15539,7 +13403,7 @@
 </p:sld>
 </file>
 
-<file path=ppt/slides/slide25.xml><?xml version="1.0" encoding="utf-8"?>
+<file path=ppt/slides/slide18.xml><?xml version="1.0" encoding="utf-8"?>
 <p:sld xmlns:a="http://schemas.openxmlformats.org/drawingml/2006/main" xmlns:r="http://schemas.openxmlformats.org/officeDocument/2006/relationships" xmlns:p="http://schemas.openxmlformats.org/presentationml/2006/main">
   <p:cSld>
     <p:spTree>
@@ -15728,7 +13592,7 @@
           <a:p>
             <a:fld id="{E6AB8EDD-9EF2-4633-A1C2-4D908C1019B4}" type="slidenum">
               <a:rPr lang="he-IL" smtClean="0"/>
-              <a:t>25</a:t>
+              <a:t>18</a:t>
             </a:fld>
             <a:endParaRPr lang="he-IL"/>
           </a:p>
@@ -15836,7 +13700,7 @@
 </p:sld>
 </file>
 
-<file path=ppt/slides/slide26.xml><?xml version="1.0" encoding="utf-8"?>
+<file path=ppt/slides/slide19.xml><?xml version="1.0" encoding="utf-8"?>
 <p:sld xmlns:a="http://schemas.openxmlformats.org/drawingml/2006/main" xmlns:r="http://schemas.openxmlformats.org/officeDocument/2006/relationships" xmlns:p="http://schemas.openxmlformats.org/presentationml/2006/main">
   <p:cSld>
     <p:spTree>
@@ -16025,7 +13889,7 @@
           <a:p>
             <a:fld id="{E6AB8EDD-9EF2-4633-A1C2-4D908C1019B4}" type="slidenum">
               <a:rPr lang="he-IL" smtClean="0"/>
-              <a:t>26</a:t>
+              <a:t>19</a:t>
             </a:fld>
             <a:endParaRPr lang="he-IL"/>
           </a:p>
@@ -16133,7 +13997,149 @@
 </p:sld>
 </file>
 
-<file path=ppt/slides/slide27.xml><?xml version="1.0" encoding="utf-8"?>
+<file path=ppt/slides/slide2.xml><?xml version="1.0" encoding="utf-8"?>
+<p:sld xmlns:a="http://schemas.openxmlformats.org/drawingml/2006/main" xmlns:r="http://schemas.openxmlformats.org/officeDocument/2006/relationships" xmlns:p="http://schemas.openxmlformats.org/presentationml/2006/main">
+  <p:cSld>
+    <p:spTree>
+      <p:nvGrpSpPr>
+        <p:cNvPr id="1" name=""/>
+        <p:cNvGrpSpPr/>
+        <p:nvPr/>
+      </p:nvGrpSpPr>
+      <p:grpSpPr>
+        <a:xfrm>
+          <a:off x="0" y="0"/>
+          <a:ext cx="0" cy="0"/>
+          <a:chOff x="0" y="0"/>
+          <a:chExt cx="0" cy="0"/>
+        </a:xfrm>
+      </p:grpSpPr>
+      <p:sp>
+        <p:nvSpPr>
+          <p:cNvPr id="2" name="Title 1">
+            <a:extLst>
+              <a:ext uri="{FF2B5EF4-FFF2-40B4-BE49-F238E27FC236}">
+                <a16:creationId xmlns:a16="http://schemas.microsoft.com/office/drawing/2014/main" id="{778AF6C1-AB65-35BD-8133-F3F29DB90DD0}"/>
+              </a:ext>
+            </a:extLst>
+          </p:cNvPr>
+          <p:cNvSpPr>
+            <a:spLocks noGrp="1"/>
+          </p:cNvSpPr>
+          <p:nvPr>
+            <p:ph type="title"/>
+          </p:nvPr>
+        </p:nvSpPr>
+        <p:spPr/>
+        <p:txBody>
+          <a:bodyPr/>
+          <a:lstStyle/>
+          <a:p>
+            <a:r>
+              <a:rPr lang="en-US" dirty="0"/>
+              <a:t>Terms &amp; Definitions - IO</a:t>
+            </a:r>
+            <a:endParaRPr lang="en-IL" dirty="0"/>
+          </a:p>
+        </p:txBody>
+      </p:sp>
+      <p:sp>
+        <p:nvSpPr>
+          <p:cNvPr id="3" name="Content Placeholder 2">
+            <a:extLst>
+              <a:ext uri="{FF2B5EF4-FFF2-40B4-BE49-F238E27FC236}">
+                <a16:creationId xmlns:a16="http://schemas.microsoft.com/office/drawing/2014/main" id="{2591FA6F-2F61-214E-F20E-E15E3A7E9E5E}"/>
+              </a:ext>
+            </a:extLst>
+          </p:cNvPr>
+          <p:cNvSpPr>
+            <a:spLocks noGrp="1"/>
+          </p:cNvSpPr>
+          <p:nvPr>
+            <p:ph idx="1"/>
+          </p:nvPr>
+        </p:nvSpPr>
+        <p:spPr/>
+        <p:txBody>
+          <a:bodyPr/>
+          <a:lstStyle/>
+          <a:p>
+            <a:r>
+              <a:rPr lang="en-GB" b="1" dirty="0"/>
+              <a:t>Information Operation (IO):</a:t>
+            </a:r>
+            <a:r>
+              <a:rPr lang="en-GB" dirty="0"/>
+              <a:t> A collection of publications by coordinated actors pursuing a shared intent while misleading others.</a:t>
+            </a:r>
+          </a:p>
+          <a:p>
+            <a:pPr fontAlgn="base"/>
+            <a:r>
+              <a:rPr lang="en-GB" b="1" dirty="0"/>
+              <a:t>IO Driver:</a:t>
+            </a:r>
+            <a:r>
+              <a:rPr lang="en-GB" dirty="0"/>
+              <a:t> An account that promotes one or more IO.</a:t>
+            </a:r>
+          </a:p>
+          <a:p>
+            <a:pPr fontAlgn="base"/>
+            <a:r>
+              <a:rPr lang="en-GB" b="1" dirty="0"/>
+              <a:t>Author ‘s IO Label:</a:t>
+            </a:r>
+            <a:r>
+              <a:rPr lang="en-GB" dirty="0"/>
+              <a:t> label =  1 if the author is a IO Driver and label = 0 if not.</a:t>
+            </a:r>
+          </a:p>
+        </p:txBody>
+      </p:sp>
+      <p:sp>
+        <p:nvSpPr>
+          <p:cNvPr id="4" name="Slide Number Placeholder 3">
+            <a:extLst>
+              <a:ext uri="{FF2B5EF4-FFF2-40B4-BE49-F238E27FC236}">
+                <a16:creationId xmlns:a16="http://schemas.microsoft.com/office/drawing/2014/main" id="{30442458-50C9-BF06-3967-CE25C3C30F5D}"/>
+              </a:ext>
+            </a:extLst>
+          </p:cNvPr>
+          <p:cNvSpPr>
+            <a:spLocks noGrp="1"/>
+          </p:cNvSpPr>
+          <p:nvPr>
+            <p:ph type="sldNum" sz="quarter" idx="12"/>
+          </p:nvPr>
+        </p:nvSpPr>
+        <p:spPr/>
+        <p:txBody>
+          <a:bodyPr/>
+          <a:lstStyle/>
+          <a:p>
+            <a:fld id="{E6AB8EDD-9EF2-4633-A1C2-4D908C1019B4}" type="slidenum">
+              <a:rPr lang="he-IL" smtClean="0"/>
+              <a:t>2</a:t>
+            </a:fld>
+            <a:endParaRPr lang="he-IL"/>
+          </a:p>
+        </p:txBody>
+      </p:sp>
+    </p:spTree>
+    <p:extLst>
+      <p:ext uri="{BB962C8B-B14F-4D97-AF65-F5344CB8AC3E}">
+        <p14:creationId xmlns:p14="http://schemas.microsoft.com/office/powerpoint/2010/main" val="1192892277"/>
+      </p:ext>
+    </p:extLst>
+  </p:cSld>
+  <p:clrMapOvr>
+    <a:masterClrMapping/>
+  </p:clrMapOvr>
+</p:sld>
+</file>
+
+<file path=ppt/slides/slide20.xml><?xml version="1.0" encoding="utf-8"?>
 <p:sld xmlns:a="http://schemas.openxmlformats.org/drawingml/2006/main" xmlns:r="http://schemas.openxmlformats.org/officeDocument/2006/relationships" xmlns:p="http://schemas.openxmlformats.org/presentationml/2006/main" show="0">
   <p:cSld>
     <p:spTree>
@@ -16320,7 +14326,7 @@
           <a:p>
             <a:fld id="{E6AB8EDD-9EF2-4633-A1C2-4D908C1019B4}" type="slidenum">
               <a:rPr lang="he-IL" smtClean="0"/>
-              <a:t>27</a:t>
+              <a:t>20</a:t>
             </a:fld>
             <a:endParaRPr lang="he-IL"/>
           </a:p>
@@ -16511,7 +14517,7 @@
 </p:sld>
 </file>
 
-<file path=ppt/slides/slide28.xml><?xml version="1.0" encoding="utf-8"?>
+<file path=ppt/slides/slide21.xml><?xml version="1.0" encoding="utf-8"?>
 <p:sld xmlns:a="http://schemas.openxmlformats.org/drawingml/2006/main" xmlns:r="http://schemas.openxmlformats.org/officeDocument/2006/relationships" xmlns:p="http://schemas.openxmlformats.org/presentationml/2006/main">
   <p:cSld>
     <p:spTree>
@@ -16689,7 +14695,7 @@
           <a:p>
             <a:fld id="{E6AB8EDD-9EF2-4633-A1C2-4D908C1019B4}" type="slidenum">
               <a:rPr lang="he-IL" smtClean="0"/>
-              <a:t>28</a:t>
+              <a:t>21</a:t>
             </a:fld>
             <a:endParaRPr lang="he-IL"/>
           </a:p>
@@ -16708,7 +14714,7 @@
 </p:sld>
 </file>
 
-<file path=ppt/slides/slide29.xml><?xml version="1.0" encoding="utf-8"?>
+<file path=ppt/slides/slide22.xml><?xml version="1.0" encoding="utf-8"?>
 <p:sld xmlns:a="http://schemas.openxmlformats.org/drawingml/2006/main" xmlns:r="http://schemas.openxmlformats.org/officeDocument/2006/relationships" xmlns:p="http://schemas.openxmlformats.org/presentationml/2006/main">
   <p:cSld>
     <p:spTree>
@@ -16761,7 +14767,7 @@
             </a:br>
             <a:r>
               <a:rPr lang="en-GB" sz="2400" dirty="0"/>
-              <a:t>for top topic</a:t>
+              <a:t>top topic</a:t>
             </a:r>
             <a:endParaRPr lang="en-IL" sz="2400" dirty="0"/>
           </a:p>
@@ -16943,7 +14949,7 @@
           <a:p>
             <a:fld id="{E6AB8EDD-9EF2-4633-A1C2-4D908C1019B4}" type="slidenum">
               <a:rPr lang="he-IL" smtClean="0"/>
-              <a:t>29</a:t>
+              <a:t>22</a:t>
             </a:fld>
             <a:endParaRPr lang="he-IL"/>
           </a:p>
@@ -17107,169 +15113,7 @@
 </p:sld>
 </file>
 
-<file path=ppt/slides/slide3.xml><?xml version="1.0" encoding="utf-8"?>
-<p:sld xmlns:a="http://schemas.openxmlformats.org/drawingml/2006/main" xmlns:r="http://schemas.openxmlformats.org/officeDocument/2006/relationships" xmlns:p="http://schemas.openxmlformats.org/presentationml/2006/main">
-  <p:cSld>
-    <p:spTree>
-      <p:nvGrpSpPr>
-        <p:cNvPr id="1" name="">
-          <a:extLst>
-            <a:ext uri="{FF2B5EF4-FFF2-40B4-BE49-F238E27FC236}">
-              <a16:creationId xmlns:a16="http://schemas.microsoft.com/office/drawing/2014/main" id="{1F9F5D21-FEAA-6801-6A47-D72173FC7D47}"/>
-            </a:ext>
-          </a:extLst>
-        </p:cNvPr>
-        <p:cNvGrpSpPr/>
-        <p:nvPr/>
-      </p:nvGrpSpPr>
-      <p:grpSpPr>
-        <a:xfrm>
-          <a:off x="0" y="0"/>
-          <a:ext cx="0" cy="0"/>
-          <a:chOff x="0" y="0"/>
-          <a:chExt cx="0" cy="0"/>
-        </a:xfrm>
-      </p:grpSpPr>
-      <p:sp>
-        <p:nvSpPr>
-          <p:cNvPr id="2" name="Title 1">
-            <a:extLst>
-              <a:ext uri="{FF2B5EF4-FFF2-40B4-BE49-F238E27FC236}">
-                <a16:creationId xmlns:a16="http://schemas.microsoft.com/office/drawing/2014/main" id="{BDB8C365-C8A0-2A99-D1C2-5872EAA4DF81}"/>
-              </a:ext>
-            </a:extLst>
-          </p:cNvPr>
-          <p:cNvSpPr>
-            <a:spLocks noGrp="1"/>
-          </p:cNvSpPr>
-          <p:nvPr>
-            <p:ph type="title"/>
-          </p:nvPr>
-        </p:nvSpPr>
-        <p:spPr/>
-        <p:txBody>
-          <a:bodyPr/>
-          <a:lstStyle/>
-          <a:p>
-            <a:r>
-              <a:rPr lang="en-US" dirty="0"/>
-              <a:t>Terms &amp; Definitions - Key</a:t>
-            </a:r>
-            <a:endParaRPr lang="en-IL" dirty="0"/>
-          </a:p>
-        </p:txBody>
-      </p:sp>
-      <p:sp>
-        <p:nvSpPr>
-          <p:cNvPr id="3" name="Content Placeholder 2">
-            <a:extLst>
-              <a:ext uri="{FF2B5EF4-FFF2-40B4-BE49-F238E27FC236}">
-                <a16:creationId xmlns:a16="http://schemas.microsoft.com/office/drawing/2014/main" id="{91BF7DE5-3E08-EDD2-0E70-2E2FD9E3B8B8}"/>
-              </a:ext>
-            </a:extLst>
-          </p:cNvPr>
-          <p:cNvSpPr>
-            <a:spLocks noGrp="1"/>
-          </p:cNvSpPr>
-          <p:nvPr>
-            <p:ph idx="1"/>
-          </p:nvPr>
-        </p:nvSpPr>
-        <p:spPr/>
-        <p:txBody>
-          <a:bodyPr/>
-          <a:lstStyle/>
-          <a:p>
-            <a:r>
-              <a:rPr lang="en-GB" b="1" dirty="0"/>
-              <a:t>Key Author:</a:t>
-            </a:r>
-            <a:r>
-              <a:rPr lang="en-GB" dirty="0"/>
-              <a:t> An author who is a leading participant in one or more topic(s).</a:t>
-            </a:r>
-          </a:p>
-          <a:p>
-            <a:r>
-              <a:rPr lang="en-GB" b="1" dirty="0"/>
-              <a:t>Author-Topic Key Score: </a:t>
-            </a:r>
-            <a:r>
-              <a:rPr lang="en-GB" dirty="0"/>
-              <a:t>A measure of how strongly an author is associated with a topic, emphasizing topic-specific content. It is calculated based on the use of topic-related entities (e.g., hashtags, mentions, URLs) in the author’s posts.</a:t>
-            </a:r>
-            <a:endParaRPr lang="en-GB" b="1" dirty="0"/>
-          </a:p>
-          <a:p>
-            <a:r>
-              <a:rPr lang="en-GB" b="1" dirty="0"/>
-              <a:t>Author Key Score: </a:t>
-            </a:r>
-            <a:r>
-              <a:rPr lang="en-GB" dirty="0"/>
-              <a:t>sum of the </a:t>
-            </a:r>
-            <a:r>
-              <a:rPr lang="en-GB" i="1" dirty="0"/>
-              <a:t>Author-Topic Key Score </a:t>
-            </a:r>
-            <a:r>
-              <a:rPr lang="en-GB" dirty="0"/>
-              <a:t>across all topics</a:t>
-            </a:r>
-            <a:r>
-              <a:rPr lang="en-GB" i="1" dirty="0"/>
-              <a:t>.</a:t>
-            </a:r>
-          </a:p>
-          <a:p>
-            <a:endParaRPr lang="en-GB" b="1" dirty="0"/>
-          </a:p>
-        </p:txBody>
-      </p:sp>
-      <p:sp>
-        <p:nvSpPr>
-          <p:cNvPr id="4" name="Slide Number Placeholder 3">
-            <a:extLst>
-              <a:ext uri="{FF2B5EF4-FFF2-40B4-BE49-F238E27FC236}">
-                <a16:creationId xmlns:a16="http://schemas.microsoft.com/office/drawing/2014/main" id="{6A443EF8-3FAF-E450-9AAA-2FA80E88EF36}"/>
-              </a:ext>
-            </a:extLst>
-          </p:cNvPr>
-          <p:cNvSpPr>
-            <a:spLocks noGrp="1"/>
-          </p:cNvSpPr>
-          <p:nvPr>
-            <p:ph type="sldNum" sz="quarter" idx="12"/>
-          </p:nvPr>
-        </p:nvSpPr>
-        <p:spPr/>
-        <p:txBody>
-          <a:bodyPr/>
-          <a:lstStyle/>
-          <a:p>
-            <a:fld id="{E6AB8EDD-9EF2-4633-A1C2-4D908C1019B4}" type="slidenum">
-              <a:rPr lang="he-IL" smtClean="0"/>
-              <a:t>3</a:t>
-            </a:fld>
-            <a:endParaRPr lang="he-IL"/>
-          </a:p>
-        </p:txBody>
-      </p:sp>
-    </p:spTree>
-    <p:extLst>
-      <p:ext uri="{BB962C8B-B14F-4D97-AF65-F5344CB8AC3E}">
-        <p14:creationId xmlns:p14="http://schemas.microsoft.com/office/powerpoint/2010/main" val="790370878"/>
-      </p:ext>
-    </p:extLst>
-  </p:cSld>
-  <p:clrMapOvr>
-    <a:masterClrMapping/>
-  </p:clrMapOvr>
-</p:sld>
-</file>
-
-<file path=ppt/slides/slide30.xml><?xml version="1.0" encoding="utf-8"?>
+<file path=ppt/slides/slide23.xml><?xml version="1.0" encoding="utf-8"?>
 <p:sld xmlns:a="http://schemas.openxmlformats.org/drawingml/2006/main" xmlns:r="http://schemas.openxmlformats.org/officeDocument/2006/relationships" xmlns:p="http://schemas.openxmlformats.org/presentationml/2006/main">
   <p:cSld>
     <p:spTree>
@@ -17374,7 +15218,7 @@
           <a:p>
             <a:fld id="{E6AB8EDD-9EF2-4633-A1C2-4D908C1019B4}" type="slidenum">
               <a:rPr lang="he-IL" smtClean="0"/>
-              <a:t>30</a:t>
+              <a:t>23</a:t>
             </a:fld>
             <a:endParaRPr lang="he-IL"/>
           </a:p>
@@ -17393,7 +15237,7 @@
 </p:sld>
 </file>
 
-<file path=ppt/slides/slide31.xml><?xml version="1.0" encoding="utf-8"?>
+<file path=ppt/slides/slide24.xml><?xml version="1.0" encoding="utf-8"?>
 <p:sld xmlns:a="http://schemas.openxmlformats.org/drawingml/2006/main" xmlns:r="http://schemas.openxmlformats.org/officeDocument/2006/relationships" xmlns:p="http://schemas.openxmlformats.org/presentationml/2006/main">
   <p:cSld>
     <p:spTree>
@@ -17619,7 +15463,7 @@
           <a:p>
             <a:fld id="{E6AB8EDD-9EF2-4633-A1C2-4D908C1019B4}" type="slidenum">
               <a:rPr lang="he-IL" smtClean="0"/>
-              <a:t>31</a:t>
+              <a:t>24</a:t>
             </a:fld>
             <a:endParaRPr lang="he-IL"/>
           </a:p>
@@ -17721,7 +15565,7 @@
 </p:sld>
 </file>
 
-<file path=ppt/slides/slide32.xml><?xml version="1.0" encoding="utf-8"?>
+<file path=ppt/slides/slide25.xml><?xml version="1.0" encoding="utf-8"?>
 <p:sld xmlns:a="http://schemas.openxmlformats.org/drawingml/2006/main" xmlns:r="http://schemas.openxmlformats.org/officeDocument/2006/relationships" xmlns:p="http://schemas.openxmlformats.org/presentationml/2006/main">
   <p:cSld>
     <p:spTree>
@@ -17833,7 +15677,7 @@
           <a:p>
             <a:fld id="{E6AB8EDD-9EF2-4633-A1C2-4D908C1019B4}" type="slidenum">
               <a:rPr lang="he-IL" smtClean="0"/>
-              <a:t>32</a:t>
+              <a:t>25</a:t>
             </a:fld>
             <a:endParaRPr lang="he-IL"/>
           </a:p>
@@ -17852,7 +15696,7 @@
 </p:sld>
 </file>
 
-<file path=ppt/slides/slide33.xml><?xml version="1.0" encoding="utf-8"?>
+<file path=ppt/slides/slide26.xml><?xml version="1.0" encoding="utf-8"?>
 <p:sld xmlns:a="http://schemas.openxmlformats.org/drawingml/2006/main" xmlns:r="http://schemas.openxmlformats.org/officeDocument/2006/relationships" xmlns:p="http://schemas.openxmlformats.org/presentationml/2006/main">
   <p:cSld>
     <p:spTree>
@@ -17945,7 +15789,7 @@
                   <a:spcPts val="600"/>
                 </a:spcAft>
               </a:pPr>
-              <a:t>33</a:t>
+              <a:t>26</a:t>
             </a:fld>
             <a:endParaRPr lang="he-IL"/>
           </a:p>
@@ -17995,7 +15839,7 @@
 </p:sld>
 </file>
 
-<file path=ppt/slides/slide34.xml><?xml version="1.0" encoding="utf-8"?>
+<file path=ppt/slides/slide27.xml><?xml version="1.0" encoding="utf-8"?>
 <p:sld xmlns:a="http://schemas.openxmlformats.org/drawingml/2006/main" xmlns:r="http://schemas.openxmlformats.org/officeDocument/2006/relationships" xmlns:p="http://schemas.openxmlformats.org/presentationml/2006/main">
   <p:cSld>
     <p:spTree>
@@ -18100,7 +15944,7 @@
           <a:p>
             <a:fld id="{E6AB8EDD-9EF2-4633-A1C2-4D908C1019B4}" type="slidenum">
               <a:rPr lang="he-IL" smtClean="0"/>
-              <a:t>34</a:t>
+              <a:t>27</a:t>
             </a:fld>
             <a:endParaRPr lang="he-IL"/>
           </a:p>
@@ -18119,7 +15963,7 @@
 </p:sld>
 </file>
 
-<file path=ppt/slides/slide35.xml><?xml version="1.0" encoding="utf-8"?>
+<file path=ppt/slides/slide28.xml><?xml version="1.0" encoding="utf-8"?>
 <p:sld xmlns:a="http://schemas.openxmlformats.org/drawingml/2006/main" xmlns:r="http://schemas.openxmlformats.org/officeDocument/2006/relationships" xmlns:p="http://schemas.openxmlformats.org/presentationml/2006/main">
   <p:cSld>
     <p:spTree>
@@ -18202,7 +16046,7 @@
           <a:p>
             <a:r>
               <a:rPr lang="en-GB" dirty="0"/>
-              <a:t>Required Data</a:t>
+              <a:t>Required Columns</a:t>
             </a:r>
             <a:endParaRPr lang="en-IL" dirty="0"/>
           </a:p>
@@ -18231,7 +16075,7 @@
           <a:p>
             <a:fld id="{E6AB8EDD-9EF2-4633-A1C2-4D908C1019B4}" type="slidenum">
               <a:rPr lang="he-IL" smtClean="0"/>
-              <a:t>35</a:t>
+              <a:t>28</a:t>
             </a:fld>
             <a:endParaRPr lang="he-IL"/>
           </a:p>
@@ -18251,8 +16095,8 @@
         </p:nvSpPr>
         <p:spPr>
           <a:xfrm>
-            <a:off x="4666577" y="1971294"/>
-            <a:ext cx="2506486" cy="2582777"/>
+            <a:off x="4666577" y="1971295"/>
+            <a:ext cx="2506486" cy="2571856"/>
           </a:xfrm>
           <a:prstGeom prst="rect">
             <a:avLst/>
@@ -18355,7 +16199,7 @@
         </p:nvSpPr>
         <p:spPr>
           <a:xfrm>
-            <a:off x="8613263" y="1810698"/>
+            <a:off x="2828241" y="5661372"/>
             <a:ext cx="1516380" cy="369332"/>
           </a:xfrm>
           <a:prstGeom prst="rect">
@@ -18394,7 +16238,7 @@
         </p:nvSpPr>
         <p:spPr>
           <a:xfrm>
-            <a:off x="8613263" y="1411164"/>
+            <a:off x="2828241" y="2977290"/>
             <a:ext cx="1516379" cy="369332"/>
           </a:xfrm>
           <a:prstGeom prst="rect">
@@ -18414,6 +16258,97 @@
             <a:r>
               <a:rPr lang="en-US" dirty="0"/>
               <a:t>BGU INPUT</a:t>
+            </a:r>
+            <a:endParaRPr lang="en-IL" dirty="0"/>
+          </a:p>
+        </p:txBody>
+      </p:sp>
+      <p:sp>
+        <p:nvSpPr>
+          <p:cNvPr id="5" name="Rectangle 4">
+            <a:extLst>
+              <a:ext uri="{FF2B5EF4-FFF2-40B4-BE49-F238E27FC236}">
+                <a16:creationId xmlns:a16="http://schemas.microsoft.com/office/drawing/2014/main" id="{21720186-D18A-C1BF-4021-FFC94FD031F0}"/>
+              </a:ext>
+            </a:extLst>
+          </p:cNvPr>
+          <p:cNvSpPr/>
+          <p:nvPr/>
+        </p:nvSpPr>
+        <p:spPr>
+          <a:xfrm>
+            <a:off x="4666577" y="4587240"/>
+            <a:ext cx="2506486" cy="152399"/>
+          </a:xfrm>
+          <a:prstGeom prst="rect">
+            <a:avLst/>
+          </a:prstGeom>
+          <a:noFill/>
+          <a:ln w="28575">
+            <a:solidFill>
+              <a:srgbClr val="00B0F0"/>
+            </a:solidFill>
+          </a:ln>
+        </p:spPr>
+        <p:style>
+          <a:lnRef idx="2">
+            <a:schemeClr val="accent1">
+              <a:shade val="15000"/>
+            </a:schemeClr>
+          </a:lnRef>
+          <a:fillRef idx="1">
+            <a:schemeClr val="accent1"/>
+          </a:fillRef>
+          <a:effectRef idx="0">
+            <a:schemeClr val="accent1"/>
+          </a:effectRef>
+          <a:fontRef idx="minor">
+            <a:schemeClr val="lt1"/>
+          </a:fontRef>
+        </p:style>
+        <p:txBody>
+          <a:bodyPr rtlCol="0" anchor="ctr"/>
+          <a:lstStyle/>
+          <a:p>
+            <a:pPr algn="ctr"/>
+            <a:endParaRPr lang="en-IL"/>
+          </a:p>
+        </p:txBody>
+      </p:sp>
+      <p:sp>
+        <p:nvSpPr>
+          <p:cNvPr id="6" name="TextBox 5">
+            <a:extLst>
+              <a:ext uri="{FF2B5EF4-FFF2-40B4-BE49-F238E27FC236}">
+                <a16:creationId xmlns:a16="http://schemas.microsoft.com/office/drawing/2014/main" id="{0D5E807B-23DD-FADB-5731-B33B9C53D945}"/>
+              </a:ext>
+            </a:extLst>
+          </p:cNvPr>
+          <p:cNvSpPr txBox="1"/>
+          <p:nvPr/>
+        </p:nvSpPr>
+        <p:spPr>
+          <a:xfrm>
+            <a:off x="2828241" y="4458796"/>
+            <a:ext cx="1516379" cy="369332"/>
+          </a:xfrm>
+          <a:prstGeom prst="rect">
+            <a:avLst/>
+          </a:prstGeom>
+          <a:solidFill>
+            <a:srgbClr val="00B0F0"/>
+          </a:solidFill>
+        </p:spPr>
+        <p:txBody>
+          <a:bodyPr wrap="square" rtlCol="0">
+            <a:spAutoFit/>
+          </a:bodyPr>
+          <a:lstStyle/>
+          <a:p>
+            <a:pPr algn="ctr"/>
+            <a:r>
+              <a:rPr lang="en-US" dirty="0"/>
+              <a:t>For Evaluation</a:t>
             </a:r>
             <a:endParaRPr lang="en-IL" dirty="0"/>
           </a:p>
@@ -18432,7 +16367,7 @@
 </p:sld>
 </file>
 
-<file path=ppt/slides/slide36.xml><?xml version="1.0" encoding="utf-8"?>
+<file path=ppt/slides/slide29.xml><?xml version="1.0" encoding="utf-8"?>
 <p:sld xmlns:a="http://schemas.openxmlformats.org/drawingml/2006/main" xmlns:r="http://schemas.openxmlformats.org/officeDocument/2006/relationships" xmlns:p="http://schemas.openxmlformats.org/presentationml/2006/main">
   <p:cSld>
     <p:spTree>
@@ -18507,7 +16442,7 @@
           <a:p>
             <a:fld id="{E6AB8EDD-9EF2-4633-A1C2-4D908C1019B4}" type="slidenum">
               <a:rPr lang="he-IL" smtClean="0"/>
-              <a:t>36</a:t>
+              <a:t>29</a:t>
             </a:fld>
             <a:endParaRPr lang="he-IL"/>
           </a:p>
@@ -18891,6 +16826,168 @@
 </p:sld>
 </file>
 
+<file path=ppt/slides/slide3.xml><?xml version="1.0" encoding="utf-8"?>
+<p:sld xmlns:a="http://schemas.openxmlformats.org/drawingml/2006/main" xmlns:r="http://schemas.openxmlformats.org/officeDocument/2006/relationships" xmlns:p="http://schemas.openxmlformats.org/presentationml/2006/main">
+  <p:cSld>
+    <p:spTree>
+      <p:nvGrpSpPr>
+        <p:cNvPr id="1" name="">
+          <a:extLst>
+            <a:ext uri="{FF2B5EF4-FFF2-40B4-BE49-F238E27FC236}">
+              <a16:creationId xmlns:a16="http://schemas.microsoft.com/office/drawing/2014/main" id="{1F9F5D21-FEAA-6801-6A47-D72173FC7D47}"/>
+            </a:ext>
+          </a:extLst>
+        </p:cNvPr>
+        <p:cNvGrpSpPr/>
+        <p:nvPr/>
+      </p:nvGrpSpPr>
+      <p:grpSpPr>
+        <a:xfrm>
+          <a:off x="0" y="0"/>
+          <a:ext cx="0" cy="0"/>
+          <a:chOff x="0" y="0"/>
+          <a:chExt cx="0" cy="0"/>
+        </a:xfrm>
+      </p:grpSpPr>
+      <p:sp>
+        <p:nvSpPr>
+          <p:cNvPr id="2" name="Title 1">
+            <a:extLst>
+              <a:ext uri="{FF2B5EF4-FFF2-40B4-BE49-F238E27FC236}">
+                <a16:creationId xmlns:a16="http://schemas.microsoft.com/office/drawing/2014/main" id="{BDB8C365-C8A0-2A99-D1C2-5872EAA4DF81}"/>
+              </a:ext>
+            </a:extLst>
+          </p:cNvPr>
+          <p:cNvSpPr>
+            <a:spLocks noGrp="1"/>
+          </p:cNvSpPr>
+          <p:nvPr>
+            <p:ph type="title"/>
+          </p:nvPr>
+        </p:nvSpPr>
+        <p:spPr/>
+        <p:txBody>
+          <a:bodyPr/>
+          <a:lstStyle/>
+          <a:p>
+            <a:r>
+              <a:rPr lang="en-US" dirty="0"/>
+              <a:t>Terms &amp; Definitions - Key</a:t>
+            </a:r>
+            <a:endParaRPr lang="en-IL" dirty="0"/>
+          </a:p>
+        </p:txBody>
+      </p:sp>
+      <p:sp>
+        <p:nvSpPr>
+          <p:cNvPr id="3" name="Content Placeholder 2">
+            <a:extLst>
+              <a:ext uri="{FF2B5EF4-FFF2-40B4-BE49-F238E27FC236}">
+                <a16:creationId xmlns:a16="http://schemas.microsoft.com/office/drawing/2014/main" id="{91BF7DE5-3E08-EDD2-0E70-2E2FD9E3B8B8}"/>
+              </a:ext>
+            </a:extLst>
+          </p:cNvPr>
+          <p:cNvSpPr>
+            <a:spLocks noGrp="1"/>
+          </p:cNvSpPr>
+          <p:nvPr>
+            <p:ph idx="1"/>
+          </p:nvPr>
+        </p:nvSpPr>
+        <p:spPr/>
+        <p:txBody>
+          <a:bodyPr/>
+          <a:lstStyle/>
+          <a:p>
+            <a:r>
+              <a:rPr lang="en-GB" b="1" dirty="0"/>
+              <a:t>Key Author:</a:t>
+            </a:r>
+            <a:r>
+              <a:rPr lang="en-GB" dirty="0"/>
+              <a:t> An author who is a leading participant in one or more topic(s).</a:t>
+            </a:r>
+          </a:p>
+          <a:p>
+            <a:r>
+              <a:rPr lang="en-GB" b="1" dirty="0"/>
+              <a:t>Author-Topic Key Score: </a:t>
+            </a:r>
+            <a:r>
+              <a:rPr lang="en-GB" dirty="0"/>
+              <a:t>A measure of how strongly an author is associated with a topic, emphasizing topic-specific content. It is calculated based on the use of topic-related entities (e.g., hashtags, mentions, URLs) in the author’s posts.</a:t>
+            </a:r>
+            <a:endParaRPr lang="en-GB" b="1" dirty="0"/>
+          </a:p>
+          <a:p>
+            <a:r>
+              <a:rPr lang="en-GB" b="1" dirty="0"/>
+              <a:t>Author Key Score: </a:t>
+            </a:r>
+            <a:r>
+              <a:rPr lang="en-GB" dirty="0"/>
+              <a:t>sum of the </a:t>
+            </a:r>
+            <a:r>
+              <a:rPr lang="en-GB" i="1" dirty="0"/>
+              <a:t>Author-Topic Key Score </a:t>
+            </a:r>
+            <a:r>
+              <a:rPr lang="en-GB" dirty="0"/>
+              <a:t>across all topics</a:t>
+            </a:r>
+            <a:r>
+              <a:rPr lang="en-GB" i="1" dirty="0"/>
+              <a:t>.</a:t>
+            </a:r>
+          </a:p>
+          <a:p>
+            <a:endParaRPr lang="en-GB" b="1" dirty="0"/>
+          </a:p>
+        </p:txBody>
+      </p:sp>
+      <p:sp>
+        <p:nvSpPr>
+          <p:cNvPr id="4" name="Slide Number Placeholder 3">
+            <a:extLst>
+              <a:ext uri="{FF2B5EF4-FFF2-40B4-BE49-F238E27FC236}">
+                <a16:creationId xmlns:a16="http://schemas.microsoft.com/office/drawing/2014/main" id="{6A443EF8-3FAF-E450-9AAA-2FA80E88EF36}"/>
+              </a:ext>
+            </a:extLst>
+          </p:cNvPr>
+          <p:cNvSpPr>
+            <a:spLocks noGrp="1"/>
+          </p:cNvSpPr>
+          <p:nvPr>
+            <p:ph type="sldNum" sz="quarter" idx="12"/>
+          </p:nvPr>
+        </p:nvSpPr>
+        <p:spPr/>
+        <p:txBody>
+          <a:bodyPr/>
+          <a:lstStyle/>
+          <a:p>
+            <a:fld id="{E6AB8EDD-9EF2-4633-A1C2-4D908C1019B4}" type="slidenum">
+              <a:rPr lang="he-IL" smtClean="0"/>
+              <a:t>3</a:t>
+            </a:fld>
+            <a:endParaRPr lang="he-IL"/>
+          </a:p>
+        </p:txBody>
+      </p:sp>
+    </p:spTree>
+    <p:extLst>
+      <p:ext uri="{BB962C8B-B14F-4D97-AF65-F5344CB8AC3E}">
+        <p14:creationId xmlns:p14="http://schemas.microsoft.com/office/powerpoint/2010/main" val="790370878"/>
+      </p:ext>
+    </p:extLst>
+  </p:cSld>
+  <p:clrMapOvr>
+    <a:masterClrMapping/>
+  </p:clrMapOvr>
+</p:sld>
+</file>
+
 <file path=ppt/slides/slide4.xml><?xml version="1.0" encoding="utf-8"?>
 <p:sld xmlns:a="http://schemas.openxmlformats.org/drawingml/2006/main" xmlns:r="http://schemas.openxmlformats.org/officeDocument/2006/relationships" xmlns:p="http://schemas.openxmlformats.org/presentationml/2006/main">
   <p:cSld>
@@ -19396,715 +17493,6 @@
 </file>
 
 <file path=ppt/slides/slide7.xml><?xml version="1.0" encoding="utf-8"?>
-<p:sld xmlns:a="http://schemas.openxmlformats.org/drawingml/2006/main" xmlns:r="http://schemas.openxmlformats.org/officeDocument/2006/relationships" xmlns:p="http://schemas.openxmlformats.org/presentationml/2006/main" show="0">
-  <p:cSld>
-    <p:spTree>
-      <p:nvGrpSpPr>
-        <p:cNvPr id="1" name="">
-          <a:extLst>
-            <a:ext uri="{FF2B5EF4-FFF2-40B4-BE49-F238E27FC236}">
-              <a16:creationId xmlns:a16="http://schemas.microsoft.com/office/drawing/2014/main" id="{4F0BEF17-A85B-69A7-4947-96097D1A5F5B}"/>
-            </a:ext>
-          </a:extLst>
-        </p:cNvPr>
-        <p:cNvGrpSpPr/>
-        <p:nvPr/>
-      </p:nvGrpSpPr>
-      <p:grpSpPr>
-        <a:xfrm>
-          <a:off x="0" y="0"/>
-          <a:ext cx="0" cy="0"/>
-          <a:chOff x="0" y="0"/>
-          <a:chExt cx="0" cy="0"/>
-        </a:xfrm>
-      </p:grpSpPr>
-      <p:sp>
-        <p:nvSpPr>
-          <p:cNvPr id="2" name="Title 1">
-            <a:extLst>
-              <a:ext uri="{FF2B5EF4-FFF2-40B4-BE49-F238E27FC236}">
-                <a16:creationId xmlns:a16="http://schemas.microsoft.com/office/drawing/2014/main" id="{F80E2D88-5AB1-052E-FB13-E091040FA2F1}"/>
-              </a:ext>
-            </a:extLst>
-          </p:cNvPr>
-          <p:cNvSpPr>
-            <a:spLocks noGrp="1"/>
-          </p:cNvSpPr>
-          <p:nvPr>
-            <p:ph type="title"/>
-          </p:nvPr>
-        </p:nvSpPr>
-        <p:spPr>
-          <a:xfrm>
-            <a:off x="3072268" y="401637"/>
-            <a:ext cx="8949044" cy="1325563"/>
-          </a:xfrm>
-        </p:spPr>
-        <p:txBody>
-          <a:bodyPr>
-            <a:normAutofit/>
-          </a:bodyPr>
-          <a:lstStyle/>
-          <a:p>
-            <a:r>
-              <a:rPr lang="en-GB" dirty="0"/>
-              <a:t>Backbone Graph &amp; IO Indicators</a:t>
-            </a:r>
-            <a:endParaRPr lang="en-IL" dirty="0"/>
-          </a:p>
-        </p:txBody>
-      </p:sp>
-      <p:sp>
-        <p:nvSpPr>
-          <p:cNvPr id="4" name="Slide Number Placeholder 3">
-            <a:extLst>
-              <a:ext uri="{FF2B5EF4-FFF2-40B4-BE49-F238E27FC236}">
-                <a16:creationId xmlns:a16="http://schemas.microsoft.com/office/drawing/2014/main" id="{9A45DFBC-E283-482F-07BA-A333B9108357}"/>
-              </a:ext>
-            </a:extLst>
-          </p:cNvPr>
-          <p:cNvSpPr>
-            <a:spLocks noGrp="1"/>
-          </p:cNvSpPr>
-          <p:nvPr>
-            <p:ph type="sldNum" sz="quarter" idx="12"/>
-          </p:nvPr>
-        </p:nvSpPr>
-        <p:spPr/>
-        <p:txBody>
-          <a:bodyPr/>
-          <a:lstStyle/>
-          <a:p>
-            <a:fld id="{E6AB8EDD-9EF2-4633-A1C2-4D908C1019B4}" type="slidenum">
-              <a:rPr lang="he-IL" smtClean="0"/>
-              <a:t>7</a:t>
-            </a:fld>
-            <a:endParaRPr lang="he-IL"/>
-          </a:p>
-        </p:txBody>
-      </p:sp>
-      <p:pic>
-        <p:nvPicPr>
-          <p:cNvPr id="8" name="Content Placeholder 7" descr="A network of dots and lines&#10;&#10;AI-generated content may be incorrect.">
-            <a:extLst>
-              <a:ext uri="{FF2B5EF4-FFF2-40B4-BE49-F238E27FC236}">
-                <a16:creationId xmlns:a16="http://schemas.microsoft.com/office/drawing/2014/main" id="{66A4053E-AB18-5F2F-D1F0-F2B2E5298473}"/>
-              </a:ext>
-            </a:extLst>
-          </p:cNvPr>
-          <p:cNvPicPr>
-            <a:picLocks noGrp="1" noChangeAspect="1"/>
-          </p:cNvPicPr>
-          <p:nvPr>
-            <p:ph idx="1"/>
-          </p:nvPr>
-        </p:nvPicPr>
-        <p:blipFill>
-          <a:blip r:embed="rId3">
-            <a:extLst>
-              <a:ext uri="{28A0092B-C50C-407E-A947-70E740481C1C}">
-                <a14:useLocalDpi xmlns:a14="http://schemas.microsoft.com/office/drawing/2010/main" val="0"/>
-              </a:ext>
-            </a:extLst>
-          </a:blip>
-          <a:srcRect l="3852" t="3063" r="4355"/>
-          <a:stretch>
-            <a:fillRect/>
-          </a:stretch>
-        </p:blipFill>
-        <p:spPr>
-          <a:xfrm>
-            <a:off x="1616927" y="1630362"/>
-            <a:ext cx="6362773" cy="5176361"/>
-          </a:xfrm>
-        </p:spPr>
-      </p:pic>
-      <p:sp>
-        <p:nvSpPr>
-          <p:cNvPr id="5" name="Flowchart: Connector 4">
-            <a:extLst>
-              <a:ext uri="{FF2B5EF4-FFF2-40B4-BE49-F238E27FC236}">
-                <a16:creationId xmlns:a16="http://schemas.microsoft.com/office/drawing/2014/main" id="{94C0EF37-C21E-64B9-190B-12A5FFAC380E}"/>
-              </a:ext>
-            </a:extLst>
-          </p:cNvPr>
-          <p:cNvSpPr/>
-          <p:nvPr/>
-        </p:nvSpPr>
-        <p:spPr>
-          <a:xfrm>
-            <a:off x="6840109" y="4305300"/>
-            <a:ext cx="558911" cy="559646"/>
-          </a:xfrm>
-          <a:prstGeom prst="flowChartConnector">
-            <a:avLst/>
-          </a:prstGeom>
-          <a:noFill/>
-          <a:ln w="57150">
-            <a:solidFill>
-              <a:schemeClr val="accent1"/>
-            </a:solidFill>
-          </a:ln>
-        </p:spPr>
-        <p:style>
-          <a:lnRef idx="2">
-            <a:schemeClr val="accent1">
-              <a:shade val="15000"/>
-            </a:schemeClr>
-          </a:lnRef>
-          <a:fillRef idx="1">
-            <a:schemeClr val="accent1"/>
-          </a:fillRef>
-          <a:effectRef idx="0">
-            <a:schemeClr val="accent1"/>
-          </a:effectRef>
-          <a:fontRef idx="minor">
-            <a:schemeClr val="lt1"/>
-          </a:fontRef>
-        </p:style>
-        <p:txBody>
-          <a:bodyPr rtlCol="0" anchor="ctr"/>
-          <a:lstStyle/>
-          <a:p>
-            <a:pPr algn="ctr"/>
-            <a:endParaRPr lang="en-IL"/>
-          </a:p>
-        </p:txBody>
-      </p:sp>
-      <p:sp>
-        <p:nvSpPr>
-          <p:cNvPr id="6" name="Flowchart: Connector 5">
-            <a:extLst>
-              <a:ext uri="{FF2B5EF4-FFF2-40B4-BE49-F238E27FC236}">
-                <a16:creationId xmlns:a16="http://schemas.microsoft.com/office/drawing/2014/main" id="{D78D894D-6702-3125-2BFF-3DB2ECBA4904}"/>
-              </a:ext>
-            </a:extLst>
-          </p:cNvPr>
-          <p:cNvSpPr/>
-          <p:nvPr/>
-        </p:nvSpPr>
-        <p:spPr>
-          <a:xfrm>
-            <a:off x="8256994" y="2008500"/>
-            <a:ext cx="360000" cy="360000"/>
-          </a:xfrm>
-          <a:prstGeom prst="flowChartConnector">
-            <a:avLst/>
-          </a:prstGeom>
-          <a:noFill/>
-          <a:ln w="57150">
-            <a:solidFill>
-              <a:schemeClr val="accent1"/>
-            </a:solidFill>
-          </a:ln>
-        </p:spPr>
-        <p:style>
-          <a:lnRef idx="2">
-            <a:schemeClr val="accent1">
-              <a:shade val="15000"/>
-            </a:schemeClr>
-          </a:lnRef>
-          <a:fillRef idx="1">
-            <a:schemeClr val="accent1"/>
-          </a:fillRef>
-          <a:effectRef idx="0">
-            <a:schemeClr val="accent1"/>
-          </a:effectRef>
-          <a:fontRef idx="minor">
-            <a:schemeClr val="lt1"/>
-          </a:fontRef>
-        </p:style>
-        <p:txBody>
-          <a:bodyPr rtlCol="0" anchor="ctr"/>
-          <a:lstStyle/>
-          <a:p>
-            <a:pPr algn="ctr"/>
-            <a:endParaRPr lang="en-IL"/>
-          </a:p>
-        </p:txBody>
-      </p:sp>
-      <p:sp>
-        <p:nvSpPr>
-          <p:cNvPr id="7" name="TextBox 6">
-            <a:extLst>
-              <a:ext uri="{FF2B5EF4-FFF2-40B4-BE49-F238E27FC236}">
-                <a16:creationId xmlns:a16="http://schemas.microsoft.com/office/drawing/2014/main" id="{0199B6F5-B9F8-08F7-1704-81E9386024CC}"/>
-              </a:ext>
-            </a:extLst>
-          </p:cNvPr>
-          <p:cNvSpPr txBox="1"/>
-          <p:nvPr/>
-        </p:nvSpPr>
-        <p:spPr>
-          <a:xfrm>
-            <a:off x="8824162" y="1983610"/>
-            <a:ext cx="2630126" cy="369332"/>
-          </a:xfrm>
-          <a:prstGeom prst="rect">
-            <a:avLst/>
-          </a:prstGeom>
-          <a:noFill/>
-        </p:spPr>
-        <p:txBody>
-          <a:bodyPr wrap="square" rtlCol="0">
-            <a:spAutoFit/>
-          </a:bodyPr>
-          <a:lstStyle/>
-          <a:p>
-            <a:r>
-              <a:rPr lang="en-US" dirty="0"/>
-              <a:t>high </a:t>
-            </a:r>
-            <a:r>
-              <a:rPr lang="en-GB" dirty="0"/>
-              <a:t>degree centrality </a:t>
-            </a:r>
-            <a:endParaRPr lang="en-IL" dirty="0"/>
-          </a:p>
-        </p:txBody>
-      </p:sp>
-      <p:sp>
-        <p:nvSpPr>
-          <p:cNvPr id="9" name="Flowchart: Connector 8">
-            <a:extLst>
-              <a:ext uri="{FF2B5EF4-FFF2-40B4-BE49-F238E27FC236}">
-                <a16:creationId xmlns:a16="http://schemas.microsoft.com/office/drawing/2014/main" id="{755C2BB5-5CCD-8048-0623-B56A7107E499}"/>
-              </a:ext>
-            </a:extLst>
-          </p:cNvPr>
-          <p:cNvSpPr/>
-          <p:nvPr/>
-        </p:nvSpPr>
-        <p:spPr>
-          <a:xfrm>
-            <a:off x="1738768" y="3086616"/>
-            <a:ext cx="1057772" cy="891024"/>
-          </a:xfrm>
-          <a:prstGeom prst="flowChartConnector">
-            <a:avLst/>
-          </a:prstGeom>
-          <a:noFill/>
-          <a:ln w="57150">
-            <a:solidFill>
-              <a:srgbClr val="F59120"/>
-            </a:solidFill>
-          </a:ln>
-        </p:spPr>
-        <p:style>
-          <a:lnRef idx="2">
-            <a:schemeClr val="accent1">
-              <a:shade val="15000"/>
-            </a:schemeClr>
-          </a:lnRef>
-          <a:fillRef idx="1">
-            <a:schemeClr val="accent1"/>
-          </a:fillRef>
-          <a:effectRef idx="0">
-            <a:schemeClr val="accent1"/>
-          </a:effectRef>
-          <a:fontRef idx="minor">
-            <a:schemeClr val="lt1"/>
-          </a:fontRef>
-        </p:style>
-        <p:txBody>
-          <a:bodyPr rtlCol="0" anchor="ctr"/>
-          <a:lstStyle/>
-          <a:p>
-            <a:pPr algn="ctr"/>
-            <a:endParaRPr lang="en-IL"/>
-          </a:p>
-        </p:txBody>
-      </p:sp>
-      <p:sp>
-        <p:nvSpPr>
-          <p:cNvPr id="10" name="Flowchart: Connector 9">
-            <a:extLst>
-              <a:ext uri="{FF2B5EF4-FFF2-40B4-BE49-F238E27FC236}">
-                <a16:creationId xmlns:a16="http://schemas.microsoft.com/office/drawing/2014/main" id="{28978A85-2029-EA91-65C8-D4836607FD42}"/>
-              </a:ext>
-            </a:extLst>
-          </p:cNvPr>
-          <p:cNvSpPr/>
-          <p:nvPr/>
-        </p:nvSpPr>
-        <p:spPr>
-          <a:xfrm>
-            <a:off x="8256994" y="3116584"/>
-            <a:ext cx="360000" cy="360000"/>
-          </a:xfrm>
-          <a:prstGeom prst="flowChartConnector">
-            <a:avLst/>
-          </a:prstGeom>
-          <a:noFill/>
-          <a:ln w="57150">
-            <a:solidFill>
-              <a:srgbClr val="F59120"/>
-            </a:solidFill>
-          </a:ln>
-        </p:spPr>
-        <p:style>
-          <a:lnRef idx="2">
-            <a:schemeClr val="accent1">
-              <a:shade val="15000"/>
-            </a:schemeClr>
-          </a:lnRef>
-          <a:fillRef idx="1">
-            <a:schemeClr val="accent1"/>
-          </a:fillRef>
-          <a:effectRef idx="0">
-            <a:schemeClr val="accent1"/>
-          </a:effectRef>
-          <a:fontRef idx="minor">
-            <a:schemeClr val="lt1"/>
-          </a:fontRef>
-        </p:style>
-        <p:txBody>
-          <a:bodyPr rtlCol="0" anchor="ctr"/>
-          <a:lstStyle/>
-          <a:p>
-            <a:pPr algn="ctr"/>
-            <a:endParaRPr lang="en-IL"/>
-          </a:p>
-        </p:txBody>
-      </p:sp>
-      <p:sp>
-        <p:nvSpPr>
-          <p:cNvPr id="11" name="TextBox 10">
-            <a:extLst>
-              <a:ext uri="{FF2B5EF4-FFF2-40B4-BE49-F238E27FC236}">
-                <a16:creationId xmlns:a16="http://schemas.microsoft.com/office/drawing/2014/main" id="{F3425336-454F-FE31-1422-436892C703EC}"/>
-              </a:ext>
-            </a:extLst>
-          </p:cNvPr>
-          <p:cNvSpPr txBox="1"/>
-          <p:nvPr/>
-        </p:nvSpPr>
-        <p:spPr>
-          <a:xfrm>
-            <a:off x="8824162" y="3095422"/>
-            <a:ext cx="2630126" cy="369332"/>
-          </a:xfrm>
-          <a:prstGeom prst="rect">
-            <a:avLst/>
-          </a:prstGeom>
-          <a:noFill/>
-        </p:spPr>
-        <p:txBody>
-          <a:bodyPr wrap="square" rtlCol="0">
-            <a:spAutoFit/>
-          </a:bodyPr>
-          <a:lstStyle/>
-          <a:p>
-            <a:r>
-              <a:rPr lang="en-US" dirty="0"/>
-              <a:t>high </a:t>
-            </a:r>
-            <a:r>
-              <a:rPr lang="en-GB" dirty="0"/>
-              <a:t>core-number</a:t>
-            </a:r>
-            <a:endParaRPr lang="en-IL" dirty="0"/>
-          </a:p>
-        </p:txBody>
-      </p:sp>
-      <p:sp>
-        <p:nvSpPr>
-          <p:cNvPr id="12" name="Flowchart: Connector 11">
-            <a:extLst>
-              <a:ext uri="{FF2B5EF4-FFF2-40B4-BE49-F238E27FC236}">
-                <a16:creationId xmlns:a16="http://schemas.microsoft.com/office/drawing/2014/main" id="{871B8A36-FB76-083A-5FA0-EA7EA872E11A}"/>
-              </a:ext>
-            </a:extLst>
-          </p:cNvPr>
-          <p:cNvSpPr/>
-          <p:nvPr/>
-        </p:nvSpPr>
-        <p:spPr>
-          <a:xfrm>
-            <a:off x="8256994" y="3670626"/>
-            <a:ext cx="360000" cy="360000"/>
-          </a:xfrm>
-          <a:prstGeom prst="flowChartConnector">
-            <a:avLst/>
-          </a:prstGeom>
-          <a:noFill/>
-          <a:ln w="57150">
-            <a:solidFill>
-              <a:srgbClr val="F58377"/>
-            </a:solidFill>
-          </a:ln>
-        </p:spPr>
-        <p:style>
-          <a:lnRef idx="2">
-            <a:schemeClr val="accent1">
-              <a:shade val="15000"/>
-            </a:schemeClr>
-          </a:lnRef>
-          <a:fillRef idx="1">
-            <a:schemeClr val="accent1"/>
-          </a:fillRef>
-          <a:effectRef idx="0">
-            <a:schemeClr val="accent1"/>
-          </a:effectRef>
-          <a:fontRef idx="minor">
-            <a:schemeClr val="lt1"/>
-          </a:fontRef>
-        </p:style>
-        <p:txBody>
-          <a:bodyPr rtlCol="0" anchor="ctr"/>
-          <a:lstStyle/>
-          <a:p>
-            <a:pPr algn="ctr"/>
-            <a:endParaRPr lang="en-IL"/>
-          </a:p>
-        </p:txBody>
-      </p:sp>
-      <p:sp>
-        <p:nvSpPr>
-          <p:cNvPr id="13" name="Flowchart: Connector 12">
-            <a:extLst>
-              <a:ext uri="{FF2B5EF4-FFF2-40B4-BE49-F238E27FC236}">
-                <a16:creationId xmlns:a16="http://schemas.microsoft.com/office/drawing/2014/main" id="{BCE1F5E2-96CB-66E7-B575-B51DA37B4E37}"/>
-              </a:ext>
-            </a:extLst>
-          </p:cNvPr>
-          <p:cNvSpPr/>
-          <p:nvPr/>
-        </p:nvSpPr>
-        <p:spPr>
-          <a:xfrm>
-            <a:off x="3481782" y="3449324"/>
-            <a:ext cx="2251102" cy="1539240"/>
-          </a:xfrm>
-          <a:prstGeom prst="flowChartConnector">
-            <a:avLst/>
-          </a:prstGeom>
-          <a:noFill/>
-          <a:ln w="57150">
-            <a:solidFill>
-              <a:srgbClr val="F58377"/>
-            </a:solidFill>
-          </a:ln>
-        </p:spPr>
-        <p:style>
-          <a:lnRef idx="2">
-            <a:schemeClr val="accent1">
-              <a:shade val="15000"/>
-            </a:schemeClr>
-          </a:lnRef>
-          <a:fillRef idx="1">
-            <a:schemeClr val="accent1"/>
-          </a:fillRef>
-          <a:effectRef idx="0">
-            <a:schemeClr val="accent1"/>
-          </a:effectRef>
-          <a:fontRef idx="minor">
-            <a:schemeClr val="lt1"/>
-          </a:fontRef>
-        </p:style>
-        <p:txBody>
-          <a:bodyPr rtlCol="0" anchor="ctr"/>
-          <a:lstStyle/>
-          <a:p>
-            <a:pPr algn="ctr"/>
-            <a:endParaRPr lang="en-IL"/>
-          </a:p>
-        </p:txBody>
-      </p:sp>
-      <p:sp>
-        <p:nvSpPr>
-          <p:cNvPr id="14" name="TextBox 13">
-            <a:extLst>
-              <a:ext uri="{FF2B5EF4-FFF2-40B4-BE49-F238E27FC236}">
-                <a16:creationId xmlns:a16="http://schemas.microsoft.com/office/drawing/2014/main" id="{78B54FF2-3B58-D836-F1A2-897465C04679}"/>
-              </a:ext>
-            </a:extLst>
-          </p:cNvPr>
-          <p:cNvSpPr txBox="1"/>
-          <p:nvPr/>
-        </p:nvSpPr>
-        <p:spPr>
-          <a:xfrm>
-            <a:off x="8824162" y="3698672"/>
-            <a:ext cx="2630126" cy="369332"/>
-          </a:xfrm>
-          <a:prstGeom prst="rect">
-            <a:avLst/>
-          </a:prstGeom>
-          <a:noFill/>
-        </p:spPr>
-        <p:txBody>
-          <a:bodyPr wrap="square" rtlCol="0">
-            <a:spAutoFit/>
-          </a:bodyPr>
-          <a:lstStyle/>
-          <a:p>
-            <a:r>
-              <a:rPr lang="en-US" dirty="0"/>
-              <a:t>all high</a:t>
-            </a:r>
-            <a:endParaRPr lang="en-IL" dirty="0"/>
-          </a:p>
-        </p:txBody>
-      </p:sp>
-      <p:sp>
-        <p:nvSpPr>
-          <p:cNvPr id="15" name="Flowchart: Connector 14">
-            <a:extLst>
-              <a:ext uri="{FF2B5EF4-FFF2-40B4-BE49-F238E27FC236}">
-                <a16:creationId xmlns:a16="http://schemas.microsoft.com/office/drawing/2014/main" id="{BCFD6D60-027A-1FE4-805D-AC0BDD584F9A}"/>
-              </a:ext>
-            </a:extLst>
-          </p:cNvPr>
-          <p:cNvSpPr/>
-          <p:nvPr/>
-        </p:nvSpPr>
-        <p:spPr>
-          <a:xfrm>
-            <a:off x="8256994" y="2562542"/>
-            <a:ext cx="360000" cy="360000"/>
-          </a:xfrm>
-          <a:prstGeom prst="flowChartConnector">
-            <a:avLst/>
-          </a:prstGeom>
-          <a:noFill/>
-          <a:ln w="57150">
-            <a:solidFill>
-              <a:srgbClr val="7030A0"/>
-            </a:solidFill>
-          </a:ln>
-        </p:spPr>
-        <p:style>
-          <a:lnRef idx="2">
-            <a:schemeClr val="accent1">
-              <a:shade val="15000"/>
-            </a:schemeClr>
-          </a:lnRef>
-          <a:fillRef idx="1">
-            <a:schemeClr val="accent1"/>
-          </a:fillRef>
-          <a:effectRef idx="0">
-            <a:schemeClr val="accent1"/>
-          </a:effectRef>
-          <a:fontRef idx="minor">
-            <a:schemeClr val="lt1"/>
-          </a:fontRef>
-        </p:style>
-        <p:txBody>
-          <a:bodyPr rtlCol="0" anchor="ctr"/>
-          <a:lstStyle/>
-          <a:p>
-            <a:pPr algn="ctr"/>
-            <a:endParaRPr lang="en-IL"/>
-          </a:p>
-        </p:txBody>
-      </p:sp>
-      <p:sp>
-        <p:nvSpPr>
-          <p:cNvPr id="16" name="TextBox 15">
-            <a:extLst>
-              <a:ext uri="{FF2B5EF4-FFF2-40B4-BE49-F238E27FC236}">
-                <a16:creationId xmlns:a16="http://schemas.microsoft.com/office/drawing/2014/main" id="{99FBBC2B-DFD1-CC39-847A-385C36AC7347}"/>
-              </a:ext>
-            </a:extLst>
-          </p:cNvPr>
-          <p:cNvSpPr txBox="1"/>
-          <p:nvPr/>
-        </p:nvSpPr>
-        <p:spPr>
-          <a:xfrm>
-            <a:off x="8824162" y="2553210"/>
-            <a:ext cx="2837294" cy="369332"/>
-          </a:xfrm>
-          <a:prstGeom prst="rect">
-            <a:avLst/>
-          </a:prstGeom>
-          <a:noFill/>
-        </p:spPr>
-        <p:txBody>
-          <a:bodyPr wrap="square" rtlCol="0">
-            <a:spAutoFit/>
-          </a:bodyPr>
-          <a:lstStyle/>
-          <a:p>
-            <a:r>
-              <a:rPr lang="en-US" dirty="0"/>
-              <a:t>high </a:t>
-            </a:r>
-            <a:r>
-              <a:rPr lang="en-GB" dirty="0"/>
-              <a:t>eigenvector centrality </a:t>
-            </a:r>
-            <a:endParaRPr lang="en-IL" dirty="0"/>
-          </a:p>
-        </p:txBody>
-      </p:sp>
-      <p:sp>
-        <p:nvSpPr>
-          <p:cNvPr id="17" name="Flowchart: Connector 16">
-            <a:extLst>
-              <a:ext uri="{FF2B5EF4-FFF2-40B4-BE49-F238E27FC236}">
-                <a16:creationId xmlns:a16="http://schemas.microsoft.com/office/drawing/2014/main" id="{87C4792C-A2E7-5B20-B256-55095FB999CA}"/>
-              </a:ext>
-            </a:extLst>
-          </p:cNvPr>
-          <p:cNvSpPr/>
-          <p:nvPr/>
-        </p:nvSpPr>
-        <p:spPr>
-          <a:xfrm>
-            <a:off x="4708538" y="2184404"/>
-            <a:ext cx="966331" cy="825496"/>
-          </a:xfrm>
-          <a:prstGeom prst="flowChartConnector">
-            <a:avLst/>
-          </a:prstGeom>
-          <a:noFill/>
-          <a:ln w="57150">
-            <a:solidFill>
-              <a:srgbClr val="7030A0"/>
-            </a:solidFill>
-          </a:ln>
-        </p:spPr>
-        <p:style>
-          <a:lnRef idx="2">
-            <a:schemeClr val="accent1">
-              <a:shade val="15000"/>
-            </a:schemeClr>
-          </a:lnRef>
-          <a:fillRef idx="1">
-            <a:schemeClr val="accent1"/>
-          </a:fillRef>
-          <a:effectRef idx="0">
-            <a:schemeClr val="accent1"/>
-          </a:effectRef>
-          <a:fontRef idx="minor">
-            <a:schemeClr val="lt1"/>
-          </a:fontRef>
-        </p:style>
-        <p:txBody>
-          <a:bodyPr rtlCol="0" anchor="ctr"/>
-          <a:lstStyle/>
-          <a:p>
-            <a:pPr algn="ctr"/>
-            <a:endParaRPr lang="en-IL"/>
-          </a:p>
-        </p:txBody>
-      </p:sp>
-    </p:spTree>
-    <p:extLst>
-      <p:ext uri="{BB962C8B-B14F-4D97-AF65-F5344CB8AC3E}">
-        <p14:creationId xmlns:p14="http://schemas.microsoft.com/office/powerpoint/2010/main" val="1680593382"/>
-      </p:ext>
-    </p:extLst>
-  </p:cSld>
-  <p:clrMapOvr>
-    <a:masterClrMapping/>
-  </p:clrMapOvr>
-</p:sld>
-</file>
-
-<file path=ppt/slides/slide8.xml><?xml version="1.0" encoding="utf-8"?>
 <p:sld xmlns:a="http://schemas.openxmlformats.org/drawingml/2006/main" xmlns:r="http://schemas.openxmlformats.org/officeDocument/2006/relationships" xmlns:p="http://schemas.openxmlformats.org/presentationml/2006/main">
   <p:cSld>
     <p:spTree>
@@ -20360,7 +17748,7 @@
           <a:p>
             <a:fld id="{E6AB8EDD-9EF2-4633-A1C2-4D908C1019B4}" type="slidenum">
               <a:rPr lang="he-IL" smtClean="0"/>
-              <a:t>8</a:t>
+              <a:t>7</a:t>
             </a:fld>
             <a:endParaRPr lang="he-IL"/>
           </a:p>
@@ -20409,15 +17797,139 @@
 </p:sld>
 </file>
 
-<file path=ppt/slides/slide9.xml><?xml version="1.0" encoding="utf-8"?>
-<p:sld xmlns:a="http://schemas.openxmlformats.org/drawingml/2006/main" xmlns:r="http://schemas.openxmlformats.org/officeDocument/2006/relationships" xmlns:p="http://schemas.openxmlformats.org/presentationml/2006/main" show="0">
+<file path=ppt/slides/slide8.xml><?xml version="1.0" encoding="utf-8"?>
+<p:sld xmlns:a="http://schemas.openxmlformats.org/drawingml/2006/main" xmlns:r="http://schemas.openxmlformats.org/officeDocument/2006/relationships" xmlns:p="http://schemas.openxmlformats.org/presentationml/2006/main">
   <p:cSld>
     <p:spTree>
       <p:nvGrpSpPr>
         <p:cNvPr id="1" name="">
           <a:extLst>
             <a:ext uri="{FF2B5EF4-FFF2-40B4-BE49-F238E27FC236}">
-              <a16:creationId xmlns:a16="http://schemas.microsoft.com/office/drawing/2014/main" id="{96A50E01-4300-3DE5-CB26-B50E4D0BA361}"/>
+              <a16:creationId xmlns:a16="http://schemas.microsoft.com/office/drawing/2014/main" id="{96F26D25-36D7-61FB-800F-D666E5C3BD8F}"/>
+            </a:ext>
+          </a:extLst>
+        </p:cNvPr>
+        <p:cNvGrpSpPr/>
+        <p:nvPr/>
+      </p:nvGrpSpPr>
+      <p:grpSpPr>
+        <a:xfrm>
+          <a:off x="0" y="0"/>
+          <a:ext cx="0" cy="0"/>
+          <a:chOff x="0" y="0"/>
+          <a:chExt cx="0" cy="0"/>
+        </a:xfrm>
+      </p:grpSpPr>
+      <p:sp>
+        <p:nvSpPr>
+          <p:cNvPr id="5" name="Title 4">
+            <a:extLst>
+              <a:ext uri="{FF2B5EF4-FFF2-40B4-BE49-F238E27FC236}">
+                <a16:creationId xmlns:a16="http://schemas.microsoft.com/office/drawing/2014/main" id="{9B8062A9-4019-21A8-C181-3F8265302D78}"/>
+              </a:ext>
+            </a:extLst>
+          </p:cNvPr>
+          <p:cNvSpPr>
+            <a:spLocks noGrp="1"/>
+          </p:cNvSpPr>
+          <p:nvPr>
+            <p:ph type="title"/>
+          </p:nvPr>
+        </p:nvSpPr>
+        <p:spPr>
+          <a:xfrm>
+            <a:off x="1479549" y="1709738"/>
+            <a:ext cx="9914592" cy="2852737"/>
+          </a:xfrm>
+        </p:spPr>
+        <p:txBody>
+          <a:bodyPr/>
+          <a:lstStyle/>
+          <a:p>
+            <a:r>
+              <a:rPr lang="en-GB" dirty="0"/>
+              <a:t>Coordinated Behaviour - Choosing Indicator</a:t>
+            </a:r>
+            <a:endParaRPr lang="en-IL" dirty="0"/>
+          </a:p>
+        </p:txBody>
+      </p:sp>
+      <p:sp>
+        <p:nvSpPr>
+          <p:cNvPr id="6" name="Text Placeholder 5">
+            <a:extLst>
+              <a:ext uri="{FF2B5EF4-FFF2-40B4-BE49-F238E27FC236}">
+                <a16:creationId xmlns:a16="http://schemas.microsoft.com/office/drawing/2014/main" id="{3AD05960-A975-BAF2-22A6-3B1434A4E21D}"/>
+              </a:ext>
+            </a:extLst>
+          </p:cNvPr>
+          <p:cNvSpPr>
+            <a:spLocks noGrp="1"/>
+          </p:cNvSpPr>
+          <p:nvPr>
+            <p:ph type="body" idx="1"/>
+          </p:nvPr>
+        </p:nvSpPr>
+        <p:spPr/>
+        <p:txBody>
+          <a:bodyPr/>
+          <a:lstStyle/>
+          <a:p>
+            <a:endParaRPr lang="en-IL" dirty="0"/>
+          </a:p>
+        </p:txBody>
+      </p:sp>
+      <p:sp>
+        <p:nvSpPr>
+          <p:cNvPr id="4" name="Slide Number Placeholder 3">
+            <a:extLst>
+              <a:ext uri="{FF2B5EF4-FFF2-40B4-BE49-F238E27FC236}">
+                <a16:creationId xmlns:a16="http://schemas.microsoft.com/office/drawing/2014/main" id="{6CA6E229-8963-0D55-F98F-4CC7A796E1C9}"/>
+              </a:ext>
+            </a:extLst>
+          </p:cNvPr>
+          <p:cNvSpPr>
+            <a:spLocks noGrp="1"/>
+          </p:cNvSpPr>
+          <p:nvPr>
+            <p:ph type="sldNum" sz="quarter" idx="12"/>
+          </p:nvPr>
+        </p:nvSpPr>
+        <p:spPr/>
+        <p:txBody>
+          <a:bodyPr/>
+          <a:lstStyle/>
+          <a:p>
+            <a:fld id="{E6AB8EDD-9EF2-4633-A1C2-4D908C1019B4}" type="slidenum">
+              <a:rPr lang="he-IL" smtClean="0"/>
+              <a:t>8</a:t>
+            </a:fld>
+            <a:endParaRPr lang="he-IL"/>
+          </a:p>
+        </p:txBody>
+      </p:sp>
+    </p:spTree>
+    <p:extLst>
+      <p:ext uri="{BB962C8B-B14F-4D97-AF65-F5344CB8AC3E}">
+        <p14:creationId xmlns:p14="http://schemas.microsoft.com/office/powerpoint/2010/main" val="409068119"/>
+      </p:ext>
+    </p:extLst>
+  </p:cSld>
+  <p:clrMapOvr>
+    <a:masterClrMapping/>
+  </p:clrMapOvr>
+</p:sld>
+</file>
+
+<file path=ppt/slides/slide9.xml><?xml version="1.0" encoding="utf-8"?>
+<p:sld xmlns:a="http://schemas.openxmlformats.org/drawingml/2006/main" xmlns:r="http://schemas.openxmlformats.org/officeDocument/2006/relationships" xmlns:p="http://schemas.openxmlformats.org/presentationml/2006/main">
+  <p:cSld>
+    <p:spTree>
+      <p:nvGrpSpPr>
+        <p:cNvPr id="1" name="">
+          <a:extLst>
+            <a:ext uri="{FF2B5EF4-FFF2-40B4-BE49-F238E27FC236}">
+              <a16:creationId xmlns:a16="http://schemas.microsoft.com/office/drawing/2014/main" id="{0D7225D8-EDFA-0591-872A-E0075FF029A7}"/>
             </a:ext>
           </a:extLst>
         </p:cNvPr>
@@ -20437,7 +17949,7 @@
           <p:cNvPr id="2" name="Title 1">
             <a:extLst>
               <a:ext uri="{FF2B5EF4-FFF2-40B4-BE49-F238E27FC236}">
-                <a16:creationId xmlns:a16="http://schemas.microsoft.com/office/drawing/2014/main" id="{4DB2747D-9283-B209-7194-59E0EF3956D6}"/>
+                <a16:creationId xmlns:a16="http://schemas.microsoft.com/office/drawing/2014/main" id="{784DED4E-07D6-5029-1267-13E254619F51}"/>
               </a:ext>
             </a:extLst>
           </p:cNvPr>
@@ -20448,137 +17960,23 @@
             <p:ph type="title"/>
           </p:nvPr>
         </p:nvSpPr>
-        <p:spPr/>
-        <p:txBody>
-          <a:bodyPr/>
-          <a:lstStyle/>
-          <a:p>
-            <a:r>
-              <a:rPr lang="en-US" dirty="0"/>
-              <a:t>Indicators: Graph Theory </a:t>
-            </a:r>
-            <a:endParaRPr lang="en-IL" dirty="0"/>
-          </a:p>
-        </p:txBody>
-      </p:sp>
-      <p:sp>
-        <p:nvSpPr>
-          <p:cNvPr id="3" name="Content Placeholder 2">
-            <a:extLst>
-              <a:ext uri="{FF2B5EF4-FFF2-40B4-BE49-F238E27FC236}">
-                <a16:creationId xmlns:a16="http://schemas.microsoft.com/office/drawing/2014/main" id="{C00DF79D-7189-E660-2269-D00740213DB6}"/>
-              </a:ext>
-            </a:extLst>
-          </p:cNvPr>
-          <p:cNvSpPr>
-            <a:spLocks noGrp="1"/>
-          </p:cNvSpPr>
-          <p:nvPr>
-            <p:ph idx="1"/>
-          </p:nvPr>
-        </p:nvSpPr>
         <p:spPr>
           <a:xfrm>
-            <a:off x="1243087" y="1825624"/>
-            <a:ext cx="10582656" cy="4879976"/>
+            <a:off x="3072268" y="401637"/>
+            <a:ext cx="8753475" cy="1325563"/>
           </a:xfrm>
         </p:spPr>
         <p:txBody>
-          <a:bodyPr>
-            <a:normAutofit lnSpcReduction="10000"/>
+          <a:bodyPr anchor="ctr">
+            <a:normAutofit/>
           </a:bodyPr>
           <a:lstStyle/>
           <a:p>
             <a:r>
-              <a:rPr lang="en-GB" b="1" dirty="0"/>
-              <a:t>Degree Centrality: </a:t>
-            </a:r>
-            <a:r>
-              <a:rPr lang="en-GB" dirty="0"/>
-              <a:t>Counts how many direct connections a user has.</a:t>
-            </a:r>
-          </a:p>
-          <a:p>
-            <a:r>
-              <a:rPr lang="en-GB" b="1" dirty="0"/>
-              <a:t>Betweenness Centrality: </a:t>
-            </a:r>
-            <a:r>
-              <a:rPr lang="en-GB" dirty="0"/>
-              <a:t>measures how frequently a node appears on the shortest path between other.</a:t>
-            </a:r>
-          </a:p>
-          <a:p>
-            <a:r>
-              <a:rPr lang="en-GB" b="1" dirty="0"/>
-              <a:t>Harmonic Centrality: </a:t>
-            </a:r>
-            <a:r>
-              <a:rPr lang="en-GB" dirty="0"/>
-              <a:t>Reflects how easily a user can reach many others in the network.</a:t>
-            </a:r>
-          </a:p>
-          <a:p>
-            <a:r>
-              <a:rPr lang="en-GB" b="1" dirty="0"/>
-              <a:t>Eigenvector Centrality: </a:t>
-            </a:r>
-            <a:r>
-              <a:rPr lang="en-GB" dirty="0"/>
-              <a:t>Shows whether a user is connected to other high-scoring users.</a:t>
-            </a:r>
-          </a:p>
-          <a:p>
-            <a:r>
-              <a:rPr lang="en-GB" b="1" dirty="0" err="1"/>
-              <a:t>Pagerank</a:t>
-            </a:r>
-            <a:r>
-              <a:rPr lang="en-GB" b="1" dirty="0"/>
-              <a:t>: </a:t>
-            </a:r>
-            <a:r>
-              <a:rPr lang="en-GB" dirty="0"/>
-              <a:t>Estimates a user’s overall importance based on how many important users connect to them.</a:t>
-            </a:r>
-          </a:p>
-          <a:p>
-            <a:r>
-              <a:rPr lang="en-GB" b="1" dirty="0"/>
-              <a:t>K-core: </a:t>
-            </a:r>
-            <a:r>
-              <a:rPr lang="en-GB" dirty="0"/>
-              <a:t>Indicates how deeply embedded a user is within the dense group.</a:t>
-            </a:r>
-          </a:p>
-          <a:p>
-            <a:r>
-              <a:rPr lang="en-GB" b="1" dirty="0"/>
-              <a:t>Clustering: </a:t>
-            </a:r>
-            <a:r>
-              <a:rPr lang="en-GB" dirty="0"/>
-              <a:t>Measures how tightly connected a user’s </a:t>
-            </a:r>
-            <a:r>
-              <a:rPr lang="en-GB" dirty="0" err="1"/>
-              <a:t>neighbors</a:t>
-            </a:r>
-            <a:r>
-              <a:rPr lang="en-GB" dirty="0"/>
-              <a:t> are to each other.</a:t>
-            </a:r>
-          </a:p>
-          <a:p>
-            <a:r>
-              <a:rPr lang="en-GB" b="1" dirty="0"/>
-              <a:t>Square Clustering: </a:t>
-            </a:r>
-            <a:r>
-              <a:rPr lang="en-GB" dirty="0"/>
-              <a:t>Measures how often a user participates in tightly connected small group structures.</a:t>
-            </a:r>
+              <a:rPr lang="en-US" dirty="0"/>
+              <a:t>Indicators Analysis – Information Gain  </a:t>
+            </a:r>
+            <a:endParaRPr lang="en-IL" dirty="0"/>
           </a:p>
         </p:txBody>
       </p:sp>
@@ -20587,7 +17985,7 @@
           <p:cNvPr id="4" name="Slide Number Placeholder 3">
             <a:extLst>
               <a:ext uri="{FF2B5EF4-FFF2-40B4-BE49-F238E27FC236}">
-                <a16:creationId xmlns:a16="http://schemas.microsoft.com/office/drawing/2014/main" id="{FB814CE5-5261-51D2-0ED2-383584D53484}"/>
+                <a16:creationId xmlns:a16="http://schemas.microsoft.com/office/drawing/2014/main" id="{C32F5E0B-95E2-EC2F-17CF-478A39DF16AB}"/>
               </a:ext>
             </a:extLst>
           </p:cNvPr>
@@ -20598,23 +17996,131 @@
             <p:ph type="sldNum" sz="quarter" idx="12"/>
           </p:nvPr>
         </p:nvSpPr>
-        <p:spPr/>
+        <p:spPr>
+          <a:xfrm>
+            <a:off x="11728704" y="6464649"/>
+            <a:ext cx="452233" cy="365125"/>
+          </a:xfrm>
+        </p:spPr>
         <p:txBody>
-          <a:bodyPr/>
+          <a:bodyPr anchor="ctr">
+            <a:normAutofit/>
+          </a:bodyPr>
           <a:lstStyle/>
           <a:p>
+            <a:pPr>
+              <a:spcAft>
+                <a:spcPts val="600"/>
+              </a:spcAft>
+            </a:pPr>
             <a:fld id="{E6AB8EDD-9EF2-4633-A1C2-4D908C1019B4}" type="slidenum">
               <a:rPr lang="he-IL" smtClean="0"/>
+              <a:pPr>
+                <a:spcAft>
+                  <a:spcPts val="600"/>
+                </a:spcAft>
+              </a:pPr>
               <a:t>9</a:t>
             </a:fld>
             <a:endParaRPr lang="he-IL"/>
+          </a:p>
+        </p:txBody>
+      </p:sp>
+      <p:pic>
+        <p:nvPicPr>
+          <p:cNvPr id="6" name="Picture 5">
+            <a:extLst>
+              <a:ext uri="{FF2B5EF4-FFF2-40B4-BE49-F238E27FC236}">
+                <a16:creationId xmlns:a16="http://schemas.microsoft.com/office/drawing/2014/main" id="{AF694049-9AAF-FF1E-EB69-93619E1D8D7E}"/>
+              </a:ext>
+            </a:extLst>
+          </p:cNvPr>
+          <p:cNvPicPr>
+            <a:picLocks noChangeAspect="1"/>
+          </p:cNvPicPr>
+          <p:nvPr/>
+        </p:nvPicPr>
+        <p:blipFill>
+          <a:blip r:embed="rId2"/>
+          <a:stretch>
+            <a:fillRect/>
+          </a:stretch>
+        </p:blipFill>
+        <p:spPr>
+          <a:xfrm>
+            <a:off x="1740721" y="1727200"/>
+            <a:ext cx="8753475" cy="4275476"/>
+          </a:xfrm>
+          <a:prstGeom prst="rect">
+            <a:avLst/>
+          </a:prstGeom>
+        </p:spPr>
+      </p:pic>
+      <p:sp>
+        <p:nvSpPr>
+          <p:cNvPr id="7" name="TextBox 6">
+            <a:extLst>
+              <a:ext uri="{FF2B5EF4-FFF2-40B4-BE49-F238E27FC236}">
+                <a16:creationId xmlns:a16="http://schemas.microsoft.com/office/drawing/2014/main" id="{C88E7DED-7C45-6E37-6290-93FB4487F981}"/>
+              </a:ext>
+            </a:extLst>
+          </p:cNvPr>
+          <p:cNvSpPr txBox="1"/>
+          <p:nvPr/>
+        </p:nvSpPr>
+        <p:spPr>
+          <a:xfrm>
+            <a:off x="1490383" y="6141483"/>
+            <a:ext cx="6261846" cy="646331"/>
+          </a:xfrm>
+          <a:prstGeom prst="rect">
+            <a:avLst/>
+          </a:prstGeom>
+          <a:noFill/>
+        </p:spPr>
+        <p:txBody>
+          <a:bodyPr wrap="square">
+            <a:spAutoFit/>
+          </a:bodyPr>
+          <a:lstStyle/>
+          <a:p>
+            <a:r>
+              <a:rPr lang="en-IL" dirty="0">
+                <a:solidFill>
+                  <a:schemeClr val="bg1">
+                    <a:lumMod val="50000"/>
+                  </a:schemeClr>
+                </a:solidFill>
+              </a:rPr>
+              <a:t>Information Gain </a:t>
+            </a:r>
+            <a:r>
+              <a:rPr lang="en-US" dirty="0">
+                <a:solidFill>
+                  <a:schemeClr val="bg1">
+                    <a:lumMod val="50000"/>
+                  </a:schemeClr>
+                </a:solidFill>
+              </a:rPr>
+              <a:t>is </a:t>
+            </a:r>
+            <a:r>
+              <a:rPr lang="en-IL" dirty="0">
+                <a:solidFill>
+                  <a:schemeClr val="bg1">
+                    <a:lumMod val="50000"/>
+                  </a:schemeClr>
+                </a:solidFill>
+              </a:rPr>
+              <a:t>used to measure how much knowledge one variable provides about another.</a:t>
+            </a:r>
           </a:p>
         </p:txBody>
       </p:sp>
     </p:spTree>
     <p:extLst>
       <p:ext uri="{BB962C8B-B14F-4D97-AF65-F5344CB8AC3E}">
-        <p14:creationId xmlns:p14="http://schemas.microsoft.com/office/powerpoint/2010/main" val="46111239"/>
+        <p14:creationId xmlns:p14="http://schemas.microsoft.com/office/powerpoint/2010/main" val="3215404515"/>
       </p:ext>
     </p:extLst>
   </p:cSld>

--- a/docs/meeting/2026_05_06_for_investors.pptx
+++ b/docs/meeting/2026_05_06_for_investors.pptx
@@ -5,7 +5,7 @@
     <p:sldMasterId id="2147483648" r:id="rId1"/>
   </p:sldMasterIdLst>
   <p:notesMasterIdLst>
-    <p:notesMasterId r:id="rId31"/>
+    <p:notesMasterId r:id="rId30"/>
   </p:notesMasterIdLst>
   <p:sldIdLst>
     <p:sldId id="1574" r:id="rId2"/>
@@ -19,24 +19,23 @@
     <p:sldId id="1688" r:id="rId10"/>
     <p:sldId id="1686" r:id="rId11"/>
     <p:sldId id="1687" r:id="rId12"/>
-    <p:sldId id="1681" r:id="rId13"/>
-    <p:sldId id="1718" r:id="rId14"/>
-    <p:sldId id="1694" r:id="rId15"/>
-    <p:sldId id="1717" r:id="rId16"/>
-    <p:sldId id="1695" r:id="rId17"/>
-    <p:sldId id="1696" r:id="rId18"/>
+    <p:sldId id="1727" r:id="rId13"/>
+    <p:sldId id="1681" r:id="rId14"/>
+    <p:sldId id="1718" r:id="rId15"/>
+    <p:sldId id="1694" r:id="rId16"/>
+    <p:sldId id="1717" r:id="rId17"/>
+    <p:sldId id="1695" r:id="rId18"/>
     <p:sldId id="1715" r:id="rId19"/>
     <p:sldId id="1716" r:id="rId20"/>
-    <p:sldId id="1697" r:id="rId21"/>
+    <p:sldId id="1696" r:id="rId21"/>
     <p:sldId id="1698" r:id="rId22"/>
     <p:sldId id="1700" r:id="rId23"/>
     <p:sldId id="1673" r:id="rId24"/>
     <p:sldId id="1677" r:id="rId25"/>
-    <p:sldId id="1655" r:id="rId26"/>
-    <p:sldId id="1684" r:id="rId27"/>
-    <p:sldId id="1720" r:id="rId28"/>
-    <p:sldId id="1721" r:id="rId29"/>
-    <p:sldId id="1596" r:id="rId30"/>
+    <p:sldId id="1726" r:id="rId26"/>
+    <p:sldId id="1720" r:id="rId27"/>
+    <p:sldId id="1721" r:id="rId28"/>
+    <p:sldId id="1596" r:id="rId29"/>
   </p:sldIdLst>
   <p:sldSz cx="12192000" cy="6858000"/>
   <p:notesSz cx="6858000" cy="9144000"/>
@@ -155,6 +154,7 @@
             <p14:sldId id="1688"/>
             <p14:sldId id="1686"/>
             <p14:sldId id="1687"/>
+            <p14:sldId id="1727"/>
             <p14:sldId id="1681"/>
             <p14:sldId id="1718"/>
           </p14:sldIdLst>
@@ -164,20 +164,18 @@
             <p14:sldId id="1694"/>
             <p14:sldId id="1717"/>
             <p14:sldId id="1695"/>
-            <p14:sldId id="1696"/>
             <p14:sldId id="1715"/>
             <p14:sldId id="1716"/>
-            <p14:sldId id="1697"/>
+            <p14:sldId id="1696"/>
             <p14:sldId id="1698"/>
             <p14:sldId id="1700"/>
           </p14:sldIdLst>
         </p14:section>
-        <p14:section name="Choosing System Configuration" id="{C83692CF-8343-44C5-98F0-57602EFBDB9D}">
+        <p14:section name="Choosing System Configuration" id="{1D8F0A42-FB98-41AC-86C5-D299008F9146}">
           <p14:sldIdLst>
             <p14:sldId id="1673"/>
             <p14:sldId id="1677"/>
-            <p14:sldId id="1655"/>
-            <p14:sldId id="1684"/>
+            <p14:sldId id="1726"/>
           </p14:sldIdLst>
         </p14:section>
         <p14:section name="Data" id="{DB098AA4-3A76-49BC-B882-BA090BEB24C9}">
@@ -983,753 +981,6 @@
 </dgm:colorsDef>
 </file>
 
-<file path=ppt/diagrams/colors2.xml><?xml version="1.0" encoding="utf-8"?>
-<dgm:colorsDef xmlns:dgm="http://schemas.openxmlformats.org/drawingml/2006/diagram" xmlns:a="http://schemas.openxmlformats.org/drawingml/2006/main" uniqueId="urn:microsoft.com/office/officeart/2005/8/colors/accent3_2">
-  <dgm:title val=""/>
-  <dgm:desc val=""/>
-  <dgm:catLst>
-    <dgm:cat type="accent3" pri="11200"/>
-  </dgm:catLst>
-  <dgm:styleLbl name="node0">
-    <dgm:fillClrLst meth="repeat">
-      <a:schemeClr val="accent3"/>
-    </dgm:fillClrLst>
-    <dgm:linClrLst meth="repeat">
-      <a:schemeClr val="lt1"/>
-    </dgm:linClrLst>
-    <dgm:effectClrLst/>
-    <dgm:txLinClrLst/>
-    <dgm:txFillClrLst/>
-    <dgm:txEffectClrLst/>
-  </dgm:styleLbl>
-  <dgm:styleLbl name="node1">
-    <dgm:fillClrLst meth="repeat">
-      <a:schemeClr val="accent3"/>
-    </dgm:fillClrLst>
-    <dgm:linClrLst meth="repeat">
-      <a:schemeClr val="lt1"/>
-    </dgm:linClrLst>
-    <dgm:effectClrLst/>
-    <dgm:txLinClrLst/>
-    <dgm:txFillClrLst/>
-    <dgm:txEffectClrLst/>
-  </dgm:styleLbl>
-  <dgm:styleLbl name="alignNode1">
-    <dgm:fillClrLst meth="repeat">
-      <a:schemeClr val="accent3"/>
-    </dgm:fillClrLst>
-    <dgm:linClrLst meth="repeat">
-      <a:schemeClr val="accent3"/>
-    </dgm:linClrLst>
-    <dgm:effectClrLst/>
-    <dgm:txLinClrLst/>
-    <dgm:txFillClrLst/>
-    <dgm:txEffectClrLst/>
-  </dgm:styleLbl>
-  <dgm:styleLbl name="lnNode1">
-    <dgm:fillClrLst meth="repeat">
-      <a:schemeClr val="accent3"/>
-    </dgm:fillClrLst>
-    <dgm:linClrLst meth="repeat">
-      <a:schemeClr val="lt1"/>
-    </dgm:linClrLst>
-    <dgm:effectClrLst/>
-    <dgm:txLinClrLst/>
-    <dgm:txFillClrLst/>
-    <dgm:txEffectClrLst/>
-  </dgm:styleLbl>
-  <dgm:styleLbl name="vennNode1">
-    <dgm:fillClrLst meth="repeat">
-      <a:schemeClr val="accent3">
-        <a:alpha val="50000"/>
-      </a:schemeClr>
-    </dgm:fillClrLst>
-    <dgm:linClrLst meth="repeat">
-      <a:schemeClr val="lt1"/>
-    </dgm:linClrLst>
-    <dgm:effectClrLst/>
-    <dgm:txLinClrLst/>
-    <dgm:txFillClrLst/>
-    <dgm:txEffectClrLst/>
-  </dgm:styleLbl>
-  <dgm:styleLbl name="node2">
-    <dgm:fillClrLst meth="repeat">
-      <a:schemeClr val="accent3"/>
-    </dgm:fillClrLst>
-    <dgm:linClrLst meth="repeat">
-      <a:schemeClr val="lt1"/>
-    </dgm:linClrLst>
-    <dgm:effectClrLst/>
-    <dgm:txLinClrLst/>
-    <dgm:txFillClrLst/>
-    <dgm:txEffectClrLst/>
-  </dgm:styleLbl>
-  <dgm:styleLbl name="node3">
-    <dgm:fillClrLst meth="repeat">
-      <a:schemeClr val="accent3"/>
-    </dgm:fillClrLst>
-    <dgm:linClrLst meth="repeat">
-      <a:schemeClr val="lt1"/>
-    </dgm:linClrLst>
-    <dgm:effectClrLst/>
-    <dgm:txLinClrLst/>
-    <dgm:txFillClrLst/>
-    <dgm:txEffectClrLst/>
-  </dgm:styleLbl>
-  <dgm:styleLbl name="node4">
-    <dgm:fillClrLst meth="repeat">
-      <a:schemeClr val="accent3"/>
-    </dgm:fillClrLst>
-    <dgm:linClrLst meth="repeat">
-      <a:schemeClr val="lt1"/>
-    </dgm:linClrLst>
-    <dgm:effectClrLst/>
-    <dgm:txLinClrLst/>
-    <dgm:txFillClrLst/>
-    <dgm:txEffectClrLst/>
-  </dgm:styleLbl>
-  <dgm:styleLbl name="fgImgPlace1">
-    <dgm:fillClrLst meth="repeat">
-      <a:schemeClr val="accent3">
-        <a:tint val="50000"/>
-      </a:schemeClr>
-    </dgm:fillClrLst>
-    <dgm:linClrLst meth="repeat">
-      <a:schemeClr val="lt1"/>
-    </dgm:linClrLst>
-    <dgm:effectClrLst/>
-    <dgm:txLinClrLst/>
-    <dgm:txFillClrLst meth="repeat">
-      <a:schemeClr val="lt1"/>
-    </dgm:txFillClrLst>
-    <dgm:txEffectClrLst/>
-  </dgm:styleLbl>
-  <dgm:styleLbl name="alignImgPlace1">
-    <dgm:fillClrLst meth="repeat">
-      <a:schemeClr val="accent3">
-        <a:tint val="50000"/>
-      </a:schemeClr>
-    </dgm:fillClrLst>
-    <dgm:linClrLst meth="repeat">
-      <a:schemeClr val="lt1"/>
-    </dgm:linClrLst>
-    <dgm:effectClrLst/>
-    <dgm:txLinClrLst/>
-    <dgm:txFillClrLst meth="repeat">
-      <a:schemeClr val="lt1"/>
-    </dgm:txFillClrLst>
-    <dgm:txEffectClrLst/>
-  </dgm:styleLbl>
-  <dgm:styleLbl name="bgImgPlace1">
-    <dgm:fillClrLst meth="repeat">
-      <a:schemeClr val="accent3">
-        <a:tint val="50000"/>
-      </a:schemeClr>
-    </dgm:fillClrLst>
-    <dgm:linClrLst meth="repeat">
-      <a:schemeClr val="lt1"/>
-    </dgm:linClrLst>
-    <dgm:effectClrLst/>
-    <dgm:txLinClrLst/>
-    <dgm:txFillClrLst meth="repeat">
-      <a:schemeClr val="lt1"/>
-    </dgm:txFillClrLst>
-    <dgm:txEffectClrLst/>
-  </dgm:styleLbl>
-  <dgm:styleLbl name="sibTrans2D1">
-    <dgm:fillClrLst meth="repeat">
-      <a:schemeClr val="accent3">
-        <a:tint val="60000"/>
-      </a:schemeClr>
-    </dgm:fillClrLst>
-    <dgm:linClrLst meth="repeat">
-      <a:schemeClr val="accent3">
-        <a:tint val="60000"/>
-      </a:schemeClr>
-    </dgm:linClrLst>
-    <dgm:effectClrLst/>
-    <dgm:txLinClrLst/>
-    <dgm:txFillClrLst/>
-    <dgm:txEffectClrLst/>
-  </dgm:styleLbl>
-  <dgm:styleLbl name="fgSibTrans2D1">
-    <dgm:fillClrLst meth="repeat">
-      <a:schemeClr val="accent3">
-        <a:tint val="60000"/>
-      </a:schemeClr>
-    </dgm:fillClrLst>
-    <dgm:linClrLst meth="repeat">
-      <a:schemeClr val="accent3">
-        <a:tint val="60000"/>
-      </a:schemeClr>
-    </dgm:linClrLst>
-    <dgm:effectClrLst/>
-    <dgm:txLinClrLst/>
-    <dgm:txFillClrLst/>
-    <dgm:txEffectClrLst/>
-  </dgm:styleLbl>
-  <dgm:styleLbl name="bgSibTrans2D1">
-    <dgm:fillClrLst meth="repeat">
-      <a:schemeClr val="accent3">
-        <a:tint val="60000"/>
-      </a:schemeClr>
-    </dgm:fillClrLst>
-    <dgm:linClrLst meth="repeat">
-      <a:schemeClr val="accent3">
-        <a:tint val="60000"/>
-      </a:schemeClr>
-    </dgm:linClrLst>
-    <dgm:effectClrLst/>
-    <dgm:txLinClrLst/>
-    <dgm:txFillClrLst/>
-    <dgm:txEffectClrLst/>
-  </dgm:styleLbl>
-  <dgm:styleLbl name="sibTrans1D1">
-    <dgm:fillClrLst meth="repeat">
-      <a:schemeClr val="accent3"/>
-    </dgm:fillClrLst>
-    <dgm:linClrLst meth="repeat">
-      <a:schemeClr val="accent3"/>
-    </dgm:linClrLst>
-    <dgm:effectClrLst/>
-    <dgm:txLinClrLst/>
-    <dgm:txFillClrLst meth="repeat">
-      <a:schemeClr val="tx1"/>
-    </dgm:txFillClrLst>
-    <dgm:txEffectClrLst/>
-  </dgm:styleLbl>
-  <dgm:styleLbl name="callout">
-    <dgm:fillClrLst meth="repeat">
-      <a:schemeClr val="accent3"/>
-    </dgm:fillClrLst>
-    <dgm:linClrLst meth="repeat">
-      <a:schemeClr val="accent3">
-        <a:tint val="50000"/>
-      </a:schemeClr>
-    </dgm:linClrLst>
-    <dgm:effectClrLst/>
-    <dgm:txLinClrLst/>
-    <dgm:txFillClrLst meth="repeat">
-      <a:schemeClr val="tx1"/>
-    </dgm:txFillClrLst>
-    <dgm:txEffectClrLst/>
-  </dgm:styleLbl>
-  <dgm:styleLbl name="asst0">
-    <dgm:fillClrLst meth="repeat">
-      <a:schemeClr val="accent3"/>
-    </dgm:fillClrLst>
-    <dgm:linClrLst meth="repeat">
-      <a:schemeClr val="lt1"/>
-    </dgm:linClrLst>
-    <dgm:effectClrLst/>
-    <dgm:txLinClrLst/>
-    <dgm:txFillClrLst/>
-    <dgm:txEffectClrLst/>
-  </dgm:styleLbl>
-  <dgm:styleLbl name="asst1">
-    <dgm:fillClrLst meth="repeat">
-      <a:schemeClr val="accent3"/>
-    </dgm:fillClrLst>
-    <dgm:linClrLst meth="repeat">
-      <a:schemeClr val="lt1"/>
-    </dgm:linClrLst>
-    <dgm:effectClrLst/>
-    <dgm:txLinClrLst/>
-    <dgm:txFillClrLst/>
-    <dgm:txEffectClrLst/>
-  </dgm:styleLbl>
-  <dgm:styleLbl name="asst2">
-    <dgm:fillClrLst meth="repeat">
-      <a:schemeClr val="accent3"/>
-    </dgm:fillClrLst>
-    <dgm:linClrLst meth="repeat">
-      <a:schemeClr val="lt1"/>
-    </dgm:linClrLst>
-    <dgm:effectClrLst/>
-    <dgm:txLinClrLst/>
-    <dgm:txFillClrLst/>
-    <dgm:txEffectClrLst/>
-  </dgm:styleLbl>
-  <dgm:styleLbl name="asst3">
-    <dgm:fillClrLst meth="repeat">
-      <a:schemeClr val="accent3"/>
-    </dgm:fillClrLst>
-    <dgm:linClrLst meth="repeat">
-      <a:schemeClr val="lt1"/>
-    </dgm:linClrLst>
-    <dgm:effectClrLst/>
-    <dgm:txLinClrLst/>
-    <dgm:txFillClrLst/>
-    <dgm:txEffectClrLst/>
-  </dgm:styleLbl>
-  <dgm:styleLbl name="asst4">
-    <dgm:fillClrLst meth="repeat">
-      <a:schemeClr val="accent3"/>
-    </dgm:fillClrLst>
-    <dgm:linClrLst meth="repeat">
-      <a:schemeClr val="lt1"/>
-    </dgm:linClrLst>
-    <dgm:effectClrLst/>
-    <dgm:txLinClrLst/>
-    <dgm:txFillClrLst/>
-    <dgm:txEffectClrLst/>
-  </dgm:styleLbl>
-  <dgm:styleLbl name="parChTrans2D1">
-    <dgm:fillClrLst meth="repeat">
-      <a:schemeClr val="accent3">
-        <a:tint val="60000"/>
-      </a:schemeClr>
-    </dgm:fillClrLst>
-    <dgm:linClrLst meth="repeat">
-      <a:schemeClr val="accent3">
-        <a:tint val="60000"/>
-      </a:schemeClr>
-    </dgm:linClrLst>
-    <dgm:effectClrLst/>
-    <dgm:txLinClrLst/>
-    <dgm:txFillClrLst meth="repeat">
-      <a:schemeClr val="lt1"/>
-    </dgm:txFillClrLst>
-    <dgm:txEffectClrLst/>
-  </dgm:styleLbl>
-  <dgm:styleLbl name="parChTrans2D2">
-    <dgm:fillClrLst meth="repeat">
-      <a:schemeClr val="accent3"/>
-    </dgm:fillClrLst>
-    <dgm:linClrLst meth="repeat">
-      <a:schemeClr val="accent3"/>
-    </dgm:linClrLst>
-    <dgm:effectClrLst/>
-    <dgm:txLinClrLst/>
-    <dgm:txFillClrLst meth="repeat">
-      <a:schemeClr val="lt1"/>
-    </dgm:txFillClrLst>
-    <dgm:txEffectClrLst/>
-  </dgm:styleLbl>
-  <dgm:styleLbl name="parChTrans2D3">
-    <dgm:fillClrLst meth="repeat">
-      <a:schemeClr val="accent3"/>
-    </dgm:fillClrLst>
-    <dgm:linClrLst meth="repeat">
-      <a:schemeClr val="accent3"/>
-    </dgm:linClrLst>
-    <dgm:effectClrLst/>
-    <dgm:txLinClrLst/>
-    <dgm:txFillClrLst meth="repeat">
-      <a:schemeClr val="lt1"/>
-    </dgm:txFillClrLst>
-    <dgm:txEffectClrLst/>
-  </dgm:styleLbl>
-  <dgm:styleLbl name="parChTrans2D4">
-    <dgm:fillClrLst meth="repeat">
-      <a:schemeClr val="accent3"/>
-    </dgm:fillClrLst>
-    <dgm:linClrLst meth="repeat">
-      <a:schemeClr val="accent3"/>
-    </dgm:linClrLst>
-    <dgm:effectClrLst/>
-    <dgm:txLinClrLst/>
-    <dgm:txFillClrLst meth="repeat">
-      <a:schemeClr val="lt1"/>
-    </dgm:txFillClrLst>
-    <dgm:txEffectClrLst/>
-  </dgm:styleLbl>
-  <dgm:styleLbl name="parChTrans1D1">
-    <dgm:fillClrLst meth="repeat">
-      <a:schemeClr val="accent3"/>
-    </dgm:fillClrLst>
-    <dgm:linClrLst meth="repeat">
-      <a:schemeClr val="accent3">
-        <a:shade val="60000"/>
-      </a:schemeClr>
-    </dgm:linClrLst>
-    <dgm:effectClrLst/>
-    <dgm:txLinClrLst/>
-    <dgm:txFillClrLst meth="repeat">
-      <a:schemeClr val="tx1"/>
-    </dgm:txFillClrLst>
-    <dgm:txEffectClrLst/>
-  </dgm:styleLbl>
-  <dgm:styleLbl name="parChTrans1D2">
-    <dgm:fillClrLst meth="repeat">
-      <a:schemeClr val="accent3"/>
-    </dgm:fillClrLst>
-    <dgm:linClrLst meth="repeat">
-      <a:schemeClr val="accent3">
-        <a:shade val="60000"/>
-      </a:schemeClr>
-    </dgm:linClrLst>
-    <dgm:effectClrLst/>
-    <dgm:txLinClrLst/>
-    <dgm:txFillClrLst meth="repeat">
-      <a:schemeClr val="tx1"/>
-    </dgm:txFillClrLst>
-    <dgm:txEffectClrLst/>
-  </dgm:styleLbl>
-  <dgm:styleLbl name="parChTrans1D3">
-    <dgm:fillClrLst meth="repeat">
-      <a:schemeClr val="accent3"/>
-    </dgm:fillClrLst>
-    <dgm:linClrLst meth="repeat">
-      <a:schemeClr val="accent3">
-        <a:shade val="80000"/>
-      </a:schemeClr>
-    </dgm:linClrLst>
-    <dgm:effectClrLst/>
-    <dgm:txLinClrLst/>
-    <dgm:txFillClrLst meth="repeat">
-      <a:schemeClr val="tx1"/>
-    </dgm:txFillClrLst>
-    <dgm:txEffectClrLst/>
-  </dgm:styleLbl>
-  <dgm:styleLbl name="parChTrans1D4">
-    <dgm:fillClrLst meth="repeat">
-      <a:schemeClr val="accent3"/>
-    </dgm:fillClrLst>
-    <dgm:linClrLst meth="repeat">
-      <a:schemeClr val="accent3">
-        <a:shade val="80000"/>
-      </a:schemeClr>
-    </dgm:linClrLst>
-    <dgm:effectClrLst/>
-    <dgm:txLinClrLst/>
-    <dgm:txFillClrLst meth="repeat">
-      <a:schemeClr val="tx1"/>
-    </dgm:txFillClrLst>
-    <dgm:txEffectClrLst/>
-  </dgm:styleLbl>
-  <dgm:styleLbl name="fgAcc1">
-    <dgm:fillClrLst meth="repeat">
-      <a:schemeClr val="lt1">
-        <a:alpha val="90000"/>
-      </a:schemeClr>
-    </dgm:fillClrLst>
-    <dgm:linClrLst meth="repeat">
-      <a:schemeClr val="accent3"/>
-    </dgm:linClrLst>
-    <dgm:effectClrLst/>
-    <dgm:txLinClrLst/>
-    <dgm:txFillClrLst meth="repeat">
-      <a:schemeClr val="dk1"/>
-    </dgm:txFillClrLst>
-    <dgm:txEffectClrLst/>
-  </dgm:styleLbl>
-  <dgm:styleLbl name="conFgAcc1">
-    <dgm:fillClrLst meth="repeat">
-      <a:schemeClr val="lt1">
-        <a:alpha val="90000"/>
-      </a:schemeClr>
-    </dgm:fillClrLst>
-    <dgm:linClrLst meth="repeat">
-      <a:schemeClr val="accent3"/>
-    </dgm:linClrLst>
-    <dgm:effectClrLst/>
-    <dgm:txLinClrLst/>
-    <dgm:txFillClrLst meth="repeat">
-      <a:schemeClr val="dk1"/>
-    </dgm:txFillClrLst>
-    <dgm:txEffectClrLst/>
-  </dgm:styleLbl>
-  <dgm:styleLbl name="alignAcc1">
-    <dgm:fillClrLst meth="repeat">
-      <a:schemeClr val="lt1">
-        <a:alpha val="90000"/>
-      </a:schemeClr>
-    </dgm:fillClrLst>
-    <dgm:linClrLst meth="repeat">
-      <a:schemeClr val="accent3"/>
-    </dgm:linClrLst>
-    <dgm:effectClrLst/>
-    <dgm:txLinClrLst/>
-    <dgm:txFillClrLst meth="repeat">
-      <a:schemeClr val="dk1"/>
-    </dgm:txFillClrLst>
-    <dgm:txEffectClrLst/>
-  </dgm:styleLbl>
-  <dgm:styleLbl name="trAlignAcc1">
-    <dgm:fillClrLst meth="repeat">
-      <a:schemeClr val="lt1">
-        <a:alpha val="40000"/>
-      </a:schemeClr>
-    </dgm:fillClrLst>
-    <dgm:linClrLst meth="repeat">
-      <a:schemeClr val="accent3"/>
-    </dgm:linClrLst>
-    <dgm:effectClrLst/>
-    <dgm:txLinClrLst/>
-    <dgm:txFillClrLst meth="repeat">
-      <a:schemeClr val="dk1"/>
-    </dgm:txFillClrLst>
-    <dgm:txEffectClrLst/>
-  </dgm:styleLbl>
-  <dgm:styleLbl name="bgAcc1">
-    <dgm:fillClrLst meth="repeat">
-      <a:schemeClr val="lt1">
-        <a:alpha val="90000"/>
-      </a:schemeClr>
-    </dgm:fillClrLst>
-    <dgm:linClrLst meth="repeat">
-      <a:schemeClr val="accent3"/>
-    </dgm:linClrLst>
-    <dgm:effectClrLst/>
-    <dgm:txLinClrLst/>
-    <dgm:txFillClrLst meth="repeat">
-      <a:schemeClr val="dk1"/>
-    </dgm:txFillClrLst>
-    <dgm:txEffectClrLst/>
-  </dgm:styleLbl>
-  <dgm:styleLbl name="solidFgAcc1">
-    <dgm:fillClrLst meth="repeat">
-      <a:schemeClr val="lt1"/>
-    </dgm:fillClrLst>
-    <dgm:linClrLst meth="repeat">
-      <a:schemeClr val="accent3"/>
-    </dgm:linClrLst>
-    <dgm:effectClrLst/>
-    <dgm:txLinClrLst/>
-    <dgm:txFillClrLst meth="repeat">
-      <a:schemeClr val="dk1"/>
-    </dgm:txFillClrLst>
-    <dgm:txEffectClrLst/>
-  </dgm:styleLbl>
-  <dgm:styleLbl name="solidAlignAcc1">
-    <dgm:fillClrLst meth="repeat">
-      <a:schemeClr val="lt1"/>
-    </dgm:fillClrLst>
-    <dgm:linClrLst meth="repeat">
-      <a:schemeClr val="accent3"/>
-    </dgm:linClrLst>
-    <dgm:effectClrLst/>
-    <dgm:txLinClrLst/>
-    <dgm:txFillClrLst meth="repeat">
-      <a:schemeClr val="dk1"/>
-    </dgm:txFillClrLst>
-    <dgm:txEffectClrLst/>
-  </dgm:styleLbl>
-  <dgm:styleLbl name="solidBgAcc1">
-    <dgm:fillClrLst meth="repeat">
-      <a:schemeClr val="lt1"/>
-    </dgm:fillClrLst>
-    <dgm:linClrLst meth="repeat">
-      <a:schemeClr val="accent3"/>
-    </dgm:linClrLst>
-    <dgm:effectClrLst/>
-    <dgm:txLinClrLst/>
-    <dgm:txFillClrLst meth="repeat">
-      <a:schemeClr val="dk1"/>
-    </dgm:txFillClrLst>
-    <dgm:txEffectClrLst/>
-  </dgm:styleLbl>
-  <dgm:styleLbl name="fgAccFollowNode1">
-    <dgm:fillClrLst meth="repeat">
-      <a:schemeClr val="accent3">
-        <a:alpha val="90000"/>
-        <a:tint val="40000"/>
-      </a:schemeClr>
-    </dgm:fillClrLst>
-    <dgm:linClrLst meth="repeat">
-      <a:schemeClr val="accent3">
-        <a:alpha val="90000"/>
-        <a:tint val="40000"/>
-      </a:schemeClr>
-    </dgm:linClrLst>
-    <dgm:effectClrLst/>
-    <dgm:txLinClrLst/>
-    <dgm:txFillClrLst meth="repeat">
-      <a:schemeClr val="dk1"/>
-    </dgm:txFillClrLst>
-    <dgm:txEffectClrLst/>
-  </dgm:styleLbl>
-  <dgm:styleLbl name="alignAccFollowNode1">
-    <dgm:fillClrLst meth="repeat">
-      <a:schemeClr val="accent3">
-        <a:alpha val="90000"/>
-        <a:tint val="40000"/>
-      </a:schemeClr>
-    </dgm:fillClrLst>
-    <dgm:linClrLst meth="repeat">
-      <a:schemeClr val="accent3">
-        <a:alpha val="90000"/>
-        <a:tint val="40000"/>
-      </a:schemeClr>
-    </dgm:linClrLst>
-    <dgm:effectClrLst/>
-    <dgm:txLinClrLst/>
-    <dgm:txFillClrLst meth="repeat">
-      <a:schemeClr val="dk1"/>
-    </dgm:txFillClrLst>
-    <dgm:txEffectClrLst/>
-  </dgm:styleLbl>
-  <dgm:styleLbl name="bgAccFollowNode1">
-    <dgm:fillClrLst meth="repeat">
-      <a:schemeClr val="accent3">
-        <a:alpha val="90000"/>
-        <a:tint val="40000"/>
-      </a:schemeClr>
-    </dgm:fillClrLst>
-    <dgm:linClrLst meth="repeat">
-      <a:schemeClr val="accent3">
-        <a:alpha val="90000"/>
-        <a:tint val="40000"/>
-      </a:schemeClr>
-    </dgm:linClrLst>
-    <dgm:effectClrLst/>
-    <dgm:txLinClrLst/>
-    <dgm:txFillClrLst meth="repeat">
-      <a:schemeClr val="dk1"/>
-    </dgm:txFillClrLst>
-    <dgm:txEffectClrLst/>
-  </dgm:styleLbl>
-  <dgm:styleLbl name="fgAcc0">
-    <dgm:fillClrLst meth="repeat">
-      <a:schemeClr val="lt1">
-        <a:alpha val="90000"/>
-      </a:schemeClr>
-    </dgm:fillClrLst>
-    <dgm:linClrLst meth="repeat">
-      <a:schemeClr val="accent3"/>
-    </dgm:linClrLst>
-    <dgm:effectClrLst/>
-    <dgm:txLinClrLst/>
-    <dgm:txFillClrLst meth="repeat">
-      <a:schemeClr val="dk1"/>
-    </dgm:txFillClrLst>
-    <dgm:txEffectClrLst/>
-  </dgm:styleLbl>
-  <dgm:styleLbl name="fgAcc2">
-    <dgm:fillClrLst meth="repeat">
-      <a:schemeClr val="lt1">
-        <a:alpha val="90000"/>
-      </a:schemeClr>
-    </dgm:fillClrLst>
-    <dgm:linClrLst meth="repeat">
-      <a:schemeClr val="accent3"/>
-    </dgm:linClrLst>
-    <dgm:effectClrLst/>
-    <dgm:txLinClrLst/>
-    <dgm:txFillClrLst meth="repeat">
-      <a:schemeClr val="dk1"/>
-    </dgm:txFillClrLst>
-    <dgm:txEffectClrLst/>
-  </dgm:styleLbl>
-  <dgm:styleLbl name="fgAcc3">
-    <dgm:fillClrLst meth="repeat">
-      <a:schemeClr val="lt1">
-        <a:alpha val="90000"/>
-      </a:schemeClr>
-    </dgm:fillClrLst>
-    <dgm:linClrLst meth="repeat">
-      <a:schemeClr val="accent3"/>
-    </dgm:linClrLst>
-    <dgm:effectClrLst/>
-    <dgm:txLinClrLst/>
-    <dgm:txFillClrLst meth="repeat">
-      <a:schemeClr val="dk1"/>
-    </dgm:txFillClrLst>
-    <dgm:txEffectClrLst/>
-  </dgm:styleLbl>
-  <dgm:styleLbl name="fgAcc4">
-    <dgm:fillClrLst meth="repeat">
-      <a:schemeClr val="lt1">
-        <a:alpha val="90000"/>
-      </a:schemeClr>
-    </dgm:fillClrLst>
-    <dgm:linClrLst meth="repeat">
-      <a:schemeClr val="accent3"/>
-    </dgm:linClrLst>
-    <dgm:effectClrLst/>
-    <dgm:txLinClrLst/>
-    <dgm:txFillClrLst meth="repeat">
-      <a:schemeClr val="dk1"/>
-    </dgm:txFillClrLst>
-    <dgm:txEffectClrLst/>
-  </dgm:styleLbl>
-  <dgm:styleLbl name="bgShp">
-    <dgm:fillClrLst meth="repeat">
-      <a:schemeClr val="accent3">
-        <a:tint val="40000"/>
-      </a:schemeClr>
-    </dgm:fillClrLst>
-    <dgm:linClrLst meth="repeat">
-      <a:schemeClr val="accent3"/>
-    </dgm:linClrLst>
-    <dgm:effectClrLst/>
-    <dgm:txLinClrLst/>
-    <dgm:txFillClrLst meth="repeat">
-      <a:schemeClr val="dk1"/>
-    </dgm:txFillClrLst>
-    <dgm:txEffectClrLst/>
-  </dgm:styleLbl>
-  <dgm:styleLbl name="dkBgShp">
-    <dgm:fillClrLst meth="repeat">
-      <a:schemeClr val="accent3">
-        <a:shade val="80000"/>
-      </a:schemeClr>
-    </dgm:fillClrLst>
-    <dgm:linClrLst meth="repeat">
-      <a:schemeClr val="accent3"/>
-    </dgm:linClrLst>
-    <dgm:effectClrLst/>
-    <dgm:txLinClrLst/>
-    <dgm:txFillClrLst meth="repeat">
-      <a:schemeClr val="lt1"/>
-    </dgm:txFillClrLst>
-    <dgm:txEffectClrLst/>
-  </dgm:styleLbl>
-  <dgm:styleLbl name="trBgShp">
-    <dgm:fillClrLst meth="repeat">
-      <a:schemeClr val="accent3">
-        <a:tint val="50000"/>
-        <a:alpha val="40000"/>
-      </a:schemeClr>
-    </dgm:fillClrLst>
-    <dgm:linClrLst meth="repeat">
-      <a:schemeClr val="accent3"/>
-    </dgm:linClrLst>
-    <dgm:effectClrLst/>
-    <dgm:txLinClrLst/>
-    <dgm:txFillClrLst meth="repeat">
-      <a:schemeClr val="lt1"/>
-    </dgm:txFillClrLst>
-    <dgm:txEffectClrLst/>
-  </dgm:styleLbl>
-  <dgm:styleLbl name="fgShp">
-    <dgm:fillClrLst meth="repeat">
-      <a:schemeClr val="accent3">
-        <a:tint val="60000"/>
-      </a:schemeClr>
-    </dgm:fillClrLst>
-    <dgm:linClrLst meth="repeat">
-      <a:schemeClr val="lt1"/>
-    </dgm:linClrLst>
-    <dgm:effectClrLst/>
-    <dgm:txLinClrLst/>
-    <dgm:txFillClrLst meth="repeat">
-      <a:schemeClr val="dk1"/>
-    </dgm:txFillClrLst>
-    <dgm:txEffectClrLst/>
-  </dgm:styleLbl>
-  <dgm:styleLbl name="revTx">
-    <dgm:fillClrLst meth="repeat">
-      <a:schemeClr val="lt1">
-        <a:alpha val="0"/>
-      </a:schemeClr>
-    </dgm:fillClrLst>
-    <dgm:linClrLst meth="repeat">
-      <a:schemeClr val="dk1">
-        <a:alpha val="0"/>
-      </a:schemeClr>
-    </dgm:linClrLst>
-    <dgm:effectClrLst/>
-    <dgm:txLinClrLst/>
-    <dgm:txFillClrLst meth="repeat">
-      <a:schemeClr val="tx1"/>
-    </dgm:txFillClrLst>
-    <dgm:txEffectClrLst/>
-  </dgm:styleLbl>
-</dgm:colorsDef>
-</file>
-
 <file path=ppt/diagrams/data1.xml><?xml version="1.0" encoding="utf-8"?>
 <dgm:dataModel xmlns:dgm="http://schemas.openxmlformats.org/drawingml/2006/diagram" xmlns:a="http://schemas.openxmlformats.org/drawingml/2006/main">
   <dgm:ptLst>
@@ -2161,251 +1412,6 @@
 </dgm:dataModel>
 </file>
 
-<file path=ppt/diagrams/data2.xml><?xml version="1.0" encoding="utf-8"?>
-<dgm:dataModel xmlns:dgm="http://schemas.openxmlformats.org/drawingml/2006/diagram" xmlns:a="http://schemas.openxmlformats.org/drawingml/2006/main">
-  <dgm:ptLst>
-    <dgm:pt modelId="{48D4E7A2-8A11-4977-90EB-BCF173AAC1CF}" type="doc">
-      <dgm:prSet loTypeId="urn:microsoft.com/office/officeart/2005/8/layout/hierarchy1" loCatId="hierarchy" qsTypeId="urn:microsoft.com/office/officeart/2005/8/quickstyle/simple4" qsCatId="simple" csTypeId="urn:microsoft.com/office/officeart/2005/8/colors/accent3_2" csCatId="accent3"/>
-      <dgm:spPr/>
-      <dgm:t>
-        <a:bodyPr/>
-        <a:lstStyle/>
-        <a:p>
-          <a:endParaRPr lang="en-US"/>
-        </a:p>
-      </dgm:t>
-    </dgm:pt>
-    <dgm:pt modelId="{48C1F649-B664-442E-9C2C-71D703D0F72F}">
-      <dgm:prSet/>
-      <dgm:spPr/>
-      <dgm:t>
-        <a:bodyPr/>
-        <a:lstStyle/>
-        <a:p>
-          <a:r>
-            <a:rPr lang="en-US" dirty="0" err="1"/>
-            <a:t>BERTopic</a:t>
-          </a:r>
-          <a:r>
-            <a:rPr lang="en-US" dirty="0"/>
-            <a:t> with min topic size 256</a:t>
-          </a:r>
-        </a:p>
-      </dgm:t>
-    </dgm:pt>
-    <dgm:pt modelId="{2B401E80-D64E-4EB4-8448-150AA42F6027}" type="parTrans" cxnId="{EFEF0AC2-7C54-40A4-A0C9-F7B407D07FBF}">
-      <dgm:prSet/>
-      <dgm:spPr/>
-      <dgm:t>
-        <a:bodyPr/>
-        <a:lstStyle/>
-        <a:p>
-          <a:endParaRPr lang="en-US"/>
-        </a:p>
-      </dgm:t>
-    </dgm:pt>
-    <dgm:pt modelId="{A1F3B2FA-854A-4011-87A0-2E3C3958B7E6}" type="sibTrans" cxnId="{EFEF0AC2-7C54-40A4-A0C9-F7B407D07FBF}">
-      <dgm:prSet/>
-      <dgm:spPr/>
-      <dgm:t>
-        <a:bodyPr/>
-        <a:lstStyle/>
-        <a:p>
-          <a:endParaRPr lang="en-US"/>
-        </a:p>
-      </dgm:t>
-    </dgm:pt>
-    <dgm:pt modelId="{684C3ECF-12BA-4A1B-A548-F1E06B32F3A3}">
-      <dgm:prSet/>
-      <dgm:spPr/>
-      <dgm:t>
-        <a:bodyPr/>
-        <a:lstStyle/>
-        <a:p>
-          <a:r>
-            <a:rPr lang="en-US" dirty="0"/>
-            <a:t>Undirected Graph</a:t>
-          </a:r>
-        </a:p>
-      </dgm:t>
-    </dgm:pt>
-    <dgm:pt modelId="{B5EB8C15-3823-4AC4-96BE-38BE236A733B}" type="parTrans" cxnId="{B4A7BA22-7262-4259-85BF-D7B2D0DD3DC2}">
-      <dgm:prSet/>
-      <dgm:spPr/>
-      <dgm:t>
-        <a:bodyPr/>
-        <a:lstStyle/>
-        <a:p>
-          <a:endParaRPr lang="en-US"/>
-        </a:p>
-      </dgm:t>
-    </dgm:pt>
-    <dgm:pt modelId="{6320B1B3-28F6-41D3-A741-E8413599B4D9}" type="sibTrans" cxnId="{B4A7BA22-7262-4259-85BF-D7B2D0DD3DC2}">
-      <dgm:prSet/>
-      <dgm:spPr/>
-      <dgm:t>
-        <a:bodyPr/>
-        <a:lstStyle/>
-        <a:p>
-          <a:endParaRPr lang="en-US"/>
-        </a:p>
-      </dgm:t>
-    </dgm:pt>
-    <dgm:pt modelId="{35949B16-338C-4177-9A4B-B718DD3F783C}">
-      <dgm:prSet/>
-      <dgm:spPr/>
-      <dgm:t>
-        <a:bodyPr/>
-        <a:lstStyle/>
-        <a:p>
-          <a:r>
-            <a:rPr lang="en-US" dirty="0"/>
-            <a:t>Per-topic key authors selection</a:t>
-          </a:r>
-        </a:p>
-      </dgm:t>
-    </dgm:pt>
-    <dgm:pt modelId="{67190573-2B92-4455-836B-7C3704001459}" type="parTrans" cxnId="{07F142CF-1F0C-40E6-B73A-9EC73B4B2562}">
-      <dgm:prSet/>
-      <dgm:spPr/>
-      <dgm:t>
-        <a:bodyPr/>
-        <a:lstStyle/>
-        <a:p>
-          <a:endParaRPr lang="en-US"/>
-        </a:p>
-      </dgm:t>
-    </dgm:pt>
-    <dgm:pt modelId="{FAAF96AD-2AB3-4061-BF38-CEE206FB28A0}" type="sibTrans" cxnId="{07F142CF-1F0C-40E6-B73A-9EC73B4B2562}">
-      <dgm:prSet/>
-      <dgm:spPr/>
-      <dgm:t>
-        <a:bodyPr/>
-        <a:lstStyle/>
-        <a:p>
-          <a:endParaRPr lang="en-US"/>
-        </a:p>
-      </dgm:t>
-    </dgm:pt>
-    <dgm:pt modelId="{8AB73D15-007F-4F45-85D7-841E3319895E}" type="pres">
-      <dgm:prSet presAssocID="{48D4E7A2-8A11-4977-90EB-BCF173AAC1CF}" presName="hierChild1" presStyleCnt="0">
-        <dgm:presLayoutVars>
-          <dgm:chPref val="1"/>
-          <dgm:dir/>
-          <dgm:animOne val="branch"/>
-          <dgm:animLvl val="lvl"/>
-          <dgm:resizeHandles/>
-        </dgm:presLayoutVars>
-      </dgm:prSet>
-      <dgm:spPr/>
-    </dgm:pt>
-    <dgm:pt modelId="{CA5C92AC-0A19-4B24-AEC2-466E7D6E5318}" type="pres">
-      <dgm:prSet presAssocID="{48C1F649-B664-442E-9C2C-71D703D0F72F}" presName="hierRoot1" presStyleCnt="0"/>
-      <dgm:spPr/>
-    </dgm:pt>
-    <dgm:pt modelId="{1E51895D-E3D6-4F89-8BBE-E147B4489BD3}" type="pres">
-      <dgm:prSet presAssocID="{48C1F649-B664-442E-9C2C-71D703D0F72F}" presName="composite" presStyleCnt="0"/>
-      <dgm:spPr/>
-    </dgm:pt>
-    <dgm:pt modelId="{FC157D70-A2FE-4FC6-9DE4-45F9C9AD44D8}" type="pres">
-      <dgm:prSet presAssocID="{48C1F649-B664-442E-9C2C-71D703D0F72F}" presName="background" presStyleLbl="node0" presStyleIdx="0" presStyleCnt="3"/>
-      <dgm:spPr/>
-    </dgm:pt>
-    <dgm:pt modelId="{C3A4576F-0386-4754-B9CF-9E31B2A2932C}" type="pres">
-      <dgm:prSet presAssocID="{48C1F649-B664-442E-9C2C-71D703D0F72F}" presName="text" presStyleLbl="fgAcc0" presStyleIdx="0" presStyleCnt="3">
-        <dgm:presLayoutVars>
-          <dgm:chPref val="3"/>
-        </dgm:presLayoutVars>
-      </dgm:prSet>
-      <dgm:spPr/>
-    </dgm:pt>
-    <dgm:pt modelId="{1D00A025-DB64-4BB5-967A-79BBC4E59A18}" type="pres">
-      <dgm:prSet presAssocID="{48C1F649-B664-442E-9C2C-71D703D0F72F}" presName="hierChild2" presStyleCnt="0"/>
-      <dgm:spPr/>
-    </dgm:pt>
-    <dgm:pt modelId="{0D7A648D-89A4-4FBE-9911-6DB7AD854215}" type="pres">
-      <dgm:prSet presAssocID="{684C3ECF-12BA-4A1B-A548-F1E06B32F3A3}" presName="hierRoot1" presStyleCnt="0"/>
-      <dgm:spPr/>
-    </dgm:pt>
-    <dgm:pt modelId="{4333EB95-4CD0-4488-B35D-9047928D24AB}" type="pres">
-      <dgm:prSet presAssocID="{684C3ECF-12BA-4A1B-A548-F1E06B32F3A3}" presName="composite" presStyleCnt="0"/>
-      <dgm:spPr/>
-    </dgm:pt>
-    <dgm:pt modelId="{4CE028F8-A63B-45AA-886D-7C4325390AEA}" type="pres">
-      <dgm:prSet presAssocID="{684C3ECF-12BA-4A1B-A548-F1E06B32F3A3}" presName="background" presStyleLbl="node0" presStyleIdx="1" presStyleCnt="3"/>
-      <dgm:spPr/>
-    </dgm:pt>
-    <dgm:pt modelId="{5E204233-41D4-45C7-BAC4-DEE75D604568}" type="pres">
-      <dgm:prSet presAssocID="{684C3ECF-12BA-4A1B-A548-F1E06B32F3A3}" presName="text" presStyleLbl="fgAcc0" presStyleIdx="1" presStyleCnt="3">
-        <dgm:presLayoutVars>
-          <dgm:chPref val="3"/>
-        </dgm:presLayoutVars>
-      </dgm:prSet>
-      <dgm:spPr/>
-    </dgm:pt>
-    <dgm:pt modelId="{13DC9582-8935-4C97-9B9F-48149BF6B13D}" type="pres">
-      <dgm:prSet presAssocID="{684C3ECF-12BA-4A1B-A548-F1E06B32F3A3}" presName="hierChild2" presStyleCnt="0"/>
-      <dgm:spPr/>
-    </dgm:pt>
-    <dgm:pt modelId="{4FA93D08-580B-480D-A637-E3B7E15B1F9E}" type="pres">
-      <dgm:prSet presAssocID="{35949B16-338C-4177-9A4B-B718DD3F783C}" presName="hierRoot1" presStyleCnt="0"/>
-      <dgm:spPr/>
-    </dgm:pt>
-    <dgm:pt modelId="{521B4C96-91E1-49C6-B56C-DE6B8B2D5E4F}" type="pres">
-      <dgm:prSet presAssocID="{35949B16-338C-4177-9A4B-B718DD3F783C}" presName="composite" presStyleCnt="0"/>
-      <dgm:spPr/>
-    </dgm:pt>
-    <dgm:pt modelId="{4201FDE8-646B-4DD3-8D96-FECE9F5F0F36}" type="pres">
-      <dgm:prSet presAssocID="{35949B16-338C-4177-9A4B-B718DD3F783C}" presName="background" presStyleLbl="node0" presStyleIdx="2" presStyleCnt="3"/>
-      <dgm:spPr/>
-    </dgm:pt>
-    <dgm:pt modelId="{E717723C-65AF-4550-BB31-2B724931FE5F}" type="pres">
-      <dgm:prSet presAssocID="{35949B16-338C-4177-9A4B-B718DD3F783C}" presName="text" presStyleLbl="fgAcc0" presStyleIdx="2" presStyleCnt="3">
-        <dgm:presLayoutVars>
-          <dgm:chPref val="3"/>
-        </dgm:presLayoutVars>
-      </dgm:prSet>
-      <dgm:spPr/>
-    </dgm:pt>
-    <dgm:pt modelId="{AA7120EB-054F-45F3-ABB2-3AA08A2AE618}" type="pres">
-      <dgm:prSet presAssocID="{35949B16-338C-4177-9A4B-B718DD3F783C}" presName="hierChild2" presStyleCnt="0"/>
-      <dgm:spPr/>
-    </dgm:pt>
-  </dgm:ptLst>
-  <dgm:cxnLst>
-    <dgm:cxn modelId="{FF10AC01-F0C6-4B84-9E33-7CB7841D38B6}" type="presOf" srcId="{684C3ECF-12BA-4A1B-A548-F1E06B32F3A3}" destId="{5E204233-41D4-45C7-BAC4-DEE75D604568}" srcOrd="0" destOrd="0" presId="urn:microsoft.com/office/officeart/2005/8/layout/hierarchy1"/>
-    <dgm:cxn modelId="{B4A7BA22-7262-4259-85BF-D7B2D0DD3DC2}" srcId="{48D4E7A2-8A11-4977-90EB-BCF173AAC1CF}" destId="{684C3ECF-12BA-4A1B-A548-F1E06B32F3A3}" srcOrd="1" destOrd="0" parTransId="{B5EB8C15-3823-4AC4-96BE-38BE236A733B}" sibTransId="{6320B1B3-28F6-41D3-A741-E8413599B4D9}"/>
-    <dgm:cxn modelId="{CD452133-FE8C-4805-8899-85808EA7850D}" type="presOf" srcId="{35949B16-338C-4177-9A4B-B718DD3F783C}" destId="{E717723C-65AF-4550-BB31-2B724931FE5F}" srcOrd="0" destOrd="0" presId="urn:microsoft.com/office/officeart/2005/8/layout/hierarchy1"/>
-    <dgm:cxn modelId="{EFEF0AC2-7C54-40A4-A0C9-F7B407D07FBF}" srcId="{48D4E7A2-8A11-4977-90EB-BCF173AAC1CF}" destId="{48C1F649-B664-442E-9C2C-71D703D0F72F}" srcOrd="0" destOrd="0" parTransId="{2B401E80-D64E-4EB4-8448-150AA42F6027}" sibTransId="{A1F3B2FA-854A-4011-87A0-2E3C3958B7E6}"/>
-    <dgm:cxn modelId="{7BB313C7-E85A-498F-B938-76A7A56683F8}" type="presOf" srcId="{48C1F649-B664-442E-9C2C-71D703D0F72F}" destId="{C3A4576F-0386-4754-B9CF-9E31B2A2932C}" srcOrd="0" destOrd="0" presId="urn:microsoft.com/office/officeart/2005/8/layout/hierarchy1"/>
-    <dgm:cxn modelId="{07F142CF-1F0C-40E6-B73A-9EC73B4B2562}" srcId="{48D4E7A2-8A11-4977-90EB-BCF173AAC1CF}" destId="{35949B16-338C-4177-9A4B-B718DD3F783C}" srcOrd="2" destOrd="0" parTransId="{67190573-2B92-4455-836B-7C3704001459}" sibTransId="{FAAF96AD-2AB3-4061-BF38-CEE206FB28A0}"/>
-    <dgm:cxn modelId="{59BE55E0-8644-4C40-89A3-570CF0A0067D}" type="presOf" srcId="{48D4E7A2-8A11-4977-90EB-BCF173AAC1CF}" destId="{8AB73D15-007F-4F45-85D7-841E3319895E}" srcOrd="0" destOrd="0" presId="urn:microsoft.com/office/officeart/2005/8/layout/hierarchy1"/>
-    <dgm:cxn modelId="{D6024C07-4289-477A-91DE-A0A1FBBF59A5}" type="presParOf" srcId="{8AB73D15-007F-4F45-85D7-841E3319895E}" destId="{CA5C92AC-0A19-4B24-AEC2-466E7D6E5318}" srcOrd="0" destOrd="0" presId="urn:microsoft.com/office/officeart/2005/8/layout/hierarchy1"/>
-    <dgm:cxn modelId="{77385DEB-E251-49CA-A2E4-FF8CDED676A9}" type="presParOf" srcId="{CA5C92AC-0A19-4B24-AEC2-466E7D6E5318}" destId="{1E51895D-E3D6-4F89-8BBE-E147B4489BD3}" srcOrd="0" destOrd="0" presId="urn:microsoft.com/office/officeart/2005/8/layout/hierarchy1"/>
-    <dgm:cxn modelId="{E2BA18D3-63DE-44FF-B973-137AB0A46E50}" type="presParOf" srcId="{1E51895D-E3D6-4F89-8BBE-E147B4489BD3}" destId="{FC157D70-A2FE-4FC6-9DE4-45F9C9AD44D8}" srcOrd="0" destOrd="0" presId="urn:microsoft.com/office/officeart/2005/8/layout/hierarchy1"/>
-    <dgm:cxn modelId="{A333D83C-6E45-48FA-ABF5-CE9ADDD736FE}" type="presParOf" srcId="{1E51895D-E3D6-4F89-8BBE-E147B4489BD3}" destId="{C3A4576F-0386-4754-B9CF-9E31B2A2932C}" srcOrd="1" destOrd="0" presId="urn:microsoft.com/office/officeart/2005/8/layout/hierarchy1"/>
-    <dgm:cxn modelId="{E8BC0405-8811-4D81-8863-C7C553369617}" type="presParOf" srcId="{CA5C92AC-0A19-4B24-AEC2-466E7D6E5318}" destId="{1D00A025-DB64-4BB5-967A-79BBC4E59A18}" srcOrd="1" destOrd="0" presId="urn:microsoft.com/office/officeart/2005/8/layout/hierarchy1"/>
-    <dgm:cxn modelId="{53C5B31D-ED21-4BD1-A962-BFFF6C2D47A0}" type="presParOf" srcId="{8AB73D15-007F-4F45-85D7-841E3319895E}" destId="{0D7A648D-89A4-4FBE-9911-6DB7AD854215}" srcOrd="1" destOrd="0" presId="urn:microsoft.com/office/officeart/2005/8/layout/hierarchy1"/>
-    <dgm:cxn modelId="{04D687A0-0A3A-4CF7-852C-091141363F76}" type="presParOf" srcId="{0D7A648D-89A4-4FBE-9911-6DB7AD854215}" destId="{4333EB95-4CD0-4488-B35D-9047928D24AB}" srcOrd="0" destOrd="0" presId="urn:microsoft.com/office/officeart/2005/8/layout/hierarchy1"/>
-    <dgm:cxn modelId="{653F6902-DC50-4BD7-B4BF-80704CFB8D49}" type="presParOf" srcId="{4333EB95-4CD0-4488-B35D-9047928D24AB}" destId="{4CE028F8-A63B-45AA-886D-7C4325390AEA}" srcOrd="0" destOrd="0" presId="urn:microsoft.com/office/officeart/2005/8/layout/hierarchy1"/>
-    <dgm:cxn modelId="{62EC51B3-AB71-47B8-9984-0A996E110337}" type="presParOf" srcId="{4333EB95-4CD0-4488-B35D-9047928D24AB}" destId="{5E204233-41D4-45C7-BAC4-DEE75D604568}" srcOrd="1" destOrd="0" presId="urn:microsoft.com/office/officeart/2005/8/layout/hierarchy1"/>
-    <dgm:cxn modelId="{318F0BEE-2EF9-4EAF-9195-87A84DFD331F}" type="presParOf" srcId="{0D7A648D-89A4-4FBE-9911-6DB7AD854215}" destId="{13DC9582-8935-4C97-9B9F-48149BF6B13D}" srcOrd="1" destOrd="0" presId="urn:microsoft.com/office/officeart/2005/8/layout/hierarchy1"/>
-    <dgm:cxn modelId="{DD2C53C0-F1EF-44A7-8708-0E94BEFDE0A0}" type="presParOf" srcId="{8AB73D15-007F-4F45-85D7-841E3319895E}" destId="{4FA93D08-580B-480D-A637-E3B7E15B1F9E}" srcOrd="2" destOrd="0" presId="urn:microsoft.com/office/officeart/2005/8/layout/hierarchy1"/>
-    <dgm:cxn modelId="{4C93BF50-9833-4555-884E-B0D9F16C9D9D}" type="presParOf" srcId="{4FA93D08-580B-480D-A637-E3B7E15B1F9E}" destId="{521B4C96-91E1-49C6-B56C-DE6B8B2D5E4F}" srcOrd="0" destOrd="0" presId="urn:microsoft.com/office/officeart/2005/8/layout/hierarchy1"/>
-    <dgm:cxn modelId="{2B840FA7-189A-46E9-A619-7C6C988B7FD8}" type="presParOf" srcId="{521B4C96-91E1-49C6-B56C-DE6B8B2D5E4F}" destId="{4201FDE8-646B-4DD3-8D96-FECE9F5F0F36}" srcOrd="0" destOrd="0" presId="urn:microsoft.com/office/officeart/2005/8/layout/hierarchy1"/>
-    <dgm:cxn modelId="{F610CC82-753B-4E10-B788-CF6F78A2117E}" type="presParOf" srcId="{521B4C96-91E1-49C6-B56C-DE6B8B2D5E4F}" destId="{E717723C-65AF-4550-BB31-2B724931FE5F}" srcOrd="1" destOrd="0" presId="urn:microsoft.com/office/officeart/2005/8/layout/hierarchy1"/>
-    <dgm:cxn modelId="{04E203F9-5D3C-4228-B782-3842602E054B}" type="presParOf" srcId="{4FA93D08-580B-480D-A637-E3B7E15B1F9E}" destId="{AA7120EB-054F-45F3-ABB2-3AA08A2AE618}" srcOrd="1" destOrd="0" presId="urn:microsoft.com/office/officeart/2005/8/layout/hierarchy1"/>
-  </dgm:cxnLst>
-  <dgm:bg/>
-  <dgm:whole/>
-  <dgm:extLst>
-    <a:ext uri="http://schemas.microsoft.com/office/drawing/2008/diagram">
-      <dsp:dataModelExt xmlns:dsp="http://schemas.microsoft.com/office/drawing/2008/diagram" relId="rId6" minVer="http://schemas.openxmlformats.org/drawingml/2006/diagram"/>
-    </a:ext>
-  </dgm:extLst>
-</dgm:dataModel>
-</file>
-
 <file path=ppt/diagrams/drawing1.xml><?xml version="1.0" encoding="utf-8"?>
 <dsp:drawing xmlns:dgm="http://schemas.openxmlformats.org/drawingml/2006/diagram" xmlns:dsp="http://schemas.microsoft.com/office/drawing/2008/diagram" xmlns:a="http://schemas.openxmlformats.org/drawingml/2006/main">
   <dsp:spTree>
@@ -3017,478 +2023,6 @@
       <dsp:txXfrm>
         <a:off x="1435590" y="3107870"/>
         <a:ext cx="9147065" cy="1242935"/>
-      </dsp:txXfrm>
-    </dsp:sp>
-  </dsp:spTree>
-</dsp:drawing>
-</file>
-
-<file path=ppt/diagrams/drawing2.xml><?xml version="1.0" encoding="utf-8"?>
-<dsp:drawing xmlns:dgm="http://schemas.openxmlformats.org/drawingml/2006/diagram" xmlns:dsp="http://schemas.microsoft.com/office/drawing/2008/diagram" xmlns:a="http://schemas.openxmlformats.org/drawingml/2006/main">
-  <dsp:spTree>
-    <dsp:nvGrpSpPr>
-      <dsp:cNvPr id="0" name=""/>
-      <dsp:cNvGrpSpPr/>
-    </dsp:nvGrpSpPr>
-    <dsp:grpSpPr/>
-    <dsp:sp modelId="{FC157D70-A2FE-4FC6-9DE4-45F9C9AD44D8}">
-      <dsp:nvSpPr>
-        <dsp:cNvPr id="0" name=""/>
-        <dsp:cNvSpPr/>
-      </dsp:nvSpPr>
-      <dsp:spPr>
-        <a:xfrm>
-          <a:off x="0" y="1073584"/>
-          <a:ext cx="2976372" cy="1889996"/>
-        </a:xfrm>
-        <a:prstGeom prst="roundRect">
-          <a:avLst>
-            <a:gd name="adj" fmla="val 10000"/>
-          </a:avLst>
-        </a:prstGeom>
-        <a:gradFill rotWithShape="0">
-          <a:gsLst>
-            <a:gs pos="0">
-              <a:schemeClr val="accent3">
-                <a:hueOff val="0"/>
-                <a:satOff val="0"/>
-                <a:lumOff val="0"/>
-                <a:alphaOff val="0"/>
-                <a:satMod val="103000"/>
-                <a:lumMod val="102000"/>
-                <a:tint val="94000"/>
-              </a:schemeClr>
-            </a:gs>
-            <a:gs pos="50000">
-              <a:schemeClr val="accent3">
-                <a:hueOff val="0"/>
-                <a:satOff val="0"/>
-                <a:lumOff val="0"/>
-                <a:alphaOff val="0"/>
-                <a:satMod val="110000"/>
-                <a:lumMod val="100000"/>
-                <a:shade val="100000"/>
-              </a:schemeClr>
-            </a:gs>
-            <a:gs pos="100000">
-              <a:schemeClr val="accent3">
-                <a:hueOff val="0"/>
-                <a:satOff val="0"/>
-                <a:lumOff val="0"/>
-                <a:alphaOff val="0"/>
-                <a:lumMod val="99000"/>
-                <a:satMod val="120000"/>
-                <a:shade val="78000"/>
-              </a:schemeClr>
-            </a:gs>
-          </a:gsLst>
-          <a:lin ang="5400000" scaled="0"/>
-        </a:gradFill>
-        <a:ln>
-          <a:noFill/>
-        </a:ln>
-        <a:effectLst/>
-      </dsp:spPr>
-      <dsp:style>
-        <a:lnRef idx="0">
-          <a:scrgbClr r="0" g="0" b="0"/>
-        </a:lnRef>
-        <a:fillRef idx="3">
-          <a:scrgbClr r="0" g="0" b="0"/>
-        </a:fillRef>
-        <a:effectRef idx="2">
-          <a:scrgbClr r="0" g="0" b="0"/>
-        </a:effectRef>
-        <a:fontRef idx="minor">
-          <a:schemeClr val="lt1"/>
-        </a:fontRef>
-      </dsp:style>
-    </dsp:sp>
-    <dsp:sp modelId="{C3A4576F-0386-4754-B9CF-9E31B2A2932C}">
-      <dsp:nvSpPr>
-        <dsp:cNvPr id="0" name=""/>
-        <dsp:cNvSpPr/>
-      </dsp:nvSpPr>
-      <dsp:spPr>
-        <a:xfrm>
-          <a:off x="330708" y="1387757"/>
-          <a:ext cx="2976372" cy="1889996"/>
-        </a:xfrm>
-        <a:prstGeom prst="roundRect">
-          <a:avLst>
-            <a:gd name="adj" fmla="val 10000"/>
-          </a:avLst>
-        </a:prstGeom>
-        <a:solidFill>
-          <a:schemeClr val="lt1">
-            <a:alpha val="90000"/>
-            <a:hueOff val="0"/>
-            <a:satOff val="0"/>
-            <a:lumOff val="0"/>
-            <a:alphaOff val="0"/>
-          </a:schemeClr>
-        </a:solidFill>
-        <a:ln w="6350" cap="flat" cmpd="sng" algn="ctr">
-          <a:solidFill>
-            <a:schemeClr val="accent3">
-              <a:hueOff val="0"/>
-              <a:satOff val="0"/>
-              <a:lumOff val="0"/>
-              <a:alphaOff val="0"/>
-            </a:schemeClr>
-          </a:solidFill>
-          <a:prstDash val="solid"/>
-          <a:miter lim="800000"/>
-        </a:ln>
-        <a:effectLst/>
-      </dsp:spPr>
-      <dsp:style>
-        <a:lnRef idx="1">
-          <a:scrgbClr r="0" g="0" b="0"/>
-        </a:lnRef>
-        <a:fillRef idx="1">
-          <a:scrgbClr r="0" g="0" b="0"/>
-        </a:fillRef>
-        <a:effectRef idx="0">
-          <a:scrgbClr r="0" g="0" b="0"/>
-        </a:effectRef>
-        <a:fontRef idx="minor"/>
-      </dsp:style>
-      <dsp:txBody>
-        <a:bodyPr spcFirstLastPara="0" vert="horz" wrap="square" lIns="133350" tIns="133350" rIns="133350" bIns="133350" numCol="1" spcCol="1270" anchor="ctr" anchorCtr="0">
-          <a:noAutofit/>
-        </a:bodyPr>
-        <a:lstStyle/>
-        <a:p>
-          <a:pPr marL="0" lvl="0" indent="0" algn="ctr" defTabSz="1555750">
-            <a:lnSpc>
-              <a:spcPct val="90000"/>
-            </a:lnSpc>
-            <a:spcBef>
-              <a:spcPct val="0"/>
-            </a:spcBef>
-            <a:spcAft>
-              <a:spcPct val="35000"/>
-            </a:spcAft>
-            <a:buNone/>
-          </a:pPr>
-          <a:r>
-            <a:rPr lang="en-US" sz="3500" kern="1200" dirty="0" err="1"/>
-            <a:t>BERTopic</a:t>
-          </a:r>
-          <a:r>
-            <a:rPr lang="en-US" sz="3500" kern="1200" dirty="0"/>
-            <a:t> with min topic size 256</a:t>
-          </a:r>
-        </a:p>
-      </dsp:txBody>
-      <dsp:txXfrm>
-        <a:off x="386064" y="1443113"/>
-        <a:ext cx="2865660" cy="1779284"/>
-      </dsp:txXfrm>
-    </dsp:sp>
-    <dsp:sp modelId="{4CE028F8-A63B-45AA-886D-7C4325390AEA}">
-      <dsp:nvSpPr>
-        <dsp:cNvPr id="0" name=""/>
-        <dsp:cNvSpPr/>
-      </dsp:nvSpPr>
-      <dsp:spPr>
-        <a:xfrm>
-          <a:off x="3637788" y="1073584"/>
-          <a:ext cx="2976372" cy="1889996"/>
-        </a:xfrm>
-        <a:prstGeom prst="roundRect">
-          <a:avLst>
-            <a:gd name="adj" fmla="val 10000"/>
-          </a:avLst>
-        </a:prstGeom>
-        <a:gradFill rotWithShape="0">
-          <a:gsLst>
-            <a:gs pos="0">
-              <a:schemeClr val="accent3">
-                <a:hueOff val="0"/>
-                <a:satOff val="0"/>
-                <a:lumOff val="0"/>
-                <a:alphaOff val="0"/>
-                <a:satMod val="103000"/>
-                <a:lumMod val="102000"/>
-                <a:tint val="94000"/>
-              </a:schemeClr>
-            </a:gs>
-            <a:gs pos="50000">
-              <a:schemeClr val="accent3">
-                <a:hueOff val="0"/>
-                <a:satOff val="0"/>
-                <a:lumOff val="0"/>
-                <a:alphaOff val="0"/>
-                <a:satMod val="110000"/>
-                <a:lumMod val="100000"/>
-                <a:shade val="100000"/>
-              </a:schemeClr>
-            </a:gs>
-            <a:gs pos="100000">
-              <a:schemeClr val="accent3">
-                <a:hueOff val="0"/>
-                <a:satOff val="0"/>
-                <a:lumOff val="0"/>
-                <a:alphaOff val="0"/>
-                <a:lumMod val="99000"/>
-                <a:satMod val="120000"/>
-                <a:shade val="78000"/>
-              </a:schemeClr>
-            </a:gs>
-          </a:gsLst>
-          <a:lin ang="5400000" scaled="0"/>
-        </a:gradFill>
-        <a:ln>
-          <a:noFill/>
-        </a:ln>
-        <a:effectLst/>
-      </dsp:spPr>
-      <dsp:style>
-        <a:lnRef idx="0">
-          <a:scrgbClr r="0" g="0" b="0"/>
-        </a:lnRef>
-        <a:fillRef idx="3">
-          <a:scrgbClr r="0" g="0" b="0"/>
-        </a:fillRef>
-        <a:effectRef idx="2">
-          <a:scrgbClr r="0" g="0" b="0"/>
-        </a:effectRef>
-        <a:fontRef idx="minor">
-          <a:schemeClr val="lt1"/>
-        </a:fontRef>
-      </dsp:style>
-    </dsp:sp>
-    <dsp:sp modelId="{5E204233-41D4-45C7-BAC4-DEE75D604568}">
-      <dsp:nvSpPr>
-        <dsp:cNvPr id="0" name=""/>
-        <dsp:cNvSpPr/>
-      </dsp:nvSpPr>
-      <dsp:spPr>
-        <a:xfrm>
-          <a:off x="3968496" y="1387757"/>
-          <a:ext cx="2976372" cy="1889996"/>
-        </a:xfrm>
-        <a:prstGeom prst="roundRect">
-          <a:avLst>
-            <a:gd name="adj" fmla="val 10000"/>
-          </a:avLst>
-        </a:prstGeom>
-        <a:solidFill>
-          <a:schemeClr val="lt1">
-            <a:alpha val="90000"/>
-            <a:hueOff val="0"/>
-            <a:satOff val="0"/>
-            <a:lumOff val="0"/>
-            <a:alphaOff val="0"/>
-          </a:schemeClr>
-        </a:solidFill>
-        <a:ln w="6350" cap="flat" cmpd="sng" algn="ctr">
-          <a:solidFill>
-            <a:schemeClr val="accent3">
-              <a:hueOff val="0"/>
-              <a:satOff val="0"/>
-              <a:lumOff val="0"/>
-              <a:alphaOff val="0"/>
-            </a:schemeClr>
-          </a:solidFill>
-          <a:prstDash val="solid"/>
-          <a:miter lim="800000"/>
-        </a:ln>
-        <a:effectLst/>
-      </dsp:spPr>
-      <dsp:style>
-        <a:lnRef idx="1">
-          <a:scrgbClr r="0" g="0" b="0"/>
-        </a:lnRef>
-        <a:fillRef idx="1">
-          <a:scrgbClr r="0" g="0" b="0"/>
-        </a:fillRef>
-        <a:effectRef idx="0">
-          <a:scrgbClr r="0" g="0" b="0"/>
-        </a:effectRef>
-        <a:fontRef idx="minor"/>
-      </dsp:style>
-      <dsp:txBody>
-        <a:bodyPr spcFirstLastPara="0" vert="horz" wrap="square" lIns="133350" tIns="133350" rIns="133350" bIns="133350" numCol="1" spcCol="1270" anchor="ctr" anchorCtr="0">
-          <a:noAutofit/>
-        </a:bodyPr>
-        <a:lstStyle/>
-        <a:p>
-          <a:pPr marL="0" lvl="0" indent="0" algn="ctr" defTabSz="1555750">
-            <a:lnSpc>
-              <a:spcPct val="90000"/>
-            </a:lnSpc>
-            <a:spcBef>
-              <a:spcPct val="0"/>
-            </a:spcBef>
-            <a:spcAft>
-              <a:spcPct val="35000"/>
-            </a:spcAft>
-            <a:buNone/>
-          </a:pPr>
-          <a:r>
-            <a:rPr lang="en-US" sz="3500" kern="1200" dirty="0"/>
-            <a:t>Undirected Graph</a:t>
-          </a:r>
-        </a:p>
-      </dsp:txBody>
-      <dsp:txXfrm>
-        <a:off x="4023852" y="1443113"/>
-        <a:ext cx="2865660" cy="1779284"/>
-      </dsp:txXfrm>
-    </dsp:sp>
-    <dsp:sp modelId="{4201FDE8-646B-4DD3-8D96-FECE9F5F0F36}">
-      <dsp:nvSpPr>
-        <dsp:cNvPr id="0" name=""/>
-        <dsp:cNvSpPr/>
-      </dsp:nvSpPr>
-      <dsp:spPr>
-        <a:xfrm>
-          <a:off x="7275576" y="1073584"/>
-          <a:ext cx="2976372" cy="1889996"/>
-        </a:xfrm>
-        <a:prstGeom prst="roundRect">
-          <a:avLst>
-            <a:gd name="adj" fmla="val 10000"/>
-          </a:avLst>
-        </a:prstGeom>
-        <a:gradFill rotWithShape="0">
-          <a:gsLst>
-            <a:gs pos="0">
-              <a:schemeClr val="accent3">
-                <a:hueOff val="0"/>
-                <a:satOff val="0"/>
-                <a:lumOff val="0"/>
-                <a:alphaOff val="0"/>
-                <a:satMod val="103000"/>
-                <a:lumMod val="102000"/>
-                <a:tint val="94000"/>
-              </a:schemeClr>
-            </a:gs>
-            <a:gs pos="50000">
-              <a:schemeClr val="accent3">
-                <a:hueOff val="0"/>
-                <a:satOff val="0"/>
-                <a:lumOff val="0"/>
-                <a:alphaOff val="0"/>
-                <a:satMod val="110000"/>
-                <a:lumMod val="100000"/>
-                <a:shade val="100000"/>
-              </a:schemeClr>
-            </a:gs>
-            <a:gs pos="100000">
-              <a:schemeClr val="accent3">
-                <a:hueOff val="0"/>
-                <a:satOff val="0"/>
-                <a:lumOff val="0"/>
-                <a:alphaOff val="0"/>
-                <a:lumMod val="99000"/>
-                <a:satMod val="120000"/>
-                <a:shade val="78000"/>
-              </a:schemeClr>
-            </a:gs>
-          </a:gsLst>
-          <a:lin ang="5400000" scaled="0"/>
-        </a:gradFill>
-        <a:ln>
-          <a:noFill/>
-        </a:ln>
-        <a:effectLst/>
-      </dsp:spPr>
-      <dsp:style>
-        <a:lnRef idx="0">
-          <a:scrgbClr r="0" g="0" b="0"/>
-        </a:lnRef>
-        <a:fillRef idx="3">
-          <a:scrgbClr r="0" g="0" b="0"/>
-        </a:fillRef>
-        <a:effectRef idx="2">
-          <a:scrgbClr r="0" g="0" b="0"/>
-        </a:effectRef>
-        <a:fontRef idx="minor">
-          <a:schemeClr val="lt1"/>
-        </a:fontRef>
-      </dsp:style>
-    </dsp:sp>
-    <dsp:sp modelId="{E717723C-65AF-4550-BB31-2B724931FE5F}">
-      <dsp:nvSpPr>
-        <dsp:cNvPr id="0" name=""/>
-        <dsp:cNvSpPr/>
-      </dsp:nvSpPr>
-      <dsp:spPr>
-        <a:xfrm>
-          <a:off x="7606284" y="1387757"/>
-          <a:ext cx="2976372" cy="1889996"/>
-        </a:xfrm>
-        <a:prstGeom prst="roundRect">
-          <a:avLst>
-            <a:gd name="adj" fmla="val 10000"/>
-          </a:avLst>
-        </a:prstGeom>
-        <a:solidFill>
-          <a:schemeClr val="lt1">
-            <a:alpha val="90000"/>
-            <a:hueOff val="0"/>
-            <a:satOff val="0"/>
-            <a:lumOff val="0"/>
-            <a:alphaOff val="0"/>
-          </a:schemeClr>
-        </a:solidFill>
-        <a:ln w="6350" cap="flat" cmpd="sng" algn="ctr">
-          <a:solidFill>
-            <a:schemeClr val="accent3">
-              <a:hueOff val="0"/>
-              <a:satOff val="0"/>
-              <a:lumOff val="0"/>
-              <a:alphaOff val="0"/>
-            </a:schemeClr>
-          </a:solidFill>
-          <a:prstDash val="solid"/>
-          <a:miter lim="800000"/>
-        </a:ln>
-        <a:effectLst/>
-      </dsp:spPr>
-      <dsp:style>
-        <a:lnRef idx="1">
-          <a:scrgbClr r="0" g="0" b="0"/>
-        </a:lnRef>
-        <a:fillRef idx="1">
-          <a:scrgbClr r="0" g="0" b="0"/>
-        </a:fillRef>
-        <a:effectRef idx="0">
-          <a:scrgbClr r="0" g="0" b="0"/>
-        </a:effectRef>
-        <a:fontRef idx="minor"/>
-      </dsp:style>
-      <dsp:txBody>
-        <a:bodyPr spcFirstLastPara="0" vert="horz" wrap="square" lIns="133350" tIns="133350" rIns="133350" bIns="133350" numCol="1" spcCol="1270" anchor="ctr" anchorCtr="0">
-          <a:noAutofit/>
-        </a:bodyPr>
-        <a:lstStyle/>
-        <a:p>
-          <a:pPr marL="0" lvl="0" indent="0" algn="ctr" defTabSz="1555750">
-            <a:lnSpc>
-              <a:spcPct val="90000"/>
-            </a:lnSpc>
-            <a:spcBef>
-              <a:spcPct val="0"/>
-            </a:spcBef>
-            <a:spcAft>
-              <a:spcPct val="35000"/>
-            </a:spcAft>
-            <a:buNone/>
-          </a:pPr>
-          <a:r>
-            <a:rPr lang="en-US" sz="3500" kern="1200" dirty="0"/>
-            <a:t>Per-topic key authors selection</a:t>
-          </a:r>
-        </a:p>
-      </dsp:txBody>
-      <dsp:txXfrm>
-        <a:off x="7661640" y="1443113"/>
-        <a:ext cx="2865660" cy="1779284"/>
       </dsp:txXfrm>
     </dsp:sp>
   </dsp:spTree>
@@ -3786,569 +2320,6 @@
       </dgm1612:lstStyle>
     </a:ext>
   </dgm:extLst>
-</dgm:layoutDef>
-</file>
-
-<file path=ppt/diagrams/layout2.xml><?xml version="1.0" encoding="utf-8"?>
-<dgm:layoutDef xmlns:dgm="http://schemas.openxmlformats.org/drawingml/2006/diagram" xmlns:a="http://schemas.openxmlformats.org/drawingml/2006/main" uniqueId="urn:microsoft.com/office/officeart/2005/8/layout/hierarchy1">
-  <dgm:title val=""/>
-  <dgm:desc val=""/>
-  <dgm:catLst>
-    <dgm:cat type="hierarchy" pri="2000"/>
-  </dgm:catLst>
-  <dgm:sampData>
-    <dgm:dataModel>
-      <dgm:ptLst>
-        <dgm:pt modelId="0" type="doc"/>
-        <dgm:pt modelId="1">
-          <dgm:prSet phldr="1"/>
-        </dgm:pt>
-        <dgm:pt modelId="2">
-          <dgm:prSet phldr="1"/>
-        </dgm:pt>
-        <dgm:pt modelId="21">
-          <dgm:prSet phldr="1"/>
-        </dgm:pt>
-        <dgm:pt modelId="22">
-          <dgm:prSet phldr="1"/>
-        </dgm:pt>
-        <dgm:pt modelId="3">
-          <dgm:prSet phldr="1"/>
-        </dgm:pt>
-        <dgm:pt modelId="31">
-          <dgm:prSet phldr="1"/>
-        </dgm:pt>
-      </dgm:ptLst>
-      <dgm:cxnLst>
-        <dgm:cxn modelId="4" srcId="0" destId="1" srcOrd="0" destOrd="0"/>
-        <dgm:cxn modelId="5" srcId="1" destId="2" srcOrd="0" destOrd="0"/>
-        <dgm:cxn modelId="6" srcId="1" destId="3" srcOrd="1" destOrd="0"/>
-        <dgm:cxn modelId="23" srcId="2" destId="21" srcOrd="0" destOrd="0"/>
-        <dgm:cxn modelId="24" srcId="2" destId="22" srcOrd="1" destOrd="0"/>
-        <dgm:cxn modelId="33" srcId="3" destId="31" srcOrd="0" destOrd="0"/>
-      </dgm:cxnLst>
-      <dgm:bg/>
-      <dgm:whole/>
-    </dgm:dataModel>
-  </dgm:sampData>
-  <dgm:styleData>
-    <dgm:dataModel>
-      <dgm:ptLst>
-        <dgm:pt modelId="0" type="doc"/>
-        <dgm:pt modelId="1"/>
-        <dgm:pt modelId="11"/>
-        <dgm:pt modelId="12"/>
-      </dgm:ptLst>
-      <dgm:cxnLst>
-        <dgm:cxn modelId="2" srcId="0" destId="1" srcOrd="0" destOrd="0"/>
-        <dgm:cxn modelId="13" srcId="1" destId="11" srcOrd="0" destOrd="0"/>
-        <dgm:cxn modelId="14" srcId="1" destId="12" srcOrd="1" destOrd="0"/>
-      </dgm:cxnLst>
-      <dgm:bg/>
-      <dgm:whole/>
-    </dgm:dataModel>
-  </dgm:styleData>
-  <dgm:clrData>
-    <dgm:dataModel>
-      <dgm:ptLst>
-        <dgm:pt modelId="0" type="doc"/>
-        <dgm:pt modelId="1"/>
-        <dgm:pt modelId="2"/>
-        <dgm:pt modelId="21"/>
-        <dgm:pt modelId="211"/>
-        <dgm:pt modelId="3"/>
-        <dgm:pt modelId="31"/>
-        <dgm:pt modelId="311"/>
-      </dgm:ptLst>
-      <dgm:cxnLst>
-        <dgm:cxn modelId="4" srcId="0" destId="1" srcOrd="0" destOrd="0"/>
-        <dgm:cxn modelId="5" srcId="1" destId="2" srcOrd="0" destOrd="0"/>
-        <dgm:cxn modelId="6" srcId="1" destId="3" srcOrd="1" destOrd="0"/>
-        <dgm:cxn modelId="23" srcId="2" destId="21" srcOrd="0" destOrd="0"/>
-        <dgm:cxn modelId="24" srcId="21" destId="211" srcOrd="0" destOrd="0"/>
-        <dgm:cxn modelId="33" srcId="3" destId="31" srcOrd="0" destOrd="0"/>
-        <dgm:cxn modelId="34" srcId="31" destId="311" srcOrd="0" destOrd="0"/>
-      </dgm:cxnLst>
-      <dgm:bg/>
-      <dgm:whole/>
-    </dgm:dataModel>
-  </dgm:clrData>
-  <dgm:layoutNode name="hierChild1">
-    <dgm:varLst>
-      <dgm:chPref val="1"/>
-      <dgm:dir/>
-      <dgm:animOne val="branch"/>
-      <dgm:animLvl val="lvl"/>
-      <dgm:resizeHandles/>
-    </dgm:varLst>
-    <dgm:choose name="Name0">
-      <dgm:if name="Name1" func="var" arg="dir" op="equ" val="norm">
-        <dgm:alg type="hierChild">
-          <dgm:param type="linDir" val="fromL"/>
-        </dgm:alg>
-      </dgm:if>
-      <dgm:else name="Name2">
-        <dgm:alg type="hierChild">
-          <dgm:param type="linDir" val="fromR"/>
-        </dgm:alg>
-      </dgm:else>
-    </dgm:choose>
-    <dgm:shape xmlns:r="http://schemas.openxmlformats.org/officeDocument/2006/relationships" r:blip="">
-      <dgm:adjLst/>
-    </dgm:shape>
-    <dgm:presOf/>
-    <dgm:constrLst>
-      <dgm:constr type="primFontSz" for="des" ptType="node" op="equ" val="65"/>
-      <dgm:constr type="w" for="des" forName="composite" refType="w"/>
-      <dgm:constr type="h" for="des" forName="composite" refType="w" refFor="des" refForName="composite" fact="0.667"/>
-      <dgm:constr type="w" for="des" forName="composite2" refType="w" refFor="des" refForName="composite"/>
-      <dgm:constr type="h" for="des" forName="composite2" refType="h" refFor="des" refForName="composite"/>
-      <dgm:constr type="w" for="des" forName="composite3" refType="w" refFor="des" refForName="composite"/>
-      <dgm:constr type="h" for="des" forName="composite3" refType="h" refFor="des" refForName="composite"/>
-      <dgm:constr type="w" for="des" forName="composite4" refType="w" refFor="des" refForName="composite"/>
-      <dgm:constr type="h" for="des" forName="composite4" refType="h" refFor="des" refForName="composite"/>
-      <dgm:constr type="w" for="des" forName="composite5" refType="w" refFor="des" refForName="composite"/>
-      <dgm:constr type="h" for="des" forName="composite5" refType="h" refFor="des" refForName="composite"/>
-      <dgm:constr type="sibSp" refType="w" refFor="des" refForName="composite" fact="0.1"/>
-      <dgm:constr type="sibSp" for="des" forName="hierChild2" refType="sibSp"/>
-      <dgm:constr type="sibSp" for="des" forName="hierChild3" refType="sibSp"/>
-      <dgm:constr type="sibSp" for="des" forName="hierChild4" refType="sibSp"/>
-      <dgm:constr type="sibSp" for="des" forName="hierChild5" refType="sibSp"/>
-      <dgm:constr type="sibSp" for="des" forName="hierChild6" refType="sibSp"/>
-      <dgm:constr type="sp" for="des" forName="hierRoot1" refType="h" refFor="des" refForName="composite" fact="0.25"/>
-      <dgm:constr type="sp" for="des" forName="hierRoot2" refType="sp" refFor="des" refForName="hierRoot1"/>
-      <dgm:constr type="sp" for="des" forName="hierRoot3" refType="sp" refFor="des" refForName="hierRoot1"/>
-      <dgm:constr type="sp" for="des" forName="hierRoot4" refType="sp" refFor="des" refForName="hierRoot1"/>
-      <dgm:constr type="sp" for="des" forName="hierRoot5" refType="sp" refFor="des" refForName="hierRoot1"/>
-    </dgm:constrLst>
-    <dgm:ruleLst/>
-    <dgm:forEach name="Name3" axis="ch">
-      <dgm:forEach name="Name4" axis="self" ptType="node">
-        <dgm:layoutNode name="hierRoot1">
-          <dgm:alg type="hierRoot"/>
-          <dgm:shape xmlns:r="http://schemas.openxmlformats.org/officeDocument/2006/relationships" r:blip="">
-            <dgm:adjLst/>
-          </dgm:shape>
-          <dgm:presOf/>
-          <dgm:constrLst>
-            <dgm:constr type="bendDist" for="des" ptType="parTrans" refType="sp" fact="0.5"/>
-          </dgm:constrLst>
-          <dgm:ruleLst/>
-          <dgm:layoutNode name="composite">
-            <dgm:alg type="composite"/>
-            <dgm:shape xmlns:r="http://schemas.openxmlformats.org/officeDocument/2006/relationships" r:blip="">
-              <dgm:adjLst/>
-            </dgm:shape>
-            <dgm:presOf/>
-            <dgm:constrLst>
-              <dgm:constr type="w" for="ch" forName="background" refType="w" fact="0.9"/>
-              <dgm:constr type="h" for="ch" forName="background" refType="w" refFor="ch" refForName="background" fact="0.635"/>
-              <dgm:constr type="t" for="ch" forName="background"/>
-              <dgm:constr type="l" for="ch" forName="background"/>
-              <dgm:constr type="w" for="ch" forName="text" refType="w" fact="0.9"/>
-              <dgm:constr type="h" for="ch" forName="text" refType="w" refFor="ch" refForName="text" fact="0.635"/>
-              <dgm:constr type="t" for="ch" forName="text" refType="w" fact="0.095"/>
-              <dgm:constr type="l" for="ch" forName="text" refType="w" fact="0.1"/>
-            </dgm:constrLst>
-            <dgm:ruleLst/>
-            <dgm:layoutNode name="background" styleLbl="node0" moveWith="text">
-              <dgm:alg type="sp"/>
-              <dgm:shape xmlns:r="http://schemas.openxmlformats.org/officeDocument/2006/relationships" type="roundRect" r:blip="">
-                <dgm:adjLst>
-                  <dgm:adj idx="1" val="0.1"/>
-                </dgm:adjLst>
-              </dgm:shape>
-              <dgm:presOf/>
-              <dgm:constrLst/>
-              <dgm:ruleLst/>
-            </dgm:layoutNode>
-            <dgm:layoutNode name="text" styleLbl="fgAcc0">
-              <dgm:varLst>
-                <dgm:chPref val="3"/>
-              </dgm:varLst>
-              <dgm:alg type="tx"/>
-              <dgm:shape xmlns:r="http://schemas.openxmlformats.org/officeDocument/2006/relationships" type="roundRect" r:blip="">
-                <dgm:adjLst>
-                  <dgm:adj idx="1" val="0.1"/>
-                </dgm:adjLst>
-              </dgm:shape>
-              <dgm:presOf axis="self"/>
-              <dgm:constrLst>
-                <dgm:constr type="tMarg" refType="primFontSz" fact="0.3"/>
-                <dgm:constr type="bMarg" refType="primFontSz" fact="0.3"/>
-                <dgm:constr type="lMarg" refType="primFontSz" fact="0.3"/>
-                <dgm:constr type="rMarg" refType="primFontSz" fact="0.3"/>
-              </dgm:constrLst>
-              <dgm:ruleLst>
-                <dgm:rule type="primFontSz" val="5" fact="NaN" max="NaN"/>
-              </dgm:ruleLst>
-            </dgm:layoutNode>
-          </dgm:layoutNode>
-          <dgm:layoutNode name="hierChild2">
-            <dgm:choose name="Name5">
-              <dgm:if name="Name6" func="var" arg="dir" op="equ" val="norm">
-                <dgm:alg type="hierChild">
-                  <dgm:param type="linDir" val="fromL"/>
-                </dgm:alg>
-              </dgm:if>
-              <dgm:else name="Name7">
-                <dgm:alg type="hierChild">
-                  <dgm:param type="linDir" val="fromR"/>
-                </dgm:alg>
-              </dgm:else>
-            </dgm:choose>
-            <dgm:shape xmlns:r="http://schemas.openxmlformats.org/officeDocument/2006/relationships" r:blip="">
-              <dgm:adjLst/>
-            </dgm:shape>
-            <dgm:presOf/>
-            <dgm:constrLst/>
-            <dgm:ruleLst/>
-            <dgm:forEach name="Name8" axis="ch">
-              <dgm:forEach name="Name9" axis="self" ptType="parTrans" cnt="1">
-                <dgm:layoutNode name="Name10">
-                  <dgm:alg type="conn">
-                    <dgm:param type="dim" val="1D"/>
-                    <dgm:param type="endSty" val="noArr"/>
-                    <dgm:param type="connRout" val="bend"/>
-                    <dgm:param type="bendPt" val="end"/>
-                    <dgm:param type="begPts" val="bCtr"/>
-                    <dgm:param type="endPts" val="tCtr"/>
-                    <dgm:param type="srcNode" val="background"/>
-                    <dgm:param type="dstNode" val="background2"/>
-                  </dgm:alg>
-                  <dgm:shape xmlns:r="http://schemas.openxmlformats.org/officeDocument/2006/relationships" type="conn" r:blip="" zOrderOff="-999">
-                    <dgm:adjLst/>
-                  </dgm:shape>
-                  <dgm:presOf axis="self"/>
-                  <dgm:constrLst>
-                    <dgm:constr type="begPad"/>
-                    <dgm:constr type="endPad"/>
-                  </dgm:constrLst>
-                  <dgm:ruleLst/>
-                </dgm:layoutNode>
-              </dgm:forEach>
-              <dgm:forEach name="Name11" axis="self" ptType="node">
-                <dgm:layoutNode name="hierRoot2">
-                  <dgm:alg type="hierRoot"/>
-                  <dgm:shape xmlns:r="http://schemas.openxmlformats.org/officeDocument/2006/relationships" r:blip="">
-                    <dgm:adjLst/>
-                  </dgm:shape>
-                  <dgm:presOf/>
-                  <dgm:constrLst>
-                    <dgm:constr type="bendDist" for="des" ptType="parTrans" refType="sp" fact="0.5"/>
-                  </dgm:constrLst>
-                  <dgm:ruleLst/>
-                  <dgm:layoutNode name="composite2">
-                    <dgm:alg type="composite"/>
-                    <dgm:shape xmlns:r="http://schemas.openxmlformats.org/officeDocument/2006/relationships" r:blip="">
-                      <dgm:adjLst/>
-                    </dgm:shape>
-                    <dgm:presOf/>
-                    <dgm:constrLst>
-                      <dgm:constr type="w" for="ch" forName="background2" refType="w" fact="0.9"/>
-                      <dgm:constr type="h" for="ch" forName="background2" refType="w" refFor="ch" refForName="background2" fact="0.635"/>
-                      <dgm:constr type="t" for="ch" forName="background2"/>
-                      <dgm:constr type="l" for="ch" forName="background2"/>
-                      <dgm:constr type="w" for="ch" forName="text2" refType="w" fact="0.9"/>
-                      <dgm:constr type="h" for="ch" forName="text2" refType="w" refFor="ch" refForName="text2" fact="0.635"/>
-                      <dgm:constr type="t" for="ch" forName="text2" refType="w" fact="0.095"/>
-                      <dgm:constr type="l" for="ch" forName="text2" refType="w" fact="0.1"/>
-                    </dgm:constrLst>
-                    <dgm:ruleLst/>
-                    <dgm:layoutNode name="background2" moveWith="text2">
-                      <dgm:alg type="sp"/>
-                      <dgm:shape xmlns:r="http://schemas.openxmlformats.org/officeDocument/2006/relationships" type="roundRect" r:blip="">
-                        <dgm:adjLst>
-                          <dgm:adj idx="1" val="0.1"/>
-                        </dgm:adjLst>
-                      </dgm:shape>
-                      <dgm:presOf/>
-                      <dgm:constrLst/>
-                      <dgm:ruleLst/>
-                    </dgm:layoutNode>
-                    <dgm:layoutNode name="text2" styleLbl="fgAcc2">
-                      <dgm:varLst>
-                        <dgm:chPref val="3"/>
-                      </dgm:varLst>
-                      <dgm:alg type="tx"/>
-                      <dgm:shape xmlns:r="http://schemas.openxmlformats.org/officeDocument/2006/relationships" type="roundRect" r:blip="">
-                        <dgm:adjLst>
-                          <dgm:adj idx="1" val="0.1"/>
-                        </dgm:adjLst>
-                      </dgm:shape>
-                      <dgm:presOf axis="self"/>
-                      <dgm:constrLst>
-                        <dgm:constr type="tMarg" refType="primFontSz" fact="0.3"/>
-                        <dgm:constr type="bMarg" refType="primFontSz" fact="0.3"/>
-                        <dgm:constr type="lMarg" refType="primFontSz" fact="0.3"/>
-                        <dgm:constr type="rMarg" refType="primFontSz" fact="0.3"/>
-                      </dgm:constrLst>
-                      <dgm:ruleLst>
-                        <dgm:rule type="primFontSz" val="5" fact="NaN" max="NaN"/>
-                      </dgm:ruleLst>
-                    </dgm:layoutNode>
-                  </dgm:layoutNode>
-                  <dgm:layoutNode name="hierChild3">
-                    <dgm:choose name="Name12">
-                      <dgm:if name="Name13" func="var" arg="dir" op="equ" val="norm">
-                        <dgm:alg type="hierChild">
-                          <dgm:param type="linDir" val="fromL"/>
-                        </dgm:alg>
-                      </dgm:if>
-                      <dgm:else name="Name14">
-                        <dgm:alg type="hierChild">
-                          <dgm:param type="linDir" val="fromR"/>
-                        </dgm:alg>
-                      </dgm:else>
-                    </dgm:choose>
-                    <dgm:shape xmlns:r="http://schemas.openxmlformats.org/officeDocument/2006/relationships" r:blip="">
-                      <dgm:adjLst/>
-                    </dgm:shape>
-                    <dgm:presOf/>
-                    <dgm:constrLst/>
-                    <dgm:ruleLst/>
-                    <dgm:forEach name="Name15" axis="ch">
-                      <dgm:forEach name="Name16" axis="self" ptType="parTrans" cnt="1">
-                        <dgm:layoutNode name="Name17">
-                          <dgm:alg type="conn">
-                            <dgm:param type="dim" val="1D"/>
-                            <dgm:param type="endSty" val="noArr"/>
-                            <dgm:param type="connRout" val="bend"/>
-                            <dgm:param type="bendPt" val="end"/>
-                            <dgm:param type="begPts" val="bCtr"/>
-                            <dgm:param type="endPts" val="tCtr"/>
-                            <dgm:param type="srcNode" val="background2"/>
-                            <dgm:param type="dstNode" val="background3"/>
-                          </dgm:alg>
-                          <dgm:shape xmlns:r="http://schemas.openxmlformats.org/officeDocument/2006/relationships" type="conn" r:blip="" zOrderOff="-999">
-                            <dgm:adjLst/>
-                          </dgm:shape>
-                          <dgm:presOf axis="self"/>
-                          <dgm:constrLst>
-                            <dgm:constr type="begPad"/>
-                            <dgm:constr type="endPad"/>
-                          </dgm:constrLst>
-                          <dgm:ruleLst/>
-                        </dgm:layoutNode>
-                      </dgm:forEach>
-                      <dgm:forEach name="Name18" axis="self" ptType="node">
-                        <dgm:layoutNode name="hierRoot3">
-                          <dgm:alg type="hierRoot"/>
-                          <dgm:shape xmlns:r="http://schemas.openxmlformats.org/officeDocument/2006/relationships" r:blip="">
-                            <dgm:adjLst/>
-                          </dgm:shape>
-                          <dgm:presOf/>
-                          <dgm:constrLst>
-                            <dgm:constr type="bendDist" for="des" ptType="parTrans" refType="sp" fact="0.5"/>
-                          </dgm:constrLst>
-                          <dgm:ruleLst/>
-                          <dgm:layoutNode name="composite3">
-                            <dgm:alg type="composite"/>
-                            <dgm:shape xmlns:r="http://schemas.openxmlformats.org/officeDocument/2006/relationships" r:blip="">
-                              <dgm:adjLst/>
-                            </dgm:shape>
-                            <dgm:presOf/>
-                            <dgm:constrLst>
-                              <dgm:constr type="w" for="ch" forName="background3" refType="w" fact="0.9"/>
-                              <dgm:constr type="h" for="ch" forName="background3" refType="w" refFor="ch" refForName="background3" fact="0.635"/>
-                              <dgm:constr type="t" for="ch" forName="background3"/>
-                              <dgm:constr type="l" for="ch" forName="background3"/>
-                              <dgm:constr type="w" for="ch" forName="text3" refType="w" fact="0.9"/>
-                              <dgm:constr type="h" for="ch" forName="text3" refType="w" refFor="ch" refForName="text3" fact="0.635"/>
-                              <dgm:constr type="t" for="ch" forName="text3" refType="w" fact="0.095"/>
-                              <dgm:constr type="l" for="ch" forName="text3" refType="w" fact="0.1"/>
-                            </dgm:constrLst>
-                            <dgm:ruleLst/>
-                            <dgm:layoutNode name="background3" moveWith="text3">
-                              <dgm:alg type="sp"/>
-                              <dgm:shape xmlns:r="http://schemas.openxmlformats.org/officeDocument/2006/relationships" type="roundRect" r:blip="">
-                                <dgm:adjLst>
-                                  <dgm:adj idx="1" val="0.1"/>
-                                </dgm:adjLst>
-                              </dgm:shape>
-                              <dgm:presOf/>
-                              <dgm:constrLst/>
-                              <dgm:ruleLst/>
-                            </dgm:layoutNode>
-                            <dgm:layoutNode name="text3" styleLbl="fgAcc3">
-                              <dgm:varLst>
-                                <dgm:chPref val="3"/>
-                              </dgm:varLst>
-                              <dgm:alg type="tx"/>
-                              <dgm:shape xmlns:r="http://schemas.openxmlformats.org/officeDocument/2006/relationships" type="roundRect" r:blip="">
-                                <dgm:adjLst>
-                                  <dgm:adj idx="1" val="0.1"/>
-                                </dgm:adjLst>
-                              </dgm:shape>
-                              <dgm:presOf axis="self"/>
-                              <dgm:constrLst>
-                                <dgm:constr type="tMarg" refType="primFontSz" fact="0.3"/>
-                                <dgm:constr type="bMarg" refType="primFontSz" fact="0.3"/>
-                                <dgm:constr type="lMarg" refType="primFontSz" fact="0.3"/>
-                                <dgm:constr type="rMarg" refType="primFontSz" fact="0.3"/>
-                              </dgm:constrLst>
-                              <dgm:ruleLst>
-                                <dgm:rule type="primFontSz" val="5" fact="NaN" max="NaN"/>
-                              </dgm:ruleLst>
-                            </dgm:layoutNode>
-                          </dgm:layoutNode>
-                          <dgm:layoutNode name="hierChild4">
-                            <dgm:choose name="Name19">
-                              <dgm:if name="Name20" func="var" arg="dir" op="equ" val="norm">
-                                <dgm:alg type="hierChild">
-                                  <dgm:param type="linDir" val="fromL"/>
-                                </dgm:alg>
-                              </dgm:if>
-                              <dgm:else name="Name21">
-                                <dgm:alg type="hierChild">
-                                  <dgm:param type="linDir" val="fromR"/>
-                                </dgm:alg>
-                              </dgm:else>
-                            </dgm:choose>
-                            <dgm:shape xmlns:r="http://schemas.openxmlformats.org/officeDocument/2006/relationships" r:blip="">
-                              <dgm:adjLst/>
-                            </dgm:shape>
-                            <dgm:presOf/>
-                            <dgm:constrLst/>
-                            <dgm:ruleLst/>
-                            <dgm:forEach name="repeat" axis="ch">
-                              <dgm:forEach name="Name22" axis="self" ptType="parTrans" cnt="1">
-                                <dgm:layoutNode name="Name23">
-                                  <dgm:choose name="Name24">
-                                    <dgm:if name="Name25" axis="self" func="depth" op="lte" val="4">
-                                      <dgm:alg type="conn">
-                                        <dgm:param type="dim" val="1D"/>
-                                        <dgm:param type="endSty" val="noArr"/>
-                                        <dgm:param type="connRout" val="bend"/>
-                                        <dgm:param type="bendPt" val="end"/>
-                                        <dgm:param type="begPts" val="bCtr"/>
-                                        <dgm:param type="endPts" val="tCtr"/>
-                                        <dgm:param type="srcNode" val="background3"/>
-                                        <dgm:param type="dstNode" val="background4"/>
-                                      </dgm:alg>
-                                    </dgm:if>
-                                    <dgm:else name="Name26">
-                                      <dgm:alg type="conn">
-                                        <dgm:param type="dim" val="1D"/>
-                                        <dgm:param type="endSty" val="noArr"/>
-                                        <dgm:param type="connRout" val="bend"/>
-                                        <dgm:param type="bendPt" val="end"/>
-                                        <dgm:param type="begPts" val="bCtr"/>
-                                        <dgm:param type="endPts" val="tCtr"/>
-                                        <dgm:param type="srcNode" val="background4"/>
-                                        <dgm:param type="dstNode" val="background4"/>
-                                      </dgm:alg>
-                                    </dgm:else>
-                                  </dgm:choose>
-                                  <dgm:shape xmlns:r="http://schemas.openxmlformats.org/officeDocument/2006/relationships" type="conn" r:blip="" zOrderOff="-999">
-                                    <dgm:adjLst/>
-                                  </dgm:shape>
-                                  <dgm:presOf axis="self"/>
-                                  <dgm:constrLst>
-                                    <dgm:constr type="begPad"/>
-                                    <dgm:constr type="endPad"/>
-                                  </dgm:constrLst>
-                                  <dgm:ruleLst/>
-                                </dgm:layoutNode>
-                              </dgm:forEach>
-                              <dgm:forEach name="Name27" axis="self" ptType="node">
-                                <dgm:layoutNode name="hierRoot4">
-                                  <dgm:alg type="hierRoot"/>
-                                  <dgm:shape xmlns:r="http://schemas.openxmlformats.org/officeDocument/2006/relationships" r:blip="">
-                                    <dgm:adjLst/>
-                                  </dgm:shape>
-                                  <dgm:presOf/>
-                                  <dgm:constrLst>
-                                    <dgm:constr type="bendDist" for="des" ptType="parTrans" refType="sp" fact="0.5"/>
-                                  </dgm:constrLst>
-                                  <dgm:ruleLst/>
-                                  <dgm:layoutNode name="composite4">
-                                    <dgm:alg type="composite"/>
-                                    <dgm:shape xmlns:r="http://schemas.openxmlformats.org/officeDocument/2006/relationships" r:blip="">
-                                      <dgm:adjLst/>
-                                    </dgm:shape>
-                                    <dgm:presOf/>
-                                    <dgm:constrLst>
-                                      <dgm:constr type="w" for="ch" forName="background4" refType="w" fact="0.9"/>
-                                      <dgm:constr type="h" for="ch" forName="background4" refType="w" refFor="ch" refForName="background4" fact="0.635"/>
-                                      <dgm:constr type="t" for="ch" forName="background4"/>
-                                      <dgm:constr type="l" for="ch" forName="background4"/>
-                                      <dgm:constr type="w" for="ch" forName="text4" refType="w" fact="0.9"/>
-                                      <dgm:constr type="h" for="ch" forName="text4" refType="w" refFor="ch" refForName="text4" fact="0.635"/>
-                                      <dgm:constr type="t" for="ch" forName="text4" refType="w" fact="0.095"/>
-                                      <dgm:constr type="l" for="ch" forName="text4" refType="w" fact="0.1"/>
-                                    </dgm:constrLst>
-                                    <dgm:ruleLst/>
-                                    <dgm:layoutNode name="background4" moveWith="text4">
-                                      <dgm:alg type="sp"/>
-                                      <dgm:shape xmlns:r="http://schemas.openxmlformats.org/officeDocument/2006/relationships" type="roundRect" r:blip="">
-                                        <dgm:adjLst>
-                                          <dgm:adj idx="1" val="0.1"/>
-                                        </dgm:adjLst>
-                                      </dgm:shape>
-                                      <dgm:presOf/>
-                                      <dgm:constrLst/>
-                                      <dgm:ruleLst/>
-                                    </dgm:layoutNode>
-                                    <dgm:layoutNode name="text4" styleLbl="fgAcc4">
-                                      <dgm:varLst>
-                                        <dgm:chPref val="3"/>
-                                      </dgm:varLst>
-                                      <dgm:alg type="tx"/>
-                                      <dgm:shape xmlns:r="http://schemas.openxmlformats.org/officeDocument/2006/relationships" type="roundRect" r:blip="">
-                                        <dgm:adjLst>
-                                          <dgm:adj idx="1" val="0.1"/>
-                                        </dgm:adjLst>
-                                      </dgm:shape>
-                                      <dgm:presOf axis="self"/>
-                                      <dgm:constrLst>
-                                        <dgm:constr type="tMarg" refType="primFontSz" fact="0.3"/>
-                                        <dgm:constr type="bMarg" refType="primFontSz" fact="0.3"/>
-                                        <dgm:constr type="lMarg" refType="primFontSz" fact="0.3"/>
-                                        <dgm:constr type="rMarg" refType="primFontSz" fact="0.3"/>
-                                      </dgm:constrLst>
-                                      <dgm:ruleLst>
-                                        <dgm:rule type="primFontSz" val="5" fact="NaN" max="NaN"/>
-                                      </dgm:ruleLst>
-                                    </dgm:layoutNode>
-                                  </dgm:layoutNode>
-                                  <dgm:layoutNode name="hierChild5">
-                                    <dgm:choose name="Name28">
-                                      <dgm:if name="Name29" func="var" arg="dir" op="equ" val="norm">
-                                        <dgm:alg type="hierChild">
-                                          <dgm:param type="linDir" val="fromL"/>
-                                        </dgm:alg>
-                                      </dgm:if>
-                                      <dgm:else name="Name30">
-                                        <dgm:alg type="hierChild">
-                                          <dgm:param type="linDir" val="fromR"/>
-                                        </dgm:alg>
-                                      </dgm:else>
-                                    </dgm:choose>
-                                    <dgm:shape xmlns:r="http://schemas.openxmlformats.org/officeDocument/2006/relationships" r:blip="">
-                                      <dgm:adjLst/>
-                                    </dgm:shape>
-                                    <dgm:presOf/>
-                                    <dgm:constrLst/>
-                                    <dgm:ruleLst/>
-                                    <dgm:forEach name="Name31" ref="repeat"/>
-                                  </dgm:layoutNode>
-                                </dgm:layoutNode>
-                              </dgm:forEach>
-                            </dgm:forEach>
-                          </dgm:layoutNode>
-                        </dgm:layoutNode>
-                      </dgm:forEach>
-                    </dgm:forEach>
-                  </dgm:layoutNode>
-                </dgm:layoutNode>
-              </dgm:forEach>
-            </dgm:forEach>
-          </dgm:layoutNode>
-        </dgm:layoutNode>
-      </dgm:forEach>
-    </dgm:forEach>
-  </dgm:layoutNode>
 </dgm:layoutDef>
 </file>
 
@@ -5386,1040 +3357,6 @@
 </dgm:styleDef>
 </file>
 
-<file path=ppt/diagrams/quickStyle2.xml><?xml version="1.0" encoding="utf-8"?>
-<dgm:styleDef xmlns:dgm="http://schemas.openxmlformats.org/drawingml/2006/diagram" xmlns:a="http://schemas.openxmlformats.org/drawingml/2006/main" uniqueId="urn:microsoft.com/office/officeart/2005/8/quickstyle/simple4">
-  <dgm:title val=""/>
-  <dgm:desc val=""/>
-  <dgm:catLst>
-    <dgm:cat type="simple" pri="10400"/>
-  </dgm:catLst>
-  <dgm:scene3d>
-    <a:camera prst="orthographicFront"/>
-    <a:lightRig rig="threePt" dir="t"/>
-  </dgm:scene3d>
-  <dgm:styleLbl name="node0">
-    <dgm:scene3d>
-      <a:camera prst="orthographicFront"/>
-      <a:lightRig rig="threePt" dir="t"/>
-    </dgm:scene3d>
-    <dgm:sp3d/>
-    <dgm:txPr/>
-    <dgm:style>
-      <a:lnRef idx="0">
-        <a:scrgbClr r="0" g="0" b="0"/>
-      </a:lnRef>
-      <a:fillRef idx="3">
-        <a:scrgbClr r="0" g="0" b="0"/>
-      </a:fillRef>
-      <a:effectRef idx="2">
-        <a:scrgbClr r="0" g="0" b="0"/>
-      </a:effectRef>
-      <a:fontRef idx="minor">
-        <a:schemeClr val="lt1"/>
-      </a:fontRef>
-    </dgm:style>
-  </dgm:styleLbl>
-  <dgm:styleLbl name="lnNode1">
-    <dgm:scene3d>
-      <a:camera prst="orthographicFront"/>
-      <a:lightRig rig="threePt" dir="t"/>
-    </dgm:scene3d>
-    <dgm:sp3d/>
-    <dgm:txPr/>
-    <dgm:style>
-      <a:lnRef idx="1">
-        <a:scrgbClr r="0" g="0" b="0"/>
-      </a:lnRef>
-      <a:fillRef idx="3">
-        <a:scrgbClr r="0" g="0" b="0"/>
-      </a:fillRef>
-      <a:effectRef idx="2">
-        <a:scrgbClr r="0" g="0" b="0"/>
-      </a:effectRef>
-      <a:fontRef idx="minor">
-        <a:schemeClr val="lt1"/>
-      </a:fontRef>
-    </dgm:style>
-  </dgm:styleLbl>
-  <dgm:styleLbl name="vennNode1">
-    <dgm:scene3d>
-      <a:camera prst="orthographicFront"/>
-      <a:lightRig rig="threePt" dir="t"/>
-    </dgm:scene3d>
-    <dgm:sp3d/>
-    <dgm:txPr/>
-    <dgm:style>
-      <a:lnRef idx="0">
-        <a:scrgbClr r="0" g="0" b="0"/>
-      </a:lnRef>
-      <a:fillRef idx="3">
-        <a:scrgbClr r="0" g="0" b="0"/>
-      </a:fillRef>
-      <a:effectRef idx="0">
-        <a:scrgbClr r="0" g="0" b="0"/>
-      </a:effectRef>
-      <a:fontRef idx="minor">
-        <a:schemeClr val="tx1"/>
-      </a:fontRef>
-    </dgm:style>
-  </dgm:styleLbl>
-  <dgm:styleLbl name="alignNode1">
-    <dgm:scene3d>
-      <a:camera prst="orthographicFront"/>
-      <a:lightRig rig="threePt" dir="t"/>
-    </dgm:scene3d>
-    <dgm:sp3d/>
-    <dgm:txPr/>
-    <dgm:style>
-      <a:lnRef idx="1">
-        <a:scrgbClr r="0" g="0" b="0"/>
-      </a:lnRef>
-      <a:fillRef idx="3">
-        <a:scrgbClr r="0" g="0" b="0"/>
-      </a:fillRef>
-      <a:effectRef idx="2">
-        <a:scrgbClr r="0" g="0" b="0"/>
-      </a:effectRef>
-      <a:fontRef idx="minor">
-        <a:schemeClr val="lt1"/>
-      </a:fontRef>
-    </dgm:style>
-  </dgm:styleLbl>
-  <dgm:styleLbl name="node1">
-    <dgm:scene3d>
-      <a:camera prst="orthographicFront"/>
-      <a:lightRig rig="threePt" dir="t"/>
-    </dgm:scene3d>
-    <dgm:sp3d/>
-    <dgm:txPr/>
-    <dgm:style>
-      <a:lnRef idx="0">
-        <a:scrgbClr r="0" g="0" b="0"/>
-      </a:lnRef>
-      <a:fillRef idx="3">
-        <a:scrgbClr r="0" g="0" b="0"/>
-      </a:fillRef>
-      <a:effectRef idx="2">
-        <a:scrgbClr r="0" g="0" b="0"/>
-      </a:effectRef>
-      <a:fontRef idx="minor">
-        <a:schemeClr val="lt1"/>
-      </a:fontRef>
-    </dgm:style>
-  </dgm:styleLbl>
-  <dgm:styleLbl name="node2">
-    <dgm:scene3d>
-      <a:camera prst="orthographicFront"/>
-      <a:lightRig rig="threePt" dir="t"/>
-    </dgm:scene3d>
-    <dgm:sp3d/>
-    <dgm:txPr/>
-    <dgm:style>
-      <a:lnRef idx="0">
-        <a:scrgbClr r="0" g="0" b="0"/>
-      </a:lnRef>
-      <a:fillRef idx="3">
-        <a:scrgbClr r="0" g="0" b="0"/>
-      </a:fillRef>
-      <a:effectRef idx="2">
-        <a:scrgbClr r="0" g="0" b="0"/>
-      </a:effectRef>
-      <a:fontRef idx="minor">
-        <a:schemeClr val="lt1"/>
-      </a:fontRef>
-    </dgm:style>
-  </dgm:styleLbl>
-  <dgm:styleLbl name="node3">
-    <dgm:scene3d>
-      <a:camera prst="orthographicFront"/>
-      <a:lightRig rig="threePt" dir="t"/>
-    </dgm:scene3d>
-    <dgm:sp3d/>
-    <dgm:txPr/>
-    <dgm:style>
-      <a:lnRef idx="0">
-        <a:scrgbClr r="0" g="0" b="0"/>
-      </a:lnRef>
-      <a:fillRef idx="3">
-        <a:scrgbClr r="0" g="0" b="0"/>
-      </a:fillRef>
-      <a:effectRef idx="2">
-        <a:scrgbClr r="0" g="0" b="0"/>
-      </a:effectRef>
-      <a:fontRef idx="minor">
-        <a:schemeClr val="lt1"/>
-      </a:fontRef>
-    </dgm:style>
-  </dgm:styleLbl>
-  <dgm:styleLbl name="node4">
-    <dgm:scene3d>
-      <a:camera prst="orthographicFront"/>
-      <a:lightRig rig="threePt" dir="t"/>
-    </dgm:scene3d>
-    <dgm:sp3d/>
-    <dgm:txPr/>
-    <dgm:style>
-      <a:lnRef idx="0">
-        <a:scrgbClr r="0" g="0" b="0"/>
-      </a:lnRef>
-      <a:fillRef idx="3">
-        <a:scrgbClr r="0" g="0" b="0"/>
-      </a:fillRef>
-      <a:effectRef idx="2">
-        <a:scrgbClr r="0" g="0" b="0"/>
-      </a:effectRef>
-      <a:fontRef idx="minor">
-        <a:schemeClr val="lt1"/>
-      </a:fontRef>
-    </dgm:style>
-  </dgm:styleLbl>
-  <dgm:styleLbl name="fgImgPlace1">
-    <dgm:scene3d>
-      <a:camera prst="orthographicFront"/>
-      <a:lightRig rig="threePt" dir="t"/>
-    </dgm:scene3d>
-    <dgm:sp3d/>
-    <dgm:txPr/>
-    <dgm:style>
-      <a:lnRef idx="0">
-        <a:scrgbClr r="0" g="0" b="0"/>
-      </a:lnRef>
-      <a:fillRef idx="1">
-        <a:scrgbClr r="0" g="0" b="0"/>
-      </a:fillRef>
-      <a:effectRef idx="2">
-        <a:scrgbClr r="0" g="0" b="0"/>
-      </a:effectRef>
-      <a:fontRef idx="minor"/>
-    </dgm:style>
-  </dgm:styleLbl>
-  <dgm:styleLbl name="alignImgPlace1">
-    <dgm:scene3d>
-      <a:camera prst="orthographicFront"/>
-      <a:lightRig rig="threePt" dir="t"/>
-    </dgm:scene3d>
-    <dgm:sp3d/>
-    <dgm:txPr/>
-    <dgm:style>
-      <a:lnRef idx="0">
-        <a:scrgbClr r="0" g="0" b="0"/>
-      </a:lnRef>
-      <a:fillRef idx="1">
-        <a:scrgbClr r="0" g="0" b="0"/>
-      </a:fillRef>
-      <a:effectRef idx="2">
-        <a:scrgbClr r="0" g="0" b="0"/>
-      </a:effectRef>
-      <a:fontRef idx="minor"/>
-    </dgm:style>
-  </dgm:styleLbl>
-  <dgm:styleLbl name="bgImgPlace1">
-    <dgm:scene3d>
-      <a:camera prst="orthographicFront"/>
-      <a:lightRig rig="threePt" dir="t"/>
-    </dgm:scene3d>
-    <dgm:sp3d/>
-    <dgm:txPr/>
-    <dgm:style>
-      <a:lnRef idx="0">
-        <a:scrgbClr r="0" g="0" b="0"/>
-      </a:lnRef>
-      <a:fillRef idx="1">
-        <a:scrgbClr r="0" g="0" b="0"/>
-      </a:fillRef>
-      <a:effectRef idx="2">
-        <a:scrgbClr r="0" g="0" b="0"/>
-      </a:effectRef>
-      <a:fontRef idx="minor"/>
-    </dgm:style>
-  </dgm:styleLbl>
-  <dgm:styleLbl name="sibTrans2D1">
-    <dgm:scene3d>
-      <a:camera prst="orthographicFront"/>
-      <a:lightRig rig="threePt" dir="t"/>
-    </dgm:scene3d>
-    <dgm:sp3d/>
-    <dgm:txPr/>
-    <dgm:style>
-      <a:lnRef idx="0">
-        <a:scrgbClr r="0" g="0" b="0"/>
-      </a:lnRef>
-      <a:fillRef idx="3">
-        <a:scrgbClr r="0" g="0" b="0"/>
-      </a:fillRef>
-      <a:effectRef idx="2">
-        <a:scrgbClr r="0" g="0" b="0"/>
-      </a:effectRef>
-      <a:fontRef idx="minor">
-        <a:schemeClr val="lt1"/>
-      </a:fontRef>
-    </dgm:style>
-  </dgm:styleLbl>
-  <dgm:styleLbl name="fgSibTrans2D1">
-    <dgm:scene3d>
-      <a:camera prst="orthographicFront"/>
-      <a:lightRig rig="threePt" dir="t"/>
-    </dgm:scene3d>
-    <dgm:sp3d/>
-    <dgm:txPr/>
-    <dgm:style>
-      <a:lnRef idx="0">
-        <a:scrgbClr r="0" g="0" b="0"/>
-      </a:lnRef>
-      <a:fillRef idx="3">
-        <a:scrgbClr r="0" g="0" b="0"/>
-      </a:fillRef>
-      <a:effectRef idx="2">
-        <a:scrgbClr r="0" g="0" b="0"/>
-      </a:effectRef>
-      <a:fontRef idx="minor">
-        <a:schemeClr val="lt1"/>
-      </a:fontRef>
-    </dgm:style>
-  </dgm:styleLbl>
-  <dgm:styleLbl name="bgSibTrans2D1">
-    <dgm:scene3d>
-      <a:camera prst="orthographicFront"/>
-      <a:lightRig rig="threePt" dir="t"/>
-    </dgm:scene3d>
-    <dgm:sp3d/>
-    <dgm:txPr/>
-    <dgm:style>
-      <a:lnRef idx="0">
-        <a:scrgbClr r="0" g="0" b="0"/>
-      </a:lnRef>
-      <a:fillRef idx="3">
-        <a:scrgbClr r="0" g="0" b="0"/>
-      </a:fillRef>
-      <a:effectRef idx="2">
-        <a:scrgbClr r="0" g="0" b="0"/>
-      </a:effectRef>
-      <a:fontRef idx="minor">
-        <a:schemeClr val="lt1"/>
-      </a:fontRef>
-    </dgm:style>
-  </dgm:styleLbl>
-  <dgm:styleLbl name="sibTrans1D1">
-    <dgm:scene3d>
-      <a:camera prst="orthographicFront"/>
-      <a:lightRig rig="threePt" dir="t"/>
-    </dgm:scene3d>
-    <dgm:sp3d/>
-    <dgm:txPr/>
-    <dgm:style>
-      <a:lnRef idx="1">
-        <a:scrgbClr r="0" g="0" b="0"/>
-      </a:lnRef>
-      <a:fillRef idx="0">
-        <a:scrgbClr r="0" g="0" b="0"/>
-      </a:fillRef>
-      <a:effectRef idx="0">
-        <a:scrgbClr r="0" g="0" b="0"/>
-      </a:effectRef>
-      <a:fontRef idx="minor"/>
-    </dgm:style>
-  </dgm:styleLbl>
-  <dgm:styleLbl name="callout">
-    <dgm:scene3d>
-      <a:camera prst="orthographicFront"/>
-      <a:lightRig rig="threePt" dir="t"/>
-    </dgm:scene3d>
-    <dgm:sp3d/>
-    <dgm:txPr/>
-    <dgm:style>
-      <a:lnRef idx="2">
-        <a:scrgbClr r="0" g="0" b="0"/>
-      </a:lnRef>
-      <a:fillRef idx="1">
-        <a:scrgbClr r="0" g="0" b="0"/>
-      </a:fillRef>
-      <a:effectRef idx="1">
-        <a:scrgbClr r="0" g="0" b="0"/>
-      </a:effectRef>
-      <a:fontRef idx="minor"/>
-    </dgm:style>
-  </dgm:styleLbl>
-  <dgm:styleLbl name="asst0">
-    <dgm:scene3d>
-      <a:camera prst="orthographicFront"/>
-      <a:lightRig rig="threePt" dir="t"/>
-    </dgm:scene3d>
-    <dgm:sp3d/>
-    <dgm:txPr/>
-    <dgm:style>
-      <a:lnRef idx="0">
-        <a:scrgbClr r="0" g="0" b="0"/>
-      </a:lnRef>
-      <a:fillRef idx="3">
-        <a:scrgbClr r="0" g="0" b="0"/>
-      </a:fillRef>
-      <a:effectRef idx="2">
-        <a:scrgbClr r="0" g="0" b="0"/>
-      </a:effectRef>
-      <a:fontRef idx="minor">
-        <a:schemeClr val="lt1"/>
-      </a:fontRef>
-    </dgm:style>
-  </dgm:styleLbl>
-  <dgm:styleLbl name="asst1">
-    <dgm:scene3d>
-      <a:camera prst="orthographicFront"/>
-      <a:lightRig rig="threePt" dir="t"/>
-    </dgm:scene3d>
-    <dgm:sp3d/>
-    <dgm:txPr/>
-    <dgm:style>
-      <a:lnRef idx="0">
-        <a:scrgbClr r="0" g="0" b="0"/>
-      </a:lnRef>
-      <a:fillRef idx="3">
-        <a:scrgbClr r="0" g="0" b="0"/>
-      </a:fillRef>
-      <a:effectRef idx="2">
-        <a:scrgbClr r="0" g="0" b="0"/>
-      </a:effectRef>
-      <a:fontRef idx="minor">
-        <a:schemeClr val="lt1"/>
-      </a:fontRef>
-    </dgm:style>
-  </dgm:styleLbl>
-  <dgm:styleLbl name="asst2">
-    <dgm:scene3d>
-      <a:camera prst="orthographicFront"/>
-      <a:lightRig rig="threePt" dir="t"/>
-    </dgm:scene3d>
-    <dgm:sp3d/>
-    <dgm:txPr/>
-    <dgm:style>
-      <a:lnRef idx="0">
-        <a:scrgbClr r="0" g="0" b="0"/>
-      </a:lnRef>
-      <a:fillRef idx="3">
-        <a:scrgbClr r="0" g="0" b="0"/>
-      </a:fillRef>
-      <a:effectRef idx="2">
-        <a:scrgbClr r="0" g="0" b="0"/>
-      </a:effectRef>
-      <a:fontRef idx="minor">
-        <a:schemeClr val="lt1"/>
-      </a:fontRef>
-    </dgm:style>
-  </dgm:styleLbl>
-  <dgm:styleLbl name="asst3">
-    <dgm:scene3d>
-      <a:camera prst="orthographicFront"/>
-      <a:lightRig rig="threePt" dir="t"/>
-    </dgm:scene3d>
-    <dgm:sp3d/>
-    <dgm:txPr/>
-    <dgm:style>
-      <a:lnRef idx="0">
-        <a:scrgbClr r="0" g="0" b="0"/>
-      </a:lnRef>
-      <a:fillRef idx="3">
-        <a:scrgbClr r="0" g="0" b="0"/>
-      </a:fillRef>
-      <a:effectRef idx="2">
-        <a:scrgbClr r="0" g="0" b="0"/>
-      </a:effectRef>
-      <a:fontRef idx="minor">
-        <a:schemeClr val="lt1"/>
-      </a:fontRef>
-    </dgm:style>
-  </dgm:styleLbl>
-  <dgm:styleLbl name="asst4">
-    <dgm:scene3d>
-      <a:camera prst="orthographicFront"/>
-      <a:lightRig rig="threePt" dir="t"/>
-    </dgm:scene3d>
-    <dgm:sp3d/>
-    <dgm:txPr/>
-    <dgm:style>
-      <a:lnRef idx="0">
-        <a:scrgbClr r="0" g="0" b="0"/>
-      </a:lnRef>
-      <a:fillRef idx="3">
-        <a:scrgbClr r="0" g="0" b="0"/>
-      </a:fillRef>
-      <a:effectRef idx="2">
-        <a:scrgbClr r="0" g="0" b="0"/>
-      </a:effectRef>
-      <a:fontRef idx="minor">
-        <a:schemeClr val="lt1"/>
-      </a:fontRef>
-    </dgm:style>
-  </dgm:styleLbl>
-  <dgm:styleLbl name="parChTrans2D1">
-    <dgm:scene3d>
-      <a:camera prst="orthographicFront"/>
-      <a:lightRig rig="threePt" dir="t"/>
-    </dgm:scene3d>
-    <dgm:sp3d/>
-    <dgm:txPr/>
-    <dgm:style>
-      <a:lnRef idx="0">
-        <a:scrgbClr r="0" g="0" b="0"/>
-      </a:lnRef>
-      <a:fillRef idx="3">
-        <a:scrgbClr r="0" g="0" b="0"/>
-      </a:fillRef>
-      <a:effectRef idx="2">
-        <a:scrgbClr r="0" g="0" b="0"/>
-      </a:effectRef>
-      <a:fontRef idx="minor">
-        <a:schemeClr val="lt1"/>
-      </a:fontRef>
-    </dgm:style>
-  </dgm:styleLbl>
-  <dgm:styleLbl name="parChTrans2D2">
-    <dgm:scene3d>
-      <a:camera prst="orthographicFront"/>
-      <a:lightRig rig="threePt" dir="t"/>
-    </dgm:scene3d>
-    <dgm:sp3d/>
-    <dgm:txPr/>
-    <dgm:style>
-      <a:lnRef idx="0">
-        <a:scrgbClr r="0" g="0" b="0"/>
-      </a:lnRef>
-      <a:fillRef idx="3">
-        <a:scrgbClr r="0" g="0" b="0"/>
-      </a:fillRef>
-      <a:effectRef idx="2">
-        <a:scrgbClr r="0" g="0" b="0"/>
-      </a:effectRef>
-      <a:fontRef idx="minor">
-        <a:schemeClr val="lt1"/>
-      </a:fontRef>
-    </dgm:style>
-  </dgm:styleLbl>
-  <dgm:styleLbl name="parChTrans2D3">
-    <dgm:scene3d>
-      <a:camera prst="orthographicFront"/>
-      <a:lightRig rig="threePt" dir="t"/>
-    </dgm:scene3d>
-    <dgm:sp3d/>
-    <dgm:txPr/>
-    <dgm:style>
-      <a:lnRef idx="1">
-        <a:scrgbClr r="0" g="0" b="0"/>
-      </a:lnRef>
-      <a:fillRef idx="3">
-        <a:scrgbClr r="0" g="0" b="0"/>
-      </a:fillRef>
-      <a:effectRef idx="2">
-        <a:scrgbClr r="0" g="0" b="0"/>
-      </a:effectRef>
-      <a:fontRef idx="minor">
-        <a:schemeClr val="lt1"/>
-      </a:fontRef>
-    </dgm:style>
-  </dgm:styleLbl>
-  <dgm:styleLbl name="parChTrans2D4">
-    <dgm:scene3d>
-      <a:camera prst="orthographicFront"/>
-      <a:lightRig rig="threePt" dir="t"/>
-    </dgm:scene3d>
-    <dgm:sp3d/>
-    <dgm:txPr/>
-    <dgm:style>
-      <a:lnRef idx="1">
-        <a:scrgbClr r="0" g="0" b="0"/>
-      </a:lnRef>
-      <a:fillRef idx="3">
-        <a:scrgbClr r="0" g="0" b="0"/>
-      </a:fillRef>
-      <a:effectRef idx="2">
-        <a:scrgbClr r="0" g="0" b="0"/>
-      </a:effectRef>
-      <a:fontRef idx="minor">
-        <a:schemeClr val="lt1"/>
-      </a:fontRef>
-    </dgm:style>
-  </dgm:styleLbl>
-  <dgm:styleLbl name="parChTrans1D1">
-    <dgm:scene3d>
-      <a:camera prst="orthographicFront"/>
-      <a:lightRig rig="threePt" dir="t"/>
-    </dgm:scene3d>
-    <dgm:sp3d/>
-    <dgm:txPr/>
-    <dgm:style>
-      <a:lnRef idx="1">
-        <a:scrgbClr r="0" g="0" b="0"/>
-      </a:lnRef>
-      <a:fillRef idx="0">
-        <a:scrgbClr r="0" g="0" b="0"/>
-      </a:fillRef>
-      <a:effectRef idx="0">
-        <a:scrgbClr r="0" g="0" b="0"/>
-      </a:effectRef>
-      <a:fontRef idx="minor"/>
-    </dgm:style>
-  </dgm:styleLbl>
-  <dgm:styleLbl name="parChTrans1D2">
-    <dgm:scene3d>
-      <a:camera prst="orthographicFront"/>
-      <a:lightRig rig="threePt" dir="t"/>
-    </dgm:scene3d>
-    <dgm:sp3d/>
-    <dgm:txPr/>
-    <dgm:style>
-      <a:lnRef idx="1">
-        <a:scrgbClr r="0" g="0" b="0"/>
-      </a:lnRef>
-      <a:fillRef idx="0">
-        <a:scrgbClr r="0" g="0" b="0"/>
-      </a:fillRef>
-      <a:effectRef idx="0">
-        <a:scrgbClr r="0" g="0" b="0"/>
-      </a:effectRef>
-      <a:fontRef idx="minor"/>
-    </dgm:style>
-  </dgm:styleLbl>
-  <dgm:styleLbl name="parChTrans1D3">
-    <dgm:scene3d>
-      <a:camera prst="orthographicFront"/>
-      <a:lightRig rig="threePt" dir="t"/>
-    </dgm:scene3d>
-    <dgm:sp3d/>
-    <dgm:txPr/>
-    <dgm:style>
-      <a:lnRef idx="1">
-        <a:scrgbClr r="0" g="0" b="0"/>
-      </a:lnRef>
-      <a:fillRef idx="0">
-        <a:scrgbClr r="0" g="0" b="0"/>
-      </a:fillRef>
-      <a:effectRef idx="0">
-        <a:scrgbClr r="0" g="0" b="0"/>
-      </a:effectRef>
-      <a:fontRef idx="minor"/>
-    </dgm:style>
-  </dgm:styleLbl>
-  <dgm:styleLbl name="parChTrans1D4">
-    <dgm:scene3d>
-      <a:camera prst="orthographicFront"/>
-      <a:lightRig rig="threePt" dir="t"/>
-    </dgm:scene3d>
-    <dgm:sp3d/>
-    <dgm:txPr/>
-    <dgm:style>
-      <a:lnRef idx="1">
-        <a:scrgbClr r="0" g="0" b="0"/>
-      </a:lnRef>
-      <a:fillRef idx="0">
-        <a:scrgbClr r="0" g="0" b="0"/>
-      </a:fillRef>
-      <a:effectRef idx="0">
-        <a:scrgbClr r="0" g="0" b="0"/>
-      </a:effectRef>
-      <a:fontRef idx="minor"/>
-    </dgm:style>
-  </dgm:styleLbl>
-  <dgm:styleLbl name="fgAcc1">
-    <dgm:scene3d>
-      <a:camera prst="orthographicFront"/>
-      <a:lightRig rig="threePt" dir="t"/>
-    </dgm:scene3d>
-    <dgm:sp3d/>
-    <dgm:txPr/>
-    <dgm:style>
-      <a:lnRef idx="1">
-        <a:scrgbClr r="0" g="0" b="0"/>
-      </a:lnRef>
-      <a:fillRef idx="1">
-        <a:scrgbClr r="0" g="0" b="0"/>
-      </a:fillRef>
-      <a:effectRef idx="0">
-        <a:scrgbClr r="0" g="0" b="0"/>
-      </a:effectRef>
-      <a:fontRef idx="minor"/>
-    </dgm:style>
-  </dgm:styleLbl>
-  <dgm:styleLbl name="conFgAcc1">
-    <dgm:scene3d>
-      <a:camera prst="orthographicFront"/>
-      <a:lightRig rig="threePt" dir="t"/>
-    </dgm:scene3d>
-    <dgm:sp3d/>
-    <dgm:txPr/>
-    <dgm:style>
-      <a:lnRef idx="1">
-        <a:scrgbClr r="0" g="0" b="0"/>
-      </a:lnRef>
-      <a:fillRef idx="1">
-        <a:scrgbClr r="0" g="0" b="0"/>
-      </a:fillRef>
-      <a:effectRef idx="0">
-        <a:scrgbClr r="0" g="0" b="0"/>
-      </a:effectRef>
-      <a:fontRef idx="minor"/>
-    </dgm:style>
-  </dgm:styleLbl>
-  <dgm:styleLbl name="alignAcc1">
-    <dgm:scene3d>
-      <a:camera prst="orthographicFront"/>
-      <a:lightRig rig="threePt" dir="t"/>
-    </dgm:scene3d>
-    <dgm:sp3d/>
-    <dgm:txPr/>
-    <dgm:style>
-      <a:lnRef idx="1">
-        <a:scrgbClr r="0" g="0" b="0"/>
-      </a:lnRef>
-      <a:fillRef idx="1">
-        <a:scrgbClr r="0" g="0" b="0"/>
-      </a:fillRef>
-      <a:effectRef idx="0">
-        <a:scrgbClr r="0" g="0" b="0"/>
-      </a:effectRef>
-      <a:fontRef idx="minor"/>
-    </dgm:style>
-  </dgm:styleLbl>
-  <dgm:styleLbl name="trAlignAcc1">
-    <dgm:scene3d>
-      <a:camera prst="orthographicFront"/>
-      <a:lightRig rig="threePt" dir="t"/>
-    </dgm:scene3d>
-    <dgm:sp3d/>
-    <dgm:txPr/>
-    <dgm:style>
-      <a:lnRef idx="1">
-        <a:scrgbClr r="0" g="0" b="0"/>
-      </a:lnRef>
-      <a:fillRef idx="1">
-        <a:scrgbClr r="0" g="0" b="0"/>
-      </a:fillRef>
-      <a:effectRef idx="0">
-        <a:scrgbClr r="0" g="0" b="0"/>
-      </a:effectRef>
-      <a:fontRef idx="minor"/>
-    </dgm:style>
-  </dgm:styleLbl>
-  <dgm:styleLbl name="bgAcc1">
-    <dgm:scene3d>
-      <a:camera prst="orthographicFront"/>
-      <a:lightRig rig="threePt" dir="t"/>
-    </dgm:scene3d>
-    <dgm:sp3d/>
-    <dgm:txPr/>
-    <dgm:style>
-      <a:lnRef idx="1">
-        <a:scrgbClr r="0" g="0" b="0"/>
-      </a:lnRef>
-      <a:fillRef idx="1">
-        <a:scrgbClr r="0" g="0" b="0"/>
-      </a:fillRef>
-      <a:effectRef idx="0">
-        <a:scrgbClr r="0" g="0" b="0"/>
-      </a:effectRef>
-      <a:fontRef idx="minor"/>
-    </dgm:style>
-  </dgm:styleLbl>
-  <dgm:styleLbl name="solidFgAcc1">
-    <dgm:scene3d>
-      <a:camera prst="orthographicFront"/>
-      <a:lightRig rig="threePt" dir="t"/>
-    </dgm:scene3d>
-    <dgm:sp3d/>
-    <dgm:txPr/>
-    <dgm:style>
-      <a:lnRef idx="1">
-        <a:scrgbClr r="0" g="0" b="0"/>
-      </a:lnRef>
-      <a:fillRef idx="1">
-        <a:scrgbClr r="0" g="0" b="0"/>
-      </a:fillRef>
-      <a:effectRef idx="0">
-        <a:scrgbClr r="0" g="0" b="0"/>
-      </a:effectRef>
-      <a:fontRef idx="minor"/>
-    </dgm:style>
-  </dgm:styleLbl>
-  <dgm:styleLbl name="solidAlignAcc1">
-    <dgm:scene3d>
-      <a:camera prst="orthographicFront"/>
-      <a:lightRig rig="threePt" dir="t"/>
-    </dgm:scene3d>
-    <dgm:sp3d/>
-    <dgm:txPr/>
-    <dgm:style>
-      <a:lnRef idx="1">
-        <a:scrgbClr r="0" g="0" b="0"/>
-      </a:lnRef>
-      <a:fillRef idx="1">
-        <a:scrgbClr r="0" g="0" b="0"/>
-      </a:fillRef>
-      <a:effectRef idx="0">
-        <a:scrgbClr r="0" g="0" b="0"/>
-      </a:effectRef>
-      <a:fontRef idx="minor"/>
-    </dgm:style>
-  </dgm:styleLbl>
-  <dgm:styleLbl name="solidBgAcc1">
-    <dgm:scene3d>
-      <a:camera prst="orthographicFront"/>
-      <a:lightRig rig="threePt" dir="t"/>
-    </dgm:scene3d>
-    <dgm:sp3d/>
-    <dgm:txPr/>
-    <dgm:style>
-      <a:lnRef idx="1">
-        <a:scrgbClr r="0" g="0" b="0"/>
-      </a:lnRef>
-      <a:fillRef idx="1">
-        <a:scrgbClr r="0" g="0" b="0"/>
-      </a:fillRef>
-      <a:effectRef idx="0">
-        <a:scrgbClr r="0" g="0" b="0"/>
-      </a:effectRef>
-      <a:fontRef idx="minor"/>
-    </dgm:style>
-  </dgm:styleLbl>
-  <dgm:styleLbl name="fgAccFollowNode1">
-    <dgm:scene3d>
-      <a:camera prst="orthographicFront"/>
-      <a:lightRig rig="threePt" dir="t"/>
-    </dgm:scene3d>
-    <dgm:sp3d/>
-    <dgm:txPr/>
-    <dgm:style>
-      <a:lnRef idx="1">
-        <a:scrgbClr r="0" g="0" b="0"/>
-      </a:lnRef>
-      <a:fillRef idx="1">
-        <a:scrgbClr r="0" g="0" b="0"/>
-      </a:fillRef>
-      <a:effectRef idx="0">
-        <a:scrgbClr r="0" g="0" b="0"/>
-      </a:effectRef>
-      <a:fontRef idx="minor"/>
-    </dgm:style>
-  </dgm:styleLbl>
-  <dgm:styleLbl name="alignAccFollowNode1">
-    <dgm:scene3d>
-      <a:camera prst="orthographicFront"/>
-      <a:lightRig rig="threePt" dir="t"/>
-    </dgm:scene3d>
-    <dgm:sp3d/>
-    <dgm:txPr/>
-    <dgm:style>
-      <a:lnRef idx="1">
-        <a:scrgbClr r="0" g="0" b="0"/>
-      </a:lnRef>
-      <a:fillRef idx="1">
-        <a:scrgbClr r="0" g="0" b="0"/>
-      </a:fillRef>
-      <a:effectRef idx="0">
-        <a:scrgbClr r="0" g="0" b="0"/>
-      </a:effectRef>
-      <a:fontRef idx="minor"/>
-    </dgm:style>
-  </dgm:styleLbl>
-  <dgm:styleLbl name="bgAccFollowNode1">
-    <dgm:scene3d>
-      <a:camera prst="orthographicFront"/>
-      <a:lightRig rig="threePt" dir="t"/>
-    </dgm:scene3d>
-    <dgm:sp3d/>
-    <dgm:txPr/>
-    <dgm:style>
-      <a:lnRef idx="1">
-        <a:scrgbClr r="0" g="0" b="0"/>
-      </a:lnRef>
-      <a:fillRef idx="1">
-        <a:scrgbClr r="0" g="0" b="0"/>
-      </a:fillRef>
-      <a:effectRef idx="0">
-        <a:scrgbClr r="0" g="0" b="0"/>
-      </a:effectRef>
-      <a:fontRef idx="minor"/>
-    </dgm:style>
-  </dgm:styleLbl>
-  <dgm:styleLbl name="fgAcc0">
-    <dgm:scene3d>
-      <a:camera prst="orthographicFront"/>
-      <a:lightRig rig="threePt" dir="t"/>
-    </dgm:scene3d>
-    <dgm:sp3d/>
-    <dgm:txPr/>
-    <dgm:style>
-      <a:lnRef idx="1">
-        <a:scrgbClr r="0" g="0" b="0"/>
-      </a:lnRef>
-      <a:fillRef idx="1">
-        <a:scrgbClr r="0" g="0" b="0"/>
-      </a:fillRef>
-      <a:effectRef idx="0">
-        <a:scrgbClr r="0" g="0" b="0"/>
-      </a:effectRef>
-      <a:fontRef idx="minor"/>
-    </dgm:style>
-  </dgm:styleLbl>
-  <dgm:styleLbl name="fgAcc2">
-    <dgm:scene3d>
-      <a:camera prst="orthographicFront"/>
-      <a:lightRig rig="threePt" dir="t"/>
-    </dgm:scene3d>
-    <dgm:sp3d/>
-    <dgm:txPr/>
-    <dgm:style>
-      <a:lnRef idx="1">
-        <a:scrgbClr r="0" g="0" b="0"/>
-      </a:lnRef>
-      <a:fillRef idx="1">
-        <a:scrgbClr r="0" g="0" b="0"/>
-      </a:fillRef>
-      <a:effectRef idx="0">
-        <a:scrgbClr r="0" g="0" b="0"/>
-      </a:effectRef>
-      <a:fontRef idx="minor"/>
-    </dgm:style>
-  </dgm:styleLbl>
-  <dgm:styleLbl name="fgAcc3">
-    <dgm:scene3d>
-      <a:camera prst="orthographicFront"/>
-      <a:lightRig rig="threePt" dir="t"/>
-    </dgm:scene3d>
-    <dgm:sp3d/>
-    <dgm:txPr/>
-    <dgm:style>
-      <a:lnRef idx="1">
-        <a:scrgbClr r="0" g="0" b="0"/>
-      </a:lnRef>
-      <a:fillRef idx="1">
-        <a:scrgbClr r="0" g="0" b="0"/>
-      </a:fillRef>
-      <a:effectRef idx="0">
-        <a:scrgbClr r="0" g="0" b="0"/>
-      </a:effectRef>
-      <a:fontRef idx="minor"/>
-    </dgm:style>
-  </dgm:styleLbl>
-  <dgm:styleLbl name="fgAcc4">
-    <dgm:scene3d>
-      <a:camera prst="orthographicFront"/>
-      <a:lightRig rig="threePt" dir="t"/>
-    </dgm:scene3d>
-    <dgm:sp3d/>
-    <dgm:txPr/>
-    <dgm:style>
-      <a:lnRef idx="1">
-        <a:scrgbClr r="0" g="0" b="0"/>
-      </a:lnRef>
-      <a:fillRef idx="1">
-        <a:scrgbClr r="0" g="0" b="0"/>
-      </a:fillRef>
-      <a:effectRef idx="0">
-        <a:scrgbClr r="0" g="0" b="0"/>
-      </a:effectRef>
-      <a:fontRef idx="minor"/>
-    </dgm:style>
-  </dgm:styleLbl>
-  <dgm:styleLbl name="bgShp">
-    <dgm:scene3d>
-      <a:camera prst="orthographicFront"/>
-      <a:lightRig rig="threePt" dir="t"/>
-    </dgm:scene3d>
-    <dgm:sp3d/>
-    <dgm:txPr/>
-    <dgm:style>
-      <a:lnRef idx="0">
-        <a:scrgbClr r="0" g="0" b="0"/>
-      </a:lnRef>
-      <a:fillRef idx="1">
-        <a:scrgbClr r="0" g="0" b="0"/>
-      </a:fillRef>
-      <a:effectRef idx="2">
-        <a:scrgbClr r="0" g="0" b="0"/>
-      </a:effectRef>
-      <a:fontRef idx="minor"/>
-    </dgm:style>
-  </dgm:styleLbl>
-  <dgm:styleLbl name="dkBgShp">
-    <dgm:scene3d>
-      <a:camera prst="orthographicFront"/>
-      <a:lightRig rig="threePt" dir="t"/>
-    </dgm:scene3d>
-    <dgm:sp3d/>
-    <dgm:txPr/>
-    <dgm:style>
-      <a:lnRef idx="0">
-        <a:scrgbClr r="0" g="0" b="0"/>
-      </a:lnRef>
-      <a:fillRef idx="1">
-        <a:scrgbClr r="0" g="0" b="0"/>
-      </a:fillRef>
-      <a:effectRef idx="2">
-        <a:scrgbClr r="0" g="0" b="0"/>
-      </a:effectRef>
-      <a:fontRef idx="minor"/>
-    </dgm:style>
-  </dgm:styleLbl>
-  <dgm:styleLbl name="trBgShp">
-    <dgm:scene3d>
-      <a:camera prst="orthographicFront"/>
-      <a:lightRig rig="threePt" dir="t"/>
-    </dgm:scene3d>
-    <dgm:sp3d/>
-    <dgm:txPr/>
-    <dgm:style>
-      <a:lnRef idx="0">
-        <a:scrgbClr r="0" g="0" b="0"/>
-      </a:lnRef>
-      <a:fillRef idx="1">
-        <a:scrgbClr r="0" g="0" b="0"/>
-      </a:fillRef>
-      <a:effectRef idx="0">
-        <a:scrgbClr r="0" g="0" b="0"/>
-      </a:effectRef>
-      <a:fontRef idx="minor"/>
-    </dgm:style>
-  </dgm:styleLbl>
-  <dgm:styleLbl name="fgShp">
-    <dgm:scene3d>
-      <a:camera prst="orthographicFront"/>
-      <a:lightRig rig="threePt" dir="t"/>
-    </dgm:scene3d>
-    <dgm:sp3d/>
-    <dgm:txPr/>
-    <dgm:style>
-      <a:lnRef idx="0">
-        <a:scrgbClr r="0" g="0" b="0"/>
-      </a:lnRef>
-      <a:fillRef idx="3">
-        <a:scrgbClr r="0" g="0" b="0"/>
-      </a:fillRef>
-      <a:effectRef idx="2">
-        <a:scrgbClr r="0" g="0" b="0"/>
-      </a:effectRef>
-      <a:fontRef idx="minor"/>
-    </dgm:style>
-  </dgm:styleLbl>
-  <dgm:styleLbl name="revTx">
-    <dgm:scene3d>
-      <a:camera prst="orthographicFront"/>
-      <a:lightRig rig="threePt" dir="t"/>
-    </dgm:scene3d>
-    <dgm:sp3d/>
-    <dgm:txPr/>
-    <dgm:style>
-      <a:lnRef idx="0">
-        <a:scrgbClr r="0" g="0" b="0"/>
-      </a:lnRef>
-      <a:fillRef idx="0">
-        <a:scrgbClr r="0" g="0" b="0"/>
-      </a:fillRef>
-      <a:effectRef idx="0">
-        <a:scrgbClr r="0" g="0" b="0"/>
-      </a:effectRef>
-      <a:fontRef idx="minor"/>
-    </dgm:style>
-  </dgm:styleLbl>
-</dgm:styleDef>
-</file>
-
 <file path=ppt/notesMasters/notesMaster1.xml><?xml version="1.0" encoding="utf-8"?>
 <p:notesMaster xmlns:a="http://schemas.openxmlformats.org/drawingml/2006/main" xmlns:r="http://schemas.openxmlformats.org/officeDocument/2006/relationships" xmlns:p="http://schemas.openxmlformats.org/presentationml/2006/main">
   <p:cSld>
@@ -7131,7 +4068,7 @@
           <a:p>
             <a:fld id="{7F6CD5E7-A5BE-4430-AD67-E129D63AAC5C}" type="slidenum">
               <a:rPr lang="he-IL" smtClean="0"/>
-              <a:t>29</a:t>
+              <a:t>28</a:t>
             </a:fld>
             <a:endParaRPr lang="he-IL"/>
           </a:p>
@@ -12132,6 +9069,216 @@
   <p:cSld>
     <p:spTree>
       <p:nvGrpSpPr>
+        <p:cNvPr id="1" name="">
+          <a:extLst>
+            <a:ext uri="{FF2B5EF4-FFF2-40B4-BE49-F238E27FC236}">
+              <a16:creationId xmlns:a16="http://schemas.microsoft.com/office/drawing/2014/main" id="{7393FBAF-9B11-4A31-979E-53C65228B56E}"/>
+            </a:ext>
+          </a:extLst>
+        </p:cNvPr>
+        <p:cNvGrpSpPr/>
+        <p:nvPr/>
+      </p:nvGrpSpPr>
+      <p:grpSpPr>
+        <a:xfrm>
+          <a:off x="0" y="0"/>
+          <a:ext cx="0" cy="0"/>
+          <a:chOff x="0" y="0"/>
+          <a:chExt cx="0" cy="0"/>
+        </a:xfrm>
+      </p:grpSpPr>
+      <p:sp>
+        <p:nvSpPr>
+          <p:cNvPr id="2" name="Title 1">
+            <a:extLst>
+              <a:ext uri="{FF2B5EF4-FFF2-40B4-BE49-F238E27FC236}">
+                <a16:creationId xmlns:a16="http://schemas.microsoft.com/office/drawing/2014/main" id="{2B9AF9C8-65DB-4D85-01B3-0FBE36FCD713}"/>
+              </a:ext>
+            </a:extLst>
+          </p:cNvPr>
+          <p:cNvSpPr>
+            <a:spLocks noGrp="1"/>
+          </p:cNvSpPr>
+          <p:nvPr>
+            <p:ph type="title"/>
+          </p:nvPr>
+        </p:nvSpPr>
+        <p:spPr>
+          <a:xfrm>
+            <a:off x="3072268" y="401637"/>
+            <a:ext cx="8753475" cy="1325563"/>
+          </a:xfrm>
+        </p:spPr>
+        <p:txBody>
+          <a:bodyPr anchor="ctr">
+            <a:normAutofit/>
+          </a:bodyPr>
+          <a:lstStyle/>
+          <a:p>
+            <a:r>
+              <a:rPr lang="en-US" dirty="0"/>
+              <a:t>Indicators Analysis – CDF</a:t>
+            </a:r>
+            <a:endParaRPr lang="en-IL" dirty="0"/>
+          </a:p>
+        </p:txBody>
+      </p:sp>
+      <p:sp>
+        <p:nvSpPr>
+          <p:cNvPr id="4" name="Slide Number Placeholder 3">
+            <a:extLst>
+              <a:ext uri="{FF2B5EF4-FFF2-40B4-BE49-F238E27FC236}">
+                <a16:creationId xmlns:a16="http://schemas.microsoft.com/office/drawing/2014/main" id="{2712EB28-5D98-7FA1-AEEA-63F15D94FFCD}"/>
+              </a:ext>
+            </a:extLst>
+          </p:cNvPr>
+          <p:cNvSpPr>
+            <a:spLocks noGrp="1"/>
+          </p:cNvSpPr>
+          <p:nvPr>
+            <p:ph type="sldNum" sz="quarter" idx="12"/>
+          </p:nvPr>
+        </p:nvSpPr>
+        <p:spPr>
+          <a:xfrm>
+            <a:off x="11728704" y="6464649"/>
+            <a:ext cx="452233" cy="365125"/>
+          </a:xfrm>
+        </p:spPr>
+        <p:txBody>
+          <a:bodyPr anchor="ctr">
+            <a:normAutofit/>
+          </a:bodyPr>
+          <a:lstStyle/>
+          <a:p>
+            <a:pPr>
+              <a:spcAft>
+                <a:spcPts val="600"/>
+              </a:spcAft>
+            </a:pPr>
+            <a:fld id="{E6AB8EDD-9EF2-4633-A1C2-4D908C1019B4}" type="slidenum">
+              <a:rPr lang="he-IL" smtClean="0"/>
+              <a:pPr>
+                <a:spcAft>
+                  <a:spcPts val="600"/>
+                </a:spcAft>
+              </a:pPr>
+              <a:t>12</a:t>
+            </a:fld>
+            <a:endParaRPr lang="he-IL"/>
+          </a:p>
+        </p:txBody>
+      </p:sp>
+      <p:sp>
+        <p:nvSpPr>
+          <p:cNvPr id="16" name="TextBox 15">
+            <a:extLst>
+              <a:ext uri="{FF2B5EF4-FFF2-40B4-BE49-F238E27FC236}">
+                <a16:creationId xmlns:a16="http://schemas.microsoft.com/office/drawing/2014/main" id="{8B95B18C-D28C-E7BD-52F4-0DEE256A54AC}"/>
+              </a:ext>
+            </a:extLst>
+          </p:cNvPr>
+          <p:cNvSpPr txBox="1"/>
+          <p:nvPr/>
+        </p:nvSpPr>
+        <p:spPr>
+          <a:xfrm>
+            <a:off x="1490383" y="6204236"/>
+            <a:ext cx="7235328" cy="646331"/>
+          </a:xfrm>
+          <a:prstGeom prst="rect">
+            <a:avLst/>
+          </a:prstGeom>
+          <a:noFill/>
+        </p:spPr>
+        <p:txBody>
+          <a:bodyPr wrap="square">
+            <a:spAutoFit/>
+          </a:bodyPr>
+          <a:lstStyle/>
+          <a:p>
+            <a:pPr>
+              <a:buNone/>
+            </a:pPr>
+            <a:r>
+              <a:rPr lang="en-GB" dirty="0">
+                <a:solidFill>
+                  <a:schemeClr val="bg1">
+                    <a:lumMod val="50000"/>
+                  </a:schemeClr>
+                </a:solidFill>
+              </a:rPr>
+              <a:t>The Cumulative Distribution Function (CDF) show the probability that the variable will take a value less than or equal to a particular value in X-axis</a:t>
+            </a:r>
+            <a:r>
+              <a:rPr lang="en-US" dirty="0">
+                <a:solidFill>
+                  <a:schemeClr val="bg1">
+                    <a:lumMod val="50000"/>
+                  </a:schemeClr>
+                </a:solidFill>
+              </a:rPr>
+              <a:t>.</a:t>
+            </a:r>
+            <a:endParaRPr lang="en-GB" dirty="0">
+              <a:solidFill>
+                <a:schemeClr val="bg1">
+                  <a:lumMod val="50000"/>
+                </a:schemeClr>
+              </a:solidFill>
+            </a:endParaRPr>
+          </a:p>
+        </p:txBody>
+      </p:sp>
+      <p:pic>
+        <p:nvPicPr>
+          <p:cNvPr id="6" name="Picture 5">
+            <a:extLst>
+              <a:ext uri="{FF2B5EF4-FFF2-40B4-BE49-F238E27FC236}">
+                <a16:creationId xmlns:a16="http://schemas.microsoft.com/office/drawing/2014/main" id="{2242A1FB-A88F-D710-1D3E-5AA2F5113F45}"/>
+              </a:ext>
+            </a:extLst>
+          </p:cNvPr>
+          <p:cNvPicPr>
+            <a:picLocks noChangeAspect="1"/>
+          </p:cNvPicPr>
+          <p:nvPr/>
+        </p:nvPicPr>
+        <p:blipFill>
+          <a:blip r:embed="rId2"/>
+          <a:srcRect b="50263"/>
+          <a:stretch>
+            <a:fillRect/>
+          </a:stretch>
+        </p:blipFill>
+        <p:spPr>
+          <a:xfrm>
+            <a:off x="588640" y="2290008"/>
+            <a:ext cx="11014720" cy="2739192"/>
+          </a:xfrm>
+          <a:prstGeom prst="rect">
+            <a:avLst/>
+          </a:prstGeom>
+        </p:spPr>
+      </p:pic>
+    </p:spTree>
+    <p:extLst>
+      <p:ext uri="{BB962C8B-B14F-4D97-AF65-F5344CB8AC3E}">
+        <p14:creationId xmlns:p14="http://schemas.microsoft.com/office/powerpoint/2010/main" val="2299329630"/>
+      </p:ext>
+    </p:extLst>
+  </p:cSld>
+  <p:clrMapOvr>
+    <a:masterClrMapping/>
+  </p:clrMapOvr>
+</p:sld>
+</file>
+
+<file path=ppt/slides/slide13.xml><?xml version="1.0" encoding="utf-8"?>
+<p:sld xmlns:a="http://schemas.openxmlformats.org/drawingml/2006/main" xmlns:r="http://schemas.openxmlformats.org/officeDocument/2006/relationships" xmlns:p="http://schemas.openxmlformats.org/presentationml/2006/main">
+  <p:cSld>
+    <p:spTree>
+      <p:nvGrpSpPr>
         <p:cNvPr id="1" name=""/>
         <p:cNvGrpSpPr/>
         <p:nvPr/>
@@ -12313,7 +9460,7 @@
           <a:p>
             <a:fld id="{E6AB8EDD-9EF2-4633-A1C2-4D908C1019B4}" type="slidenum">
               <a:rPr lang="he-IL" smtClean="0"/>
-              <a:t>12</a:t>
+              <a:t>13</a:t>
             </a:fld>
             <a:endParaRPr lang="he-IL"/>
           </a:p>
@@ -12332,7 +9479,7 @@
 </p:sld>
 </file>
 
-<file path=ppt/slides/slide13.xml><?xml version="1.0" encoding="utf-8"?>
+<file path=ppt/slides/slide14.xml><?xml version="1.0" encoding="utf-8"?>
 <p:sld xmlns:a="http://schemas.openxmlformats.org/drawingml/2006/main" xmlns:r="http://schemas.openxmlformats.org/officeDocument/2006/relationships" xmlns:p="http://schemas.openxmlformats.org/presentationml/2006/main">
   <p:cSld>
     <p:spTree>
@@ -12407,7 +9554,7 @@
           <a:p>
             <a:fld id="{E6AB8EDD-9EF2-4633-A1C2-4D908C1019B4}" type="slidenum">
               <a:rPr lang="he-IL" smtClean="0"/>
-              <a:t>13</a:t>
+              <a:t>14</a:t>
             </a:fld>
             <a:endParaRPr lang="he-IL"/>
           </a:p>
@@ -12456,7 +9603,7 @@
 </p:sld>
 </file>
 
-<file path=ppt/slides/slide14.xml><?xml version="1.0" encoding="utf-8"?>
+<file path=ppt/slides/slide15.xml><?xml version="1.0" encoding="utf-8"?>
 <p:sld xmlns:a="http://schemas.openxmlformats.org/drawingml/2006/main" xmlns:r="http://schemas.openxmlformats.org/officeDocument/2006/relationships" xmlns:p="http://schemas.openxmlformats.org/presentationml/2006/main">
   <p:cSld>
     <p:spTree>
@@ -12561,7 +9708,7 @@
           <a:p>
             <a:fld id="{E6AB8EDD-9EF2-4633-A1C2-4D908C1019B4}" type="slidenum">
               <a:rPr lang="he-IL" smtClean="0"/>
-              <a:t>14</a:t>
+              <a:t>15</a:t>
             </a:fld>
             <a:endParaRPr lang="he-IL"/>
           </a:p>
@@ -12580,7 +9727,7 @@
 </p:sld>
 </file>
 
-<file path=ppt/slides/slide15.xml><?xml version="1.0" encoding="utf-8"?>
+<file path=ppt/slides/slide16.xml><?xml version="1.0" encoding="utf-8"?>
 <p:sld xmlns:a="http://schemas.openxmlformats.org/drawingml/2006/main" xmlns:r="http://schemas.openxmlformats.org/officeDocument/2006/relationships" xmlns:p="http://schemas.openxmlformats.org/presentationml/2006/main">
   <p:cSld>
     <p:spTree>
@@ -12772,7 +9919,7 @@
           <a:p>
             <a:fld id="{E6AB8EDD-9EF2-4633-A1C2-4D908C1019B4}" type="slidenum">
               <a:rPr lang="he-IL" smtClean="0"/>
-              <a:t>15</a:t>
+              <a:t>16</a:t>
             </a:fld>
             <a:endParaRPr lang="he-IL"/>
           </a:p>
@@ -12791,7 +9938,7 @@
 </p:sld>
 </file>
 
-<file path=ppt/slides/slide16.xml><?xml version="1.0" encoding="utf-8"?>
+<file path=ppt/slides/slide17.xml><?xml version="1.0" encoding="utf-8"?>
 <p:sld xmlns:a="http://schemas.openxmlformats.org/drawingml/2006/main" xmlns:r="http://schemas.openxmlformats.org/officeDocument/2006/relationships" xmlns:p="http://schemas.openxmlformats.org/presentationml/2006/main">
   <p:cSld>
     <p:spTree>
@@ -12978,7 +10125,7 @@
           <a:p>
             <a:fld id="{E6AB8EDD-9EF2-4633-A1C2-4D908C1019B4}" type="slidenum">
               <a:rPr lang="he-IL" smtClean="0"/>
-              <a:t>16</a:t>
+              <a:t>17</a:t>
             </a:fld>
             <a:endParaRPr lang="he-IL"/>
           </a:p>
@@ -12988,412 +10135,6 @@
     <p:extLst>
       <p:ext uri="{BB962C8B-B14F-4D97-AF65-F5344CB8AC3E}">
         <p14:creationId xmlns:p14="http://schemas.microsoft.com/office/powerpoint/2010/main" val="1436308090"/>
-      </p:ext>
-    </p:extLst>
-  </p:cSld>
-  <p:clrMapOvr>
-    <a:masterClrMapping/>
-  </p:clrMapOvr>
-</p:sld>
-</file>
-
-<file path=ppt/slides/slide17.xml><?xml version="1.0" encoding="utf-8"?>
-<p:sld xmlns:a="http://schemas.openxmlformats.org/drawingml/2006/main" xmlns:r="http://schemas.openxmlformats.org/officeDocument/2006/relationships" xmlns:p="http://schemas.openxmlformats.org/presentationml/2006/main">
-  <p:cSld>
-    <p:spTree>
-      <p:nvGrpSpPr>
-        <p:cNvPr id="1" name="">
-          <a:extLst>
-            <a:ext uri="{FF2B5EF4-FFF2-40B4-BE49-F238E27FC236}">
-              <a16:creationId xmlns:a16="http://schemas.microsoft.com/office/drawing/2014/main" id="{A687CF90-7B3A-775B-2776-0CAB79622E12}"/>
-            </a:ext>
-          </a:extLst>
-        </p:cNvPr>
-        <p:cNvGrpSpPr/>
-        <p:nvPr/>
-      </p:nvGrpSpPr>
-      <p:grpSpPr>
-        <a:xfrm>
-          <a:off x="0" y="0"/>
-          <a:ext cx="0" cy="0"/>
-          <a:chOff x="0" y="0"/>
-          <a:chExt cx="0" cy="0"/>
-        </a:xfrm>
-      </p:grpSpPr>
-      <p:sp>
-        <p:nvSpPr>
-          <p:cNvPr id="2" name="Title 1">
-            <a:extLst>
-              <a:ext uri="{FF2B5EF4-FFF2-40B4-BE49-F238E27FC236}">
-                <a16:creationId xmlns:a16="http://schemas.microsoft.com/office/drawing/2014/main" id="{D59E111C-2932-64BE-E9B6-61A8C23DF1C0}"/>
-              </a:ext>
-            </a:extLst>
-          </p:cNvPr>
-          <p:cNvSpPr>
-            <a:spLocks noGrp="1"/>
-          </p:cNvSpPr>
-          <p:nvPr>
-            <p:ph type="title"/>
-          </p:nvPr>
-        </p:nvSpPr>
-        <p:spPr/>
-        <p:txBody>
-          <a:bodyPr/>
-          <a:lstStyle/>
-          <a:p>
-            <a:r>
-              <a:rPr lang="en-GB" dirty="0"/>
-              <a:t>H1 (Dense Community Hypothesis)</a:t>
-            </a:r>
-            <a:endParaRPr lang="en-IL" dirty="0"/>
-          </a:p>
-        </p:txBody>
-      </p:sp>
-      <p:pic>
-        <p:nvPicPr>
-          <p:cNvPr id="7" name="Picture 6">
-            <a:extLst>
-              <a:ext uri="{FF2B5EF4-FFF2-40B4-BE49-F238E27FC236}">
-                <a16:creationId xmlns:a16="http://schemas.microsoft.com/office/drawing/2014/main" id="{1CCF4D89-8A67-D062-EBBF-D4F074BB939C}"/>
-              </a:ext>
-            </a:extLst>
-          </p:cNvPr>
-          <p:cNvPicPr>
-            <a:picLocks noChangeAspect="1"/>
-          </p:cNvPicPr>
-          <p:nvPr/>
-        </p:nvPicPr>
-        <p:blipFill>
-          <a:blip r:embed="rId2"/>
-          <a:stretch>
-            <a:fillRect/>
-          </a:stretch>
-        </p:blipFill>
-        <p:spPr>
-          <a:xfrm>
-            <a:off x="506933" y="1725312"/>
-            <a:ext cx="5341739" cy="2602386"/>
-          </a:xfrm>
-          <a:prstGeom prst="rect">
-            <a:avLst/>
-          </a:prstGeom>
-        </p:spPr>
-      </p:pic>
-      <p:pic>
-        <p:nvPicPr>
-          <p:cNvPr id="10" name="Picture 9">
-            <a:extLst>
-              <a:ext uri="{FF2B5EF4-FFF2-40B4-BE49-F238E27FC236}">
-                <a16:creationId xmlns:a16="http://schemas.microsoft.com/office/drawing/2014/main" id="{C1902111-6A7F-86D4-745C-8BEF6E3D0A09}"/>
-              </a:ext>
-            </a:extLst>
-          </p:cNvPr>
-          <p:cNvPicPr>
-            <a:picLocks noChangeAspect="1"/>
-          </p:cNvPicPr>
-          <p:nvPr/>
-        </p:nvPicPr>
-        <p:blipFill>
-          <a:blip r:embed="rId3"/>
-          <a:stretch>
-            <a:fillRect/>
-          </a:stretch>
-        </p:blipFill>
-        <p:spPr>
-          <a:xfrm>
-            <a:off x="6386964" y="1725311"/>
-            <a:ext cx="5341739" cy="2602387"/>
-          </a:xfrm>
-          <a:prstGeom prst="rect">
-            <a:avLst/>
-          </a:prstGeom>
-        </p:spPr>
-      </p:pic>
-      <p:sp>
-        <p:nvSpPr>
-          <p:cNvPr id="3" name="Content Placeholder 2">
-            <a:extLst>
-              <a:ext uri="{FF2B5EF4-FFF2-40B4-BE49-F238E27FC236}">
-                <a16:creationId xmlns:a16="http://schemas.microsoft.com/office/drawing/2014/main" id="{A5C7708B-BBF5-B023-9E60-48D8195BE69B}"/>
-              </a:ext>
-            </a:extLst>
-          </p:cNvPr>
-          <p:cNvSpPr>
-            <a:spLocks noGrp="1"/>
-          </p:cNvSpPr>
-          <p:nvPr>
-            <p:ph idx="1"/>
-          </p:nvPr>
-        </p:nvSpPr>
-        <p:spPr>
-          <a:xfrm>
-            <a:off x="1243086" y="1825624"/>
-            <a:ext cx="10850301" cy="5004149"/>
-          </a:xfrm>
-        </p:spPr>
-        <p:txBody>
-          <a:bodyPr>
-            <a:normAutofit/>
-          </a:bodyPr>
-          <a:lstStyle/>
-          <a:p>
-            <a:pPr marL="0" indent="0">
-              <a:buNone/>
-            </a:pPr>
-            <a:endParaRPr lang="en-GB" sz="2000" b="1" dirty="0"/>
-          </a:p>
-          <a:p>
-            <a:pPr lvl="2"/>
-            <a:endParaRPr lang="en-GB" sz="1500" dirty="0"/>
-          </a:p>
-          <a:p>
-            <a:pPr marL="914400" lvl="2" indent="0">
-              <a:buNone/>
-            </a:pPr>
-            <a:endParaRPr lang="en-GB" sz="1500" dirty="0"/>
-          </a:p>
-        </p:txBody>
-      </p:sp>
-      <p:sp>
-        <p:nvSpPr>
-          <p:cNvPr id="4" name="Slide Number Placeholder 3">
-            <a:extLst>
-              <a:ext uri="{FF2B5EF4-FFF2-40B4-BE49-F238E27FC236}">
-                <a16:creationId xmlns:a16="http://schemas.microsoft.com/office/drawing/2014/main" id="{D1F05FAD-2A0B-E49B-2DDF-1D7EC792A24B}"/>
-              </a:ext>
-            </a:extLst>
-          </p:cNvPr>
-          <p:cNvSpPr>
-            <a:spLocks noGrp="1"/>
-          </p:cNvSpPr>
-          <p:nvPr>
-            <p:ph type="sldNum" sz="quarter" idx="12"/>
-          </p:nvPr>
-        </p:nvSpPr>
-        <p:spPr/>
-        <p:txBody>
-          <a:bodyPr/>
-          <a:lstStyle/>
-          <a:p>
-            <a:fld id="{E6AB8EDD-9EF2-4633-A1C2-4D908C1019B4}" type="slidenum">
-              <a:rPr lang="he-IL" smtClean="0"/>
-              <a:t>17</a:t>
-            </a:fld>
-            <a:endParaRPr lang="he-IL"/>
-          </a:p>
-        </p:txBody>
-      </p:sp>
-      <p:pic>
-        <p:nvPicPr>
-          <p:cNvPr id="12" name="Picture 11">
-            <a:extLst>
-              <a:ext uri="{FF2B5EF4-FFF2-40B4-BE49-F238E27FC236}">
-                <a16:creationId xmlns:a16="http://schemas.microsoft.com/office/drawing/2014/main" id="{482664B2-B8A2-28AB-6C23-33AD907AE85F}"/>
-              </a:ext>
-            </a:extLst>
-          </p:cNvPr>
-          <p:cNvPicPr>
-            <a:picLocks noChangeAspect="1"/>
-          </p:cNvPicPr>
-          <p:nvPr/>
-        </p:nvPicPr>
-        <p:blipFill>
-          <a:blip r:embed="rId4"/>
-          <a:stretch>
-            <a:fillRect/>
-          </a:stretch>
-        </p:blipFill>
-        <p:spPr>
-          <a:xfrm>
-            <a:off x="3923366" y="4327698"/>
-            <a:ext cx="4891351" cy="2432305"/>
-          </a:xfrm>
-          <a:prstGeom prst="rect">
-            <a:avLst/>
-          </a:prstGeom>
-        </p:spPr>
-      </p:pic>
-      <p:sp>
-        <p:nvSpPr>
-          <p:cNvPr id="15" name="Rectangle 14">
-            <a:extLst>
-              <a:ext uri="{FF2B5EF4-FFF2-40B4-BE49-F238E27FC236}">
-                <a16:creationId xmlns:a16="http://schemas.microsoft.com/office/drawing/2014/main" id="{F15FE9DF-CB6E-AF2A-8056-A91278FA84AA}"/>
-              </a:ext>
-            </a:extLst>
-          </p:cNvPr>
-          <p:cNvSpPr/>
-          <p:nvPr/>
-        </p:nvSpPr>
-        <p:spPr>
-          <a:xfrm>
-            <a:off x="6899024" y="6456649"/>
-            <a:ext cx="408562" cy="130704"/>
-          </a:xfrm>
-          <a:prstGeom prst="rect">
-            <a:avLst/>
-          </a:prstGeom>
-          <a:noFill/>
-          <a:ln>
-            <a:solidFill>
-              <a:srgbClr val="FF0000"/>
-            </a:solidFill>
-          </a:ln>
-        </p:spPr>
-        <p:style>
-          <a:lnRef idx="2">
-            <a:schemeClr val="accent2"/>
-          </a:lnRef>
-          <a:fillRef idx="1">
-            <a:schemeClr val="lt1"/>
-          </a:fillRef>
-          <a:effectRef idx="0">
-            <a:schemeClr val="accent2"/>
-          </a:effectRef>
-          <a:fontRef idx="minor">
-            <a:schemeClr val="dk1"/>
-          </a:fontRef>
-        </p:style>
-        <p:txBody>
-          <a:bodyPr rtlCol="0" anchor="ctr"/>
-          <a:lstStyle/>
-          <a:p>
-            <a:pPr algn="ctr"/>
-            <a:endParaRPr lang="en-IL"/>
-          </a:p>
-        </p:txBody>
-      </p:sp>
-      <p:sp>
-        <p:nvSpPr>
-          <p:cNvPr id="16" name="Rectangle 15">
-            <a:extLst>
-              <a:ext uri="{FF2B5EF4-FFF2-40B4-BE49-F238E27FC236}">
-                <a16:creationId xmlns:a16="http://schemas.microsoft.com/office/drawing/2014/main" id="{D208A51A-3852-434B-8630-2873F7249398}"/>
-              </a:ext>
-            </a:extLst>
-          </p:cNvPr>
-          <p:cNvSpPr/>
-          <p:nvPr/>
-        </p:nvSpPr>
-        <p:spPr>
-          <a:xfrm>
-            <a:off x="4952834" y="6463135"/>
-            <a:ext cx="408562" cy="130704"/>
-          </a:xfrm>
-          <a:prstGeom prst="rect">
-            <a:avLst/>
-          </a:prstGeom>
-          <a:noFill/>
-          <a:ln>
-            <a:solidFill>
-              <a:srgbClr val="FF0000"/>
-            </a:solidFill>
-          </a:ln>
-        </p:spPr>
-        <p:style>
-          <a:lnRef idx="2">
-            <a:schemeClr val="accent2"/>
-          </a:lnRef>
-          <a:fillRef idx="1">
-            <a:schemeClr val="lt1"/>
-          </a:fillRef>
-          <a:effectRef idx="0">
-            <a:schemeClr val="accent2"/>
-          </a:effectRef>
-          <a:fontRef idx="minor">
-            <a:schemeClr val="dk1"/>
-          </a:fontRef>
-        </p:style>
-        <p:txBody>
-          <a:bodyPr rtlCol="0" anchor="ctr"/>
-          <a:lstStyle/>
-          <a:p>
-            <a:pPr algn="ctr"/>
-            <a:endParaRPr lang="en-IL"/>
-          </a:p>
-        </p:txBody>
-      </p:sp>
-      <p:sp>
-        <p:nvSpPr>
-          <p:cNvPr id="17" name="TextBox 16">
-            <a:extLst>
-              <a:ext uri="{FF2B5EF4-FFF2-40B4-BE49-F238E27FC236}">
-                <a16:creationId xmlns:a16="http://schemas.microsoft.com/office/drawing/2014/main" id="{4BD590EB-1027-6A6B-5879-1EF12319137B}"/>
-              </a:ext>
-            </a:extLst>
-          </p:cNvPr>
-          <p:cNvSpPr txBox="1"/>
-          <p:nvPr/>
-        </p:nvSpPr>
-        <p:spPr>
-          <a:xfrm>
-            <a:off x="1614792" y="5233460"/>
-            <a:ext cx="2091447" cy="1200329"/>
-          </a:xfrm>
-          <a:prstGeom prst="rect">
-            <a:avLst/>
-          </a:prstGeom>
-          <a:noFill/>
-        </p:spPr>
-        <p:txBody>
-          <a:bodyPr wrap="square" rtlCol="0">
-            <a:spAutoFit/>
-          </a:bodyPr>
-          <a:lstStyle/>
-          <a:p>
-            <a:r>
-              <a:rPr lang="en-GB" dirty="0"/>
-              <a:t>Using binomial logistic regression with a Wald test on the coefficient</a:t>
-            </a:r>
-            <a:endParaRPr lang="en-IL" dirty="0"/>
-          </a:p>
-        </p:txBody>
-      </p:sp>
-      <p:sp>
-        <p:nvSpPr>
-          <p:cNvPr id="5" name="TextBox 4">
-            <a:extLst>
-              <a:ext uri="{FF2B5EF4-FFF2-40B4-BE49-F238E27FC236}">
-                <a16:creationId xmlns:a16="http://schemas.microsoft.com/office/drawing/2014/main" id="{6075DE13-12C6-7928-ACF6-3FB80EAFF854}"/>
-              </a:ext>
-            </a:extLst>
-          </p:cNvPr>
-          <p:cNvSpPr txBox="1"/>
-          <p:nvPr/>
-        </p:nvSpPr>
-        <p:spPr>
-          <a:xfrm>
-            <a:off x="5157115" y="1456291"/>
-            <a:ext cx="2214283" cy="369332"/>
-          </a:xfrm>
-          <a:prstGeom prst="rect">
-            <a:avLst/>
-          </a:prstGeom>
-          <a:noFill/>
-        </p:spPr>
-        <p:txBody>
-          <a:bodyPr wrap="square" rtlCol="0">
-            <a:spAutoFit/>
-          </a:bodyPr>
-          <a:lstStyle/>
-          <a:p>
-            <a:pPr algn="ctr"/>
-            <a:r>
-              <a:rPr lang="en-US" dirty="0"/>
-              <a:t>Ecuador </a:t>
-            </a:r>
-            <a:r>
-              <a:rPr lang="en-GB" dirty="0"/>
-              <a:t>Campaigns</a:t>
-            </a:r>
-            <a:endParaRPr lang="en-IL" dirty="0"/>
-          </a:p>
-        </p:txBody>
-      </p:sp>
-    </p:spTree>
-    <p:extLst>
-      <p:ext uri="{BB962C8B-B14F-4D97-AF65-F5344CB8AC3E}">
-        <p14:creationId xmlns:p14="http://schemas.microsoft.com/office/powerpoint/2010/main" val="93455988"/>
       </p:ext>
     </p:extLst>
   </p:cSld>
@@ -14140,14 +10881,14 @@
 </file>
 
 <file path=ppt/slides/slide20.xml><?xml version="1.0" encoding="utf-8"?>
-<p:sld xmlns:a="http://schemas.openxmlformats.org/drawingml/2006/main" xmlns:r="http://schemas.openxmlformats.org/officeDocument/2006/relationships" xmlns:p="http://schemas.openxmlformats.org/presentationml/2006/main" show="0">
+<p:sld xmlns:a="http://schemas.openxmlformats.org/drawingml/2006/main" xmlns:r="http://schemas.openxmlformats.org/officeDocument/2006/relationships" xmlns:p="http://schemas.openxmlformats.org/presentationml/2006/main">
   <p:cSld>
     <p:spTree>
       <p:nvGrpSpPr>
         <p:cNvPr id="1" name="">
           <a:extLst>
             <a:ext uri="{FF2B5EF4-FFF2-40B4-BE49-F238E27FC236}">
-              <a16:creationId xmlns:a16="http://schemas.microsoft.com/office/drawing/2014/main" id="{420E60FB-8F62-AB25-20A5-834F5AB2703B}"/>
+              <a16:creationId xmlns:a16="http://schemas.microsoft.com/office/drawing/2014/main" id="{A687CF90-7B3A-775B-2776-0CAB79622E12}"/>
             </a:ext>
           </a:extLst>
         </p:cNvPr>
@@ -14162,12 +10903,41 @@
           <a:chExt cx="0" cy="0"/>
         </a:xfrm>
       </p:grpSpPr>
+      <p:sp>
+        <p:nvSpPr>
+          <p:cNvPr id="2" name="Title 1">
+            <a:extLst>
+              <a:ext uri="{FF2B5EF4-FFF2-40B4-BE49-F238E27FC236}">
+                <a16:creationId xmlns:a16="http://schemas.microsoft.com/office/drawing/2014/main" id="{D59E111C-2932-64BE-E9B6-61A8C23DF1C0}"/>
+              </a:ext>
+            </a:extLst>
+          </p:cNvPr>
+          <p:cNvSpPr>
+            <a:spLocks noGrp="1"/>
+          </p:cNvSpPr>
+          <p:nvPr>
+            <p:ph type="title"/>
+          </p:nvPr>
+        </p:nvSpPr>
+        <p:spPr/>
+        <p:txBody>
+          <a:bodyPr/>
+          <a:lstStyle/>
+          <a:p>
+            <a:r>
+              <a:rPr lang="en-GB" dirty="0"/>
+              <a:t>H1 (Dense Community Hypothesis)</a:t>
+            </a:r>
+            <a:endParaRPr lang="en-IL" dirty="0"/>
+          </a:p>
+        </p:txBody>
+      </p:sp>
       <p:pic>
         <p:nvPicPr>
-          <p:cNvPr id="6" name="Picture 5">
-            <a:extLst>
-              <a:ext uri="{FF2B5EF4-FFF2-40B4-BE49-F238E27FC236}">
-                <a16:creationId xmlns:a16="http://schemas.microsoft.com/office/drawing/2014/main" id="{13C9E28F-DC9E-6200-BAA1-F36B99B4891A}"/>
+          <p:cNvPr id="7" name="Picture 6">
+            <a:extLst>
+              <a:ext uri="{FF2B5EF4-FFF2-40B4-BE49-F238E27FC236}">
+                <a16:creationId xmlns:a16="http://schemas.microsoft.com/office/drawing/2014/main" id="{1CCF4D89-8A67-D062-EBBF-D4F074BB939C}"/>
               </a:ext>
             </a:extLst>
           </p:cNvPr>
@@ -14184,8 +10954,8 @@
         </p:blipFill>
         <p:spPr>
           <a:xfrm>
-            <a:off x="506934" y="1719075"/>
-            <a:ext cx="5466053" cy="2599358"/>
+            <a:off x="506933" y="1725312"/>
+            <a:ext cx="5341739" cy="2602386"/>
           </a:xfrm>
           <a:prstGeom prst="rect">
             <a:avLst/>
@@ -14194,10 +10964,10 @@
       </p:pic>
       <p:pic>
         <p:nvPicPr>
-          <p:cNvPr id="13" name="Picture 12">
-            <a:extLst>
-              <a:ext uri="{FF2B5EF4-FFF2-40B4-BE49-F238E27FC236}">
-                <a16:creationId xmlns:a16="http://schemas.microsoft.com/office/drawing/2014/main" id="{DD6B1B65-55BB-6D43-1801-5D099F729242}"/>
+          <p:cNvPr id="10" name="Picture 9">
+            <a:extLst>
+              <a:ext uri="{FF2B5EF4-FFF2-40B4-BE49-F238E27FC236}">
+                <a16:creationId xmlns:a16="http://schemas.microsoft.com/office/drawing/2014/main" id="{C1902111-6A7F-86D4-745C-8BEF6E3D0A09}"/>
               </a:ext>
             </a:extLst>
           </p:cNvPr>
@@ -14214,8 +10984,8 @@
         </p:blipFill>
         <p:spPr>
           <a:xfrm>
-            <a:off x="6488767" y="1719074"/>
-            <a:ext cx="5532904" cy="2595117"/>
+            <a:off x="6386964" y="1725311"/>
+            <a:ext cx="5341739" cy="2602387"/>
           </a:xfrm>
           <a:prstGeom prst="rect">
             <a:avLst/>
@@ -14224,46 +10994,10 @@
       </p:pic>
       <p:sp>
         <p:nvSpPr>
-          <p:cNvPr id="2" name="Title 1">
-            <a:extLst>
-              <a:ext uri="{FF2B5EF4-FFF2-40B4-BE49-F238E27FC236}">
-                <a16:creationId xmlns:a16="http://schemas.microsoft.com/office/drawing/2014/main" id="{C6B270F8-B3F6-1AF9-44CF-5C1D6F496BAA}"/>
-              </a:ext>
-            </a:extLst>
-          </p:cNvPr>
-          <p:cNvSpPr>
-            <a:spLocks noGrp="1"/>
-          </p:cNvSpPr>
-          <p:nvPr>
-            <p:ph type="title"/>
-          </p:nvPr>
-        </p:nvSpPr>
-        <p:spPr/>
-        <p:txBody>
-          <a:bodyPr/>
-          <a:lstStyle/>
-          <a:p>
-            <a:r>
-              <a:rPr lang="en-GB" dirty="0"/>
-              <a:t>H1 (Dense Community Hypothesis)</a:t>
-            </a:r>
-            <a:br>
-              <a:rPr lang="en-GB" dirty="0"/>
-            </a:br>
-            <a:r>
-              <a:rPr lang="en-GB" sz="2400" dirty="0"/>
-              <a:t>20 bins</a:t>
-            </a:r>
-            <a:endParaRPr lang="en-IL" sz="2400" dirty="0"/>
-          </a:p>
-        </p:txBody>
-      </p:sp>
-      <p:sp>
-        <p:nvSpPr>
           <p:cNvPr id="3" name="Content Placeholder 2">
             <a:extLst>
               <a:ext uri="{FF2B5EF4-FFF2-40B4-BE49-F238E27FC236}">
-                <a16:creationId xmlns:a16="http://schemas.microsoft.com/office/drawing/2014/main" id="{AC879777-0C37-4726-6532-D55678A507CC}"/>
+                <a16:creationId xmlns:a16="http://schemas.microsoft.com/office/drawing/2014/main" id="{A5C7708B-BBF5-B023-9E60-48D8195BE69B}"/>
               </a:ext>
             </a:extLst>
           </p:cNvPr>
@@ -14308,7 +11042,7 @@
           <p:cNvPr id="4" name="Slide Number Placeholder 3">
             <a:extLst>
               <a:ext uri="{FF2B5EF4-FFF2-40B4-BE49-F238E27FC236}">
-                <a16:creationId xmlns:a16="http://schemas.microsoft.com/office/drawing/2014/main" id="{B9229D34-003B-6A59-7431-DAD3E9A3006C}"/>
+                <a16:creationId xmlns:a16="http://schemas.microsoft.com/office/drawing/2014/main" id="{D1F05FAD-2A0B-E49B-2DDF-1D7EC792A24B}"/>
               </a:ext>
             </a:extLst>
           </p:cNvPr>
@@ -14334,10 +11068,10 @@
       </p:sp>
       <p:pic>
         <p:nvPicPr>
-          <p:cNvPr id="22" name="Picture 21">
-            <a:extLst>
-              <a:ext uri="{FF2B5EF4-FFF2-40B4-BE49-F238E27FC236}">
-                <a16:creationId xmlns:a16="http://schemas.microsoft.com/office/drawing/2014/main" id="{5D5307EF-BD5B-AB5C-BEF8-4DC6964981FB}"/>
+          <p:cNvPr id="12" name="Picture 11">
+            <a:extLst>
+              <a:ext uri="{FF2B5EF4-FFF2-40B4-BE49-F238E27FC236}">
+                <a16:creationId xmlns:a16="http://schemas.microsoft.com/office/drawing/2014/main" id="{482664B2-B8A2-28AB-6C23-33AD907AE85F}"/>
               </a:ext>
             </a:extLst>
           </p:cNvPr>
@@ -14347,21 +11081,15 @@
           <p:nvPr/>
         </p:nvPicPr>
         <p:blipFill>
-          <a:blip r:embed="rId4">
-            <a:extLst>
-              <a:ext uri="{28A0092B-C50C-407E-A947-70E740481C1C}">
-                <a14:useLocalDpi xmlns:a14="http://schemas.microsoft.com/office/drawing/2010/main" val="0"/>
-              </a:ext>
-            </a:extLst>
-          </a:blip>
+          <a:blip r:embed="rId4"/>
           <a:stretch>
             <a:fillRect/>
           </a:stretch>
         </p:blipFill>
         <p:spPr>
           <a:xfrm>
-            <a:off x="3896648" y="4506141"/>
-            <a:ext cx="4935991" cy="2271429"/>
+            <a:off x="3923366" y="4327698"/>
+            <a:ext cx="4891351" cy="2432305"/>
           </a:xfrm>
           <a:prstGeom prst="rect">
             <a:avLst/>
@@ -14373,7 +11101,7 @@
           <p:cNvPr id="15" name="Rectangle 14">
             <a:extLst>
               <a:ext uri="{FF2B5EF4-FFF2-40B4-BE49-F238E27FC236}">
-                <a16:creationId xmlns:a16="http://schemas.microsoft.com/office/drawing/2014/main" id="{98B6C14E-F690-48FF-9517-8FD655C6A719}"/>
+                <a16:creationId xmlns:a16="http://schemas.microsoft.com/office/drawing/2014/main" id="{F15FE9DF-CB6E-AF2A-8056-A91278FA84AA}"/>
               </a:ext>
             </a:extLst>
           </p:cNvPr>
@@ -14382,7 +11110,7 @@
         </p:nvSpPr>
         <p:spPr>
           <a:xfrm>
-            <a:off x="6906644" y="6433789"/>
+            <a:off x="6899024" y="6456649"/>
             <a:ext cx="408562" cy="130704"/>
           </a:xfrm>
           <a:prstGeom prst="rect">
@@ -14423,7 +11151,7 @@
           <p:cNvPr id="16" name="Rectangle 15">
             <a:extLst>
               <a:ext uri="{FF2B5EF4-FFF2-40B4-BE49-F238E27FC236}">
-                <a16:creationId xmlns:a16="http://schemas.microsoft.com/office/drawing/2014/main" id="{33702C44-0199-6724-A882-0A681319013E}"/>
+                <a16:creationId xmlns:a16="http://schemas.microsoft.com/office/drawing/2014/main" id="{D208A51A-3852-434B-8630-2873F7249398}"/>
               </a:ext>
             </a:extLst>
           </p:cNvPr>
@@ -14432,7 +11160,7 @@
         </p:nvSpPr>
         <p:spPr>
           <a:xfrm>
-            <a:off x="4899494" y="6440275"/>
+            <a:off x="4952834" y="6463135"/>
             <a:ext cx="408562" cy="130704"/>
           </a:xfrm>
           <a:prstGeom prst="rect">
@@ -14473,7 +11201,7 @@
           <p:cNvPr id="17" name="TextBox 16">
             <a:extLst>
               <a:ext uri="{FF2B5EF4-FFF2-40B4-BE49-F238E27FC236}">
-                <a16:creationId xmlns:a16="http://schemas.microsoft.com/office/drawing/2014/main" id="{F641AECF-4B97-AEA4-D54F-76B61829D5B7}"/>
+                <a16:creationId xmlns:a16="http://schemas.microsoft.com/office/drawing/2014/main" id="{4BD590EB-1027-6A6B-5879-1EF12319137B}"/>
               </a:ext>
             </a:extLst>
           </p:cNvPr>
@@ -14504,10 +11232,51 @@
           </a:p>
         </p:txBody>
       </p:sp>
+      <p:sp>
+        <p:nvSpPr>
+          <p:cNvPr id="5" name="TextBox 4">
+            <a:extLst>
+              <a:ext uri="{FF2B5EF4-FFF2-40B4-BE49-F238E27FC236}">
+                <a16:creationId xmlns:a16="http://schemas.microsoft.com/office/drawing/2014/main" id="{6075DE13-12C6-7928-ACF6-3FB80EAFF854}"/>
+              </a:ext>
+            </a:extLst>
+          </p:cNvPr>
+          <p:cNvSpPr txBox="1"/>
+          <p:nvPr/>
+        </p:nvSpPr>
+        <p:spPr>
+          <a:xfrm>
+            <a:off x="5157115" y="1456291"/>
+            <a:ext cx="2214283" cy="369332"/>
+          </a:xfrm>
+          <a:prstGeom prst="rect">
+            <a:avLst/>
+          </a:prstGeom>
+          <a:noFill/>
+        </p:spPr>
+        <p:txBody>
+          <a:bodyPr wrap="square" rtlCol="0">
+            <a:spAutoFit/>
+          </a:bodyPr>
+          <a:lstStyle/>
+          <a:p>
+            <a:pPr algn="ctr"/>
+            <a:r>
+              <a:rPr lang="en-US" dirty="0"/>
+              <a:t>Ecuador </a:t>
+            </a:r>
+            <a:r>
+              <a:rPr lang="en-GB" dirty="0"/>
+              <a:t>Campaigns</a:t>
+            </a:r>
+            <a:endParaRPr lang="en-IL" dirty="0"/>
+          </a:p>
+        </p:txBody>
+      </p:sp>
     </p:spTree>
     <p:extLst>
       <p:ext uri="{BB962C8B-B14F-4D97-AF65-F5344CB8AC3E}">
-        <p14:creationId xmlns:p14="http://schemas.microsoft.com/office/powerpoint/2010/main" val="486872823"/>
+        <p14:creationId xmlns:p14="http://schemas.microsoft.com/office/powerpoint/2010/main" val="93455988"/>
       </p:ext>
     </p:extLst>
   </p:cSld>
@@ -15312,7 +12081,7 @@
         </p:spPr>
         <p:txBody>
           <a:bodyPr>
-            <a:normAutofit fontScale="92500" lnSpcReduction="10000"/>
+            <a:normAutofit lnSpcReduction="10000"/>
           </a:bodyPr>
           <a:lstStyle/>
           <a:p>
@@ -15365,7 +12134,7 @@
             </a:pPr>
             <a:r>
               <a:rPr lang="en-GB" dirty="0"/>
-              <a:t>Graph type (directed / undirected)</a:t>
+              <a:t>Graph type: undirected</a:t>
             </a:r>
           </a:p>
           <a:p>
@@ -15407,36 +12176,8 @@
           <a:p>
             <a:r>
               <a:rPr lang="en-GB" dirty="0"/>
-              <a:t>AUC is computed for two populations</a:t>
-            </a:r>
-            <a:r>
-              <a:rPr lang="he-IL" dirty="0"/>
-              <a:t>/</a:t>
-            </a:r>
-            <a:r>
-              <a:rPr lang="en-GB" dirty="0"/>
-              <a:t>universe: </a:t>
-            </a:r>
-          </a:p>
-          <a:p>
-            <a:pPr lvl="1"/>
-            <a:r>
-              <a:rPr lang="en-GB" dirty="0"/>
-              <a:t>Key authors - accounts in the filtered graph (key authors + boost authors).</a:t>
-            </a:r>
-          </a:p>
-          <a:p>
-            <a:pPr lvl="1"/>
-            <a:r>
-              <a:rPr lang="en-GB" dirty="0"/>
-              <a:t>All authors - all accounts in dataset (missing authors filled with zero features).</a:t>
-            </a:r>
-          </a:p>
-          <a:p>
-            <a:pPr marL="457200" lvl="1" indent="0">
-              <a:buNone/>
-            </a:pPr>
-            <a:endParaRPr lang="en-GB" dirty="0"/>
+              <a:t>AUC is evaluated on all accounts, with non-key authors represented by zero-filled features.</a:t>
+            </a:r>
           </a:p>
         </p:txBody>
       </p:sp>
@@ -15573,7 +12314,7 @@
         <p:cNvPr id="1" name="">
           <a:extLst>
             <a:ext uri="{FF2B5EF4-FFF2-40B4-BE49-F238E27FC236}">
-              <a16:creationId xmlns:a16="http://schemas.microsoft.com/office/drawing/2014/main" id="{011FBC96-B8B6-8D83-4AF3-948D70C04F9D}"/>
+              <a16:creationId xmlns:a16="http://schemas.microsoft.com/office/drawing/2014/main" id="{B780B7EA-2EF3-D3BD-B14C-51D2878133A9}"/>
             </a:ext>
           </a:extLst>
         </p:cNvPr>
@@ -15593,7 +12334,7 @@
           <p:cNvPr id="2" name="Title 1">
             <a:extLst>
               <a:ext uri="{FF2B5EF4-FFF2-40B4-BE49-F238E27FC236}">
-                <a16:creationId xmlns:a16="http://schemas.microsoft.com/office/drawing/2014/main" id="{F1953AB6-7C41-BC86-A2FA-468C7C4E73A8}"/>
+                <a16:creationId xmlns:a16="http://schemas.microsoft.com/office/drawing/2014/main" id="{DF00DF4C-7F31-AD30-415C-5E89437E7DC1}"/>
               </a:ext>
             </a:extLst>
           </p:cNvPr>
@@ -15616,77 +12357,101 @@
           </a:p>
         </p:txBody>
       </p:sp>
+      <p:sp>
+        <p:nvSpPr>
+          <p:cNvPr id="4" name="Slide Number Placeholder 3">
+            <a:extLst>
+              <a:ext uri="{FF2B5EF4-FFF2-40B4-BE49-F238E27FC236}">
+                <a16:creationId xmlns:a16="http://schemas.microsoft.com/office/drawing/2014/main" id="{E742ED2C-272A-72FB-DC60-86CF323A7986}"/>
+              </a:ext>
+            </a:extLst>
+          </p:cNvPr>
+          <p:cNvSpPr>
+            <a:spLocks noGrp="1"/>
+          </p:cNvSpPr>
+          <p:nvPr>
+            <p:ph type="sldNum" sz="quarter" idx="12"/>
+          </p:nvPr>
+        </p:nvSpPr>
+        <p:spPr/>
+        <p:txBody>
+          <a:bodyPr/>
+          <a:lstStyle/>
+          <a:p>
+            <a:fld id="{E6AB8EDD-9EF2-4633-A1C2-4D908C1019B4}" type="slidenum">
+              <a:rPr lang="he-IL" smtClean="0"/>
+              <a:t>25</a:t>
+            </a:fld>
+            <a:endParaRPr lang="he-IL"/>
+          </a:p>
+        </p:txBody>
+      </p:sp>
       <p:pic>
         <p:nvPicPr>
-          <p:cNvPr id="6" name="Content Placeholder 5">
-            <a:extLst>
-              <a:ext uri="{FF2B5EF4-FFF2-40B4-BE49-F238E27FC236}">
-                <a16:creationId xmlns:a16="http://schemas.microsoft.com/office/drawing/2014/main" id="{2C6D5AE7-AEBB-1627-0266-1D325F60F292}"/>
+          <p:cNvPr id="8" name="Picture 7">
+            <a:extLst>
+              <a:ext uri="{FF2B5EF4-FFF2-40B4-BE49-F238E27FC236}">
+                <a16:creationId xmlns:a16="http://schemas.microsoft.com/office/drawing/2014/main" id="{DE302E94-EC5C-6B79-D177-461BAF11511E}"/>
               </a:ext>
             </a:extLst>
           </p:cNvPr>
           <p:cNvPicPr>
-            <a:picLocks noGrp="1" noChangeAspect="1"/>
+            <a:picLocks noChangeAspect="1"/>
           </p:cNvPicPr>
-          <p:nvPr>
-            <p:ph idx="1"/>
-          </p:nvPr>
+          <p:nvPr/>
         </p:nvPicPr>
         <p:blipFill>
-          <a:blip r:embed="rId2">
-            <a:extLst>
-              <a:ext uri="{28A0092B-C50C-407E-A947-70E740481C1C}">
-                <a14:useLocalDpi xmlns:a14="http://schemas.microsoft.com/office/drawing/2010/main" val="0"/>
-              </a:ext>
-            </a:extLst>
-          </a:blip>
+          <a:blip r:embed="rId2"/>
+          <a:srcRect r="16139"/>
           <a:stretch>
             <a:fillRect/>
           </a:stretch>
         </p:blipFill>
         <p:spPr>
           <a:xfrm>
-            <a:off x="1775663" y="1508964"/>
-            <a:ext cx="9659254" cy="4801346"/>
+            <a:off x="2824658" y="1469204"/>
+            <a:ext cx="6222065" cy="5064179"/>
           </a:xfrm>
           <a:prstGeom prst="rect">
             <a:avLst/>
           </a:prstGeom>
         </p:spPr>
       </p:pic>
-      <p:sp>
-        <p:nvSpPr>
-          <p:cNvPr id="4" name="Slide Number Placeholder 3">
-            <a:extLst>
-              <a:ext uri="{FF2B5EF4-FFF2-40B4-BE49-F238E27FC236}">
-                <a16:creationId xmlns:a16="http://schemas.microsoft.com/office/drawing/2014/main" id="{66D98692-CDEA-CEE4-3068-F43DA574ECFA}"/>
-              </a:ext>
-            </a:extLst>
-          </p:cNvPr>
-          <p:cNvSpPr>
-            <a:spLocks noGrp="1"/>
-          </p:cNvSpPr>
-          <p:nvPr>
-            <p:ph type="sldNum" sz="quarter" idx="12"/>
-          </p:nvPr>
-        </p:nvSpPr>
-        <p:spPr/>
-        <p:txBody>
-          <a:bodyPr/>
-          <a:lstStyle/>
-          <a:p>
-            <a:fld id="{E6AB8EDD-9EF2-4633-A1C2-4D908C1019B4}" type="slidenum">
-              <a:rPr lang="he-IL" smtClean="0"/>
-              <a:t>25</a:t>
-            </a:fld>
-            <a:endParaRPr lang="he-IL"/>
-          </a:p>
-        </p:txBody>
-      </p:sp>
+      <p:pic>
+        <p:nvPicPr>
+          <p:cNvPr id="9" name="Picture 8">
+            <a:extLst>
+              <a:ext uri="{FF2B5EF4-FFF2-40B4-BE49-F238E27FC236}">
+                <a16:creationId xmlns:a16="http://schemas.microsoft.com/office/drawing/2014/main" id="{4B11BAEE-8A5E-89B3-73C8-F78F5D853611}"/>
+              </a:ext>
+            </a:extLst>
+          </p:cNvPr>
+          <p:cNvPicPr>
+            <a:picLocks noChangeAspect="1"/>
+          </p:cNvPicPr>
+          <p:nvPr/>
+        </p:nvPicPr>
+        <p:blipFill>
+          <a:blip r:embed="rId2"/>
+          <a:srcRect l="83905" b="47178"/>
+          <a:stretch>
+            <a:fillRect/>
+          </a:stretch>
+        </p:blipFill>
+        <p:spPr>
+          <a:xfrm>
+            <a:off x="9096228" y="1679705"/>
+            <a:ext cx="1194205" cy="2675006"/>
+          </a:xfrm>
+          <a:prstGeom prst="rect">
+            <a:avLst/>
+          </a:prstGeom>
+        </p:spPr>
+      </p:pic>
     </p:spTree>
     <p:extLst>
       <p:ext uri="{BB962C8B-B14F-4D97-AF65-F5344CB8AC3E}">
-        <p14:creationId xmlns:p14="http://schemas.microsoft.com/office/powerpoint/2010/main" val="1015319757"/>
+        <p14:creationId xmlns:p14="http://schemas.microsoft.com/office/powerpoint/2010/main" val="4229137763"/>
       </p:ext>
     </p:extLst>
   </p:cSld>
@@ -15697,149 +12462,6 @@
 </file>
 
 <file path=ppt/slides/slide26.xml><?xml version="1.0" encoding="utf-8"?>
-<p:sld xmlns:a="http://schemas.openxmlformats.org/drawingml/2006/main" xmlns:r="http://schemas.openxmlformats.org/officeDocument/2006/relationships" xmlns:p="http://schemas.openxmlformats.org/presentationml/2006/main">
-  <p:cSld>
-    <p:spTree>
-      <p:nvGrpSpPr>
-        <p:cNvPr id="1" name=""/>
-        <p:cNvGrpSpPr/>
-        <p:nvPr/>
-      </p:nvGrpSpPr>
-      <p:grpSpPr>
-        <a:xfrm>
-          <a:off x="0" y="0"/>
-          <a:ext cx="0" cy="0"/>
-          <a:chOff x="0" y="0"/>
-          <a:chExt cx="0" cy="0"/>
-        </a:xfrm>
-      </p:grpSpPr>
-      <p:sp>
-        <p:nvSpPr>
-          <p:cNvPr id="2" name="Title 1">
-            <a:extLst>
-              <a:ext uri="{FF2B5EF4-FFF2-40B4-BE49-F238E27FC236}">
-                <a16:creationId xmlns:a16="http://schemas.microsoft.com/office/drawing/2014/main" id="{01813540-AC2F-BBC9-B8D2-C3B7CEFD462A}"/>
-              </a:ext>
-            </a:extLst>
-          </p:cNvPr>
-          <p:cNvSpPr>
-            <a:spLocks noGrp="1"/>
-          </p:cNvSpPr>
-          <p:nvPr>
-            <p:ph type="title"/>
-          </p:nvPr>
-        </p:nvSpPr>
-        <p:spPr>
-          <a:xfrm>
-            <a:off x="3072268" y="401637"/>
-            <a:ext cx="8753475" cy="1325563"/>
-          </a:xfrm>
-        </p:spPr>
-        <p:txBody>
-          <a:bodyPr anchor="ctr">
-            <a:normAutofit/>
-          </a:bodyPr>
-          <a:lstStyle/>
-          <a:p>
-            <a:r>
-              <a:rPr lang="en-GB" dirty="0"/>
-              <a:t>Final Configuration</a:t>
-            </a:r>
-            <a:endParaRPr lang="en-IL" dirty="0"/>
-          </a:p>
-        </p:txBody>
-      </p:sp>
-      <p:sp>
-        <p:nvSpPr>
-          <p:cNvPr id="4" name="Slide Number Placeholder 3">
-            <a:extLst>
-              <a:ext uri="{FF2B5EF4-FFF2-40B4-BE49-F238E27FC236}">
-                <a16:creationId xmlns:a16="http://schemas.microsoft.com/office/drawing/2014/main" id="{2C896199-A430-7029-57F9-FA3DFDA71016}"/>
-              </a:ext>
-            </a:extLst>
-          </p:cNvPr>
-          <p:cNvSpPr>
-            <a:spLocks noGrp="1"/>
-          </p:cNvSpPr>
-          <p:nvPr>
-            <p:ph type="sldNum" sz="quarter" idx="12"/>
-          </p:nvPr>
-        </p:nvSpPr>
-        <p:spPr>
-          <a:xfrm>
-            <a:off x="11728704" y="6464649"/>
-            <a:ext cx="452233" cy="365125"/>
-          </a:xfrm>
-        </p:spPr>
-        <p:txBody>
-          <a:bodyPr anchor="ctr">
-            <a:normAutofit/>
-          </a:bodyPr>
-          <a:lstStyle/>
-          <a:p>
-            <a:pPr>
-              <a:spcAft>
-                <a:spcPts val="600"/>
-              </a:spcAft>
-            </a:pPr>
-            <a:fld id="{E6AB8EDD-9EF2-4633-A1C2-4D908C1019B4}" type="slidenum">
-              <a:rPr lang="he-IL" smtClean="0"/>
-              <a:pPr>
-                <a:spcAft>
-                  <a:spcPts val="600"/>
-                </a:spcAft>
-              </a:pPr>
-              <a:t>26</a:t>
-            </a:fld>
-            <a:endParaRPr lang="he-IL"/>
-          </a:p>
-        </p:txBody>
-      </p:sp>
-      <p:graphicFrame>
-        <p:nvGraphicFramePr>
-          <p:cNvPr id="6" name="Content Placeholder 2">
-            <a:extLst>
-              <a:ext uri="{FF2B5EF4-FFF2-40B4-BE49-F238E27FC236}">
-                <a16:creationId xmlns:a16="http://schemas.microsoft.com/office/drawing/2014/main" id="{76F6AAC4-42BF-AB04-3506-62B2CC07F58D}"/>
-              </a:ext>
-            </a:extLst>
-          </p:cNvPr>
-          <p:cNvGraphicFramePr>
-            <a:graphicFrameLocks noGrp="1"/>
-          </p:cNvGraphicFramePr>
-          <p:nvPr>
-            <p:ph idx="1"/>
-            <p:extLst>
-              <p:ext uri="{D42A27DB-BD31-4B8C-83A1-F6EECF244321}">
-                <p14:modId xmlns:p14="http://schemas.microsoft.com/office/powerpoint/2010/main" val="3990034716"/>
-              </p:ext>
-            </p:extLst>
-          </p:nvPr>
-        </p:nvGraphicFramePr>
-        <p:xfrm>
-          <a:off x="1243087" y="1825625"/>
-          <a:ext cx="10582656" cy="4351338"/>
-        </p:xfrm>
-        <a:graphic>
-          <a:graphicData uri="http://schemas.openxmlformats.org/drawingml/2006/diagram">
-            <dgm:relIds xmlns:dgm="http://schemas.openxmlformats.org/drawingml/2006/diagram" xmlns:r="http://schemas.openxmlformats.org/officeDocument/2006/relationships" r:dm="rId2" r:lo="rId3" r:qs="rId4" r:cs="rId5"/>
-          </a:graphicData>
-        </a:graphic>
-      </p:graphicFrame>
-    </p:spTree>
-    <p:extLst>
-      <p:ext uri="{BB962C8B-B14F-4D97-AF65-F5344CB8AC3E}">
-        <p14:creationId xmlns:p14="http://schemas.microsoft.com/office/powerpoint/2010/main" val="1196613578"/>
-      </p:ext>
-    </p:extLst>
-  </p:cSld>
-  <p:clrMapOvr>
-    <a:masterClrMapping/>
-  </p:clrMapOvr>
-</p:sld>
-</file>
-
-<file path=ppt/slides/slide27.xml><?xml version="1.0" encoding="utf-8"?>
 <p:sld xmlns:a="http://schemas.openxmlformats.org/drawingml/2006/main" xmlns:r="http://schemas.openxmlformats.org/officeDocument/2006/relationships" xmlns:p="http://schemas.openxmlformats.org/presentationml/2006/main">
   <p:cSld>
     <p:spTree>
@@ -15944,7 +12566,7 @@
           <a:p>
             <a:fld id="{E6AB8EDD-9EF2-4633-A1C2-4D908C1019B4}" type="slidenum">
               <a:rPr lang="he-IL" smtClean="0"/>
-              <a:t>27</a:t>
+              <a:t>26</a:t>
             </a:fld>
             <a:endParaRPr lang="he-IL"/>
           </a:p>
@@ -15963,7 +12585,7 @@
 </p:sld>
 </file>
 
-<file path=ppt/slides/slide28.xml><?xml version="1.0" encoding="utf-8"?>
+<file path=ppt/slides/slide27.xml><?xml version="1.0" encoding="utf-8"?>
 <p:sld xmlns:a="http://schemas.openxmlformats.org/drawingml/2006/main" xmlns:r="http://schemas.openxmlformats.org/officeDocument/2006/relationships" xmlns:p="http://schemas.openxmlformats.org/presentationml/2006/main">
   <p:cSld>
     <p:spTree>
@@ -16046,7 +12668,7 @@
           <a:p>
             <a:r>
               <a:rPr lang="en-GB" dirty="0"/>
-              <a:t>Required Columns</a:t>
+              <a:t>Schema</a:t>
             </a:r>
             <a:endParaRPr lang="en-IL" dirty="0"/>
           </a:p>
@@ -16075,7 +12697,7 @@
           <a:p>
             <a:fld id="{E6AB8EDD-9EF2-4633-A1C2-4D908C1019B4}" type="slidenum">
               <a:rPr lang="he-IL" smtClean="0"/>
-              <a:t>28</a:t>
+              <a:t>27</a:t>
             </a:fld>
             <a:endParaRPr lang="he-IL"/>
           </a:p>
@@ -16367,7 +12989,7 @@
 </p:sld>
 </file>
 
-<file path=ppt/slides/slide29.xml><?xml version="1.0" encoding="utf-8"?>
+<file path=ppt/slides/slide28.xml><?xml version="1.0" encoding="utf-8"?>
 <p:sld xmlns:a="http://schemas.openxmlformats.org/drawingml/2006/main" xmlns:r="http://schemas.openxmlformats.org/officeDocument/2006/relationships" xmlns:p="http://schemas.openxmlformats.org/presentationml/2006/main">
   <p:cSld>
     <p:spTree>
@@ -16442,7 +13064,7 @@
           <a:p>
             <a:fld id="{E6AB8EDD-9EF2-4633-A1C2-4D908C1019B4}" type="slidenum">
               <a:rPr lang="he-IL" smtClean="0"/>
-              <a:t>29</a:t>
+              <a:t>28</a:t>
             </a:fld>
             <a:endParaRPr lang="he-IL"/>
           </a:p>
